--- a/outputs/anbima_executivo_1s26/ANBIMA_Itau_BBA_Renda_Fixa_1S26.pptx
+++ b/outputs/anbima_executivo_1s26/ANBIMA_Itau_BBA_Renda_Fixa_1S26.pptx
@@ -6137,7 +6137,7 @@
               </a:defRPr>
             </a:pPr>
             <a:r>
-              <a:t>Arquivos-fonte (SHA-256): Ranking 93dd6fcbf40e · Anexo 9adb22cac2af</a:t>
+              <a:t>Arquivos-fonte (SHA-256): Ranking 5e6173ca8f6d · Anexo 9adb22cac2af</a:t>
             </a:r>
           </a:p>
         </p:txBody>

--- a/outputs/anbima_executivo_1s26/ANBIMA_Itau_BBA_Renda_Fixa_1S26.pptx
+++ b/outputs/anbima_executivo_1s26/ANBIMA_Itau_BBA_Renda_Fixa_1S26.pptx
@@ -16,6 +16,8 @@
     <p:sldId id="264" r:id="rId15"/>
     <p:sldId id="265" r:id="rId16"/>
     <p:sldId id="266" r:id="rId17"/>
+    <p:sldId id="267" r:id="rId18"/>
+    <p:sldId id="268" r:id="rId19"/>
   </p:sldIdLst>
   <p:sldSz cx="12191695" cy="6858000" type="screen4x3"/>
   <p:notesSz cx="6858000" cy="9144000"/>
@@ -4442,6 +4444,7021 @@
               </a:defRPr>
             </a:pPr>
             <a:r>
+              <a:t>Top FIDCs Middle | jan–jun/26</a:t>
+            </a:r>
+          </a:p>
+        </p:txBody>
+      </p:sp>
+      <p:sp>
+        <p:nvSpPr>
+          <p:cNvPr id="4" name="Rectangle 3"/>
+          <p:cNvSpPr/>
+          <p:nvPr/>
+        </p:nvSpPr>
+        <p:spPr>
+          <a:xfrm>
+            <a:off x="566928" y="1051560"/>
+            <a:ext cx="11018520" cy="16459"/>
+          </a:xfrm>
+          <a:prstGeom prst="rect">
+            <a:avLst/>
+          </a:prstGeom>
+          <a:solidFill>
+            <a:srgbClr val="D7DADD"/>
+          </a:solidFill>
+          <a:ln>
+            <a:noFill/>
+          </a:ln>
+        </p:spPr>
+        <p:style>
+          <a:lnRef idx="1">
+            <a:schemeClr val="accent1"/>
+          </a:lnRef>
+          <a:fillRef idx="3">
+            <a:schemeClr val="accent1"/>
+          </a:fillRef>
+          <a:effectRef idx="2">
+            <a:schemeClr val="accent1"/>
+          </a:effectRef>
+          <a:fontRef idx="minor">
+            <a:schemeClr val="lt1"/>
+          </a:fontRef>
+        </p:style>
+        <p:txBody>
+          <a:bodyPr rtlCol="0" anchor="ctr"/>
+          <a:lstStyle/>
+          <a:p>
+            <a:pPr algn="ctr"/>
+          </a:p>
+        </p:txBody>
+      </p:sp>
+      <p:sp>
+        <p:nvSpPr>
+          <p:cNvPr id="5" name="TextBox 4"/>
+          <p:cNvSpPr txBox="1"/>
+          <p:nvPr/>
+        </p:nvSpPr>
+        <p:spPr>
+          <a:xfrm>
+            <a:off x="566928" y="1097280"/>
+            <a:ext cx="5486400" cy="201168"/>
+          </a:xfrm>
+          <a:prstGeom prst="rect">
+            <a:avLst/>
+          </a:prstGeom>
+          <a:noFill/>
+        </p:spPr>
+        <p:txBody>
+          <a:bodyPr wrap="square" anchor="t" lIns="0" rIns="0" tIns="0" bIns="0">
+            <a:spAutoFit/>
+          </a:bodyPr>
+          <a:lstStyle/>
+          <a:p>
+            <a:pPr algn="l">
+              <a:defRPr sz="1000" b="1">
+                <a:solidFill>
+                  <a:srgbClr val="E36C0A"/>
+                </a:solidFill>
+                <a:latin typeface="Arial"/>
+              </a:defRPr>
+            </a:pPr>
+            <a:r>
+              <a:t>TOP 16 POR VOLUME CEDIDO NO PERÍODO</a:t>
+            </a:r>
+          </a:p>
+        </p:txBody>
+      </p:sp>
+      <p:graphicFrame>
+        <p:nvGraphicFramePr>
+          <p:cNvPr id="6" name="Table 5"/>
+          <p:cNvGraphicFramePr>
+            <a:graphicFrameLocks noGrp="1"/>
+          </p:cNvGraphicFramePr>
+          <p:nvPr/>
+        </p:nvGraphicFramePr>
+        <p:xfrm>
+          <a:off x="566928" y="1335024"/>
+          <a:ext cx="11018519" cy="4343400"/>
+        </p:xfrm>
+        <a:graphic>
+          <a:graphicData uri="http://schemas.openxmlformats.org/drawingml/2006/table">
+            <a:tbl>
+              <a:tblPr firstRow="1">
+                <a:tableStyleId>{2D5ABB26-0587-4C30-8999-92F81FD0307C}</a:tableStyleId>
+              </a:tblPr>
+              <a:tblGrid>
+                <a:gridCol w="274320"/>
+                <a:gridCol w="1874519"/>
+                <a:gridCol w="1783080"/>
+                <a:gridCol w="1234440"/>
+                <a:gridCol w="1737360"/>
+                <a:gridCol w="548640"/>
+                <a:gridCol w="1371600"/>
+                <a:gridCol w="822960"/>
+                <a:gridCol w="640080"/>
+                <a:gridCol w="731520"/>
+              </a:tblGrid>
+              <a:tr h="310896">
+                <a:tc>
+                  <a:txBody>
+                    <a:bodyPr/>
+                    <a:lstStyle/>
+                    <a:p>
+                      <a:pPr algn="l"/>
+                      <a:r>
+                        <a:rPr sz="700" b="1">
+                          <a:solidFill>
+                            <a:srgbClr val="FFFFFF"/>
+                          </a:solidFill>
+                          <a:latin typeface="Arial"/>
+                        </a:rPr>
+                        <a:t>#</a:t>
+                      </a:r>
+                    </a:p>
+                  </a:txBody>
+                  <a:tcPr marL="54864" marR="54864" marT="18288" marB="18288" anchor="ctr">
+                    <a:solidFill>
+                      <a:srgbClr val="E36C0A"/>
+                    </a:solidFill>
+                    <a:lnB w="6350" cap="flat">
+                      <a:solidFill>
+                        <a:srgbClr val="D7DADD"/>
+                      </a:solidFill>
+                    </a:lnB>
+                  </a:tcPr>
+                </a:tc>
+                <a:tc>
+                  <a:txBody>
+                    <a:bodyPr/>
+                    <a:lstStyle/>
+                    <a:p>
+                      <a:pPr algn="l"/>
+                      <a:r>
+                        <a:rPr sz="700" b="1">
+                          <a:solidFill>
+                            <a:srgbClr val="FFFFFF"/>
+                          </a:solidFill>
+                          <a:latin typeface="Arial"/>
+                        </a:rPr>
+                        <a:t>FIDC</a:t>
+                      </a:r>
+                    </a:p>
+                  </a:txBody>
+                  <a:tcPr marL="54864" marR="54864" marT="18288" marB="18288" anchor="ctr">
+                    <a:solidFill>
+                      <a:srgbClr val="E36C0A"/>
+                    </a:solidFill>
+                    <a:lnB w="6350" cap="flat">
+                      <a:solidFill>
+                        <a:srgbClr val="D7DADD"/>
+                      </a:solidFill>
+                    </a:lnB>
+                  </a:tcPr>
+                </a:tc>
+                <a:tc>
+                  <a:txBody>
+                    <a:bodyPr/>
+                    <a:lstStyle/>
+                    <a:p>
+                      <a:pPr algn="l"/>
+                      <a:r>
+                        <a:rPr sz="700" b="1">
+                          <a:solidFill>
+                            <a:srgbClr val="FFFFFF"/>
+                          </a:solidFill>
+                          <a:latin typeface="Arial"/>
+                        </a:rPr>
+                        <a:t>Originador¹</a:t>
+                      </a:r>
+                    </a:p>
+                  </a:txBody>
+                  <a:tcPr marL="54864" marR="54864" marT="18288" marB="18288" anchor="ctr">
+                    <a:solidFill>
+                      <a:srgbClr val="E36C0A"/>
+                    </a:solidFill>
+                    <a:lnB w="6350" cap="flat">
+                      <a:solidFill>
+                        <a:srgbClr val="D7DADD"/>
+                      </a:solidFill>
+                    </a:lnB>
+                  </a:tcPr>
+                </a:tc>
+                <a:tc>
+                  <a:txBody>
+                    <a:bodyPr/>
+                    <a:lstStyle/>
+                    <a:p>
+                      <a:pPr algn="l"/>
+                      <a:r>
+                        <a:rPr sz="700" b="1">
+                          <a:solidFill>
+                            <a:srgbClr val="FFFFFF"/>
+                          </a:solidFill>
+                          <a:latin typeface="Arial"/>
+                        </a:rPr>
+                        <a:t>Tipo</a:t>
+                      </a:r>
+                    </a:p>
+                  </a:txBody>
+                  <a:tcPr marL="54864" marR="54864" marT="18288" marB="18288" anchor="ctr">
+                    <a:solidFill>
+                      <a:srgbClr val="E36C0A"/>
+                    </a:solidFill>
+                    <a:lnB w="6350" cap="flat">
+                      <a:solidFill>
+                        <a:srgbClr val="D7DADD"/>
+                      </a:solidFill>
+                    </a:lnB>
+                  </a:tcPr>
+                </a:tc>
+                <a:tc>
+                  <a:txBody>
+                    <a:bodyPr/>
+                    <a:lstStyle/>
+                    <a:p>
+                      <a:pPr algn="l"/>
+                      <a:r>
+                        <a:rPr sz="700" b="1">
+                          <a:solidFill>
+                            <a:srgbClr val="FFFFFF"/>
+                          </a:solidFill>
+                          <a:latin typeface="Arial"/>
+                        </a:rPr>
+                        <a:t>Recebível</a:t>
+                      </a:r>
+                    </a:p>
+                  </a:txBody>
+                  <a:tcPr marL="54864" marR="54864" marT="18288" marB="18288" anchor="ctr">
+                    <a:solidFill>
+                      <a:srgbClr val="E36C0A"/>
+                    </a:solidFill>
+                    <a:lnB w="6350" cap="flat">
+                      <a:solidFill>
+                        <a:srgbClr val="D7DADD"/>
+                      </a:solidFill>
+                    </a:lnB>
+                  </a:tcPr>
+                </a:tc>
+                <a:tc>
+                  <a:txBody>
+                    <a:bodyPr/>
+                    <a:lstStyle/>
+                    <a:p>
+                      <a:pPr algn="r"/>
+                      <a:r>
+                        <a:rPr sz="700" b="1">
+                          <a:solidFill>
+                            <a:srgbClr val="FFFFFF"/>
+                          </a:solidFill>
+                          <a:latin typeface="Arial"/>
+                        </a:rPr>
+                        <a:t>R$ bi</a:t>
+                      </a:r>
+                    </a:p>
+                  </a:txBody>
+                  <a:tcPr marL="54864" marR="54864" marT="18288" marB="18288" anchor="ctr">
+                    <a:solidFill>
+                      <a:srgbClr val="E36C0A"/>
+                    </a:solidFill>
+                    <a:lnB w="6350" cap="flat">
+                      <a:solidFill>
+                        <a:srgbClr val="D7DADD"/>
+                      </a:solidFill>
+                    </a:lnB>
+                  </a:tcPr>
+                </a:tc>
+                <a:tc>
+                  <a:txBody>
+                    <a:bodyPr/>
+                    <a:lstStyle/>
+                    <a:p>
+                      <a:pPr algn="l"/>
+                      <a:r>
+                        <a:rPr sz="700" b="1">
+                          <a:solidFill>
+                            <a:srgbClr val="FFFFFF"/>
+                          </a:solidFill>
+                          <a:latin typeface="Arial"/>
+                        </a:rPr>
+                        <a:t>IBBA Coord?</a:t>
+                      </a:r>
+                    </a:p>
+                  </a:txBody>
+                  <a:tcPr marL="54864" marR="54864" marT="18288" marB="18288" anchor="ctr">
+                    <a:solidFill>
+                      <a:srgbClr val="E36C0A"/>
+                    </a:solidFill>
+                    <a:lnB w="6350" cap="flat">
+                      <a:solidFill>
+                        <a:srgbClr val="D7DADD"/>
+                      </a:solidFill>
+                    </a:lnB>
+                  </a:tcPr>
+                </a:tc>
+                <a:tc>
+                  <a:txBody>
+                    <a:bodyPr/>
+                    <a:lstStyle/>
+                    <a:p>
+                      <a:pPr algn="l"/>
+                      <a:r>
+                        <a:rPr sz="700" b="1">
+                          <a:solidFill>
+                            <a:srgbClr val="FFFFFF"/>
+                          </a:solidFill>
+                          <a:latin typeface="Arial"/>
+                        </a:rPr>
+                        <a:t>Garantia Firme</a:t>
+                      </a:r>
+                    </a:p>
+                  </a:txBody>
+                  <a:tcPr marL="54864" marR="54864" marT="18288" marB="18288" anchor="ctr">
+                    <a:solidFill>
+                      <a:srgbClr val="E36C0A"/>
+                    </a:solidFill>
+                    <a:lnB w="6350" cap="flat">
+                      <a:solidFill>
+                        <a:srgbClr val="D7DADD"/>
+                      </a:solidFill>
+                    </a:lnB>
+                  </a:tcPr>
+                </a:tc>
+                <a:tc>
+                  <a:txBody>
+                    <a:bodyPr/>
+                    <a:lstStyle/>
+                    <a:p>
+                      <a:pPr algn="l"/>
+                      <a:r>
+                        <a:rPr sz="700" b="1">
+                          <a:solidFill>
+                            <a:srgbClr val="FFFFFF"/>
+                          </a:solidFill>
+                          <a:latin typeface="Arial"/>
+                        </a:rPr>
+                        <a:t>Bookamos?</a:t>
+                      </a:r>
+                    </a:p>
+                  </a:txBody>
+                  <a:tcPr marL="54864" marR="54864" marT="18288" marB="18288" anchor="ctr">
+                    <a:solidFill>
+                      <a:srgbClr val="E36C0A"/>
+                    </a:solidFill>
+                    <a:lnB w="6350" cap="flat">
+                      <a:solidFill>
+                        <a:srgbClr val="D7DADD"/>
+                      </a:solidFill>
+                    </a:lnB>
+                  </a:tcPr>
+                </a:tc>
+                <a:tc>
+                  <a:txBody>
+                    <a:bodyPr/>
+                    <a:lstStyle/>
+                    <a:p>
+                      <a:pPr algn="l"/>
+                      <a:r>
+                        <a:rPr sz="700" b="1">
+                          <a:solidFill>
+                            <a:srgbClr val="FFFFFF"/>
+                          </a:solidFill>
+                          <a:latin typeface="Arial"/>
+                        </a:rPr>
+                        <a:t>Risco IBBA</a:t>
+                      </a:r>
+                    </a:p>
+                  </a:txBody>
+                  <a:tcPr marL="54864" marR="54864" marT="18288" marB="18288" anchor="ctr">
+                    <a:solidFill>
+                      <a:srgbClr val="E36C0A"/>
+                    </a:solidFill>
+                    <a:lnB w="6350" cap="flat">
+                      <a:solidFill>
+                        <a:srgbClr val="D7DADD"/>
+                      </a:solidFill>
+                    </a:lnB>
+                  </a:tcPr>
+                </a:tc>
+              </a:tr>
+              <a:tr h="224028">
+                <a:tc>
+                  <a:txBody>
+                    <a:bodyPr/>
+                    <a:lstStyle/>
+                    <a:p>
+                      <a:pPr algn="l"/>
+                      <a:r>
+                        <a:rPr sz="800" b="0">
+                          <a:solidFill>
+                            <a:srgbClr val="30353A"/>
+                          </a:solidFill>
+                          <a:latin typeface="Arial"/>
+                        </a:rPr>
+                        <a:t>1</a:t>
+                      </a:r>
+                    </a:p>
+                  </a:txBody>
+                  <a:tcPr marL="54864" marR="54864" marT="18288" marB="18288" anchor="ctr">
+                    <a:solidFill>
+                      <a:srgbClr val="FFFFFF"/>
+                    </a:solidFill>
+                    <a:lnB w="6350" cap="flat">
+                      <a:solidFill>
+                        <a:srgbClr val="E7E9EB"/>
+                      </a:solidFill>
+                    </a:lnB>
+                  </a:tcPr>
+                </a:tc>
+                <a:tc>
+                  <a:txBody>
+                    <a:bodyPr/>
+                    <a:lstStyle/>
+                    <a:p>
+                      <a:pPr algn="l"/>
+                      <a:r>
+                        <a:rPr sz="800" b="0">
+                          <a:solidFill>
+                            <a:srgbClr val="30353A"/>
+                          </a:solidFill>
+                          <a:latin typeface="Arial"/>
+                        </a:rPr>
+                        <a:t>FIDC 30E</a:t>
+                      </a:r>
+                    </a:p>
+                  </a:txBody>
+                  <a:tcPr marL="54864" marR="54864" marT="18288" marB="18288" anchor="ctr">
+                    <a:solidFill>
+                      <a:srgbClr val="FFFFFF"/>
+                    </a:solidFill>
+                    <a:lnB w="6350" cap="flat">
+                      <a:solidFill>
+                        <a:srgbClr val="E7E9EB"/>
+                      </a:solidFill>
+                    </a:lnB>
+                  </a:tcPr>
+                </a:tc>
+                <a:tc>
+                  <a:txBody>
+                    <a:bodyPr/>
+                    <a:lstStyle/>
+                    <a:p>
+                      <a:pPr algn="l"/>
+                      <a:r>
+                        <a:rPr sz="800" b="0">
+                          <a:solidFill>
+                            <a:srgbClr val="30353A"/>
+                          </a:solidFill>
+                          <a:latin typeface="Arial"/>
+                        </a:rPr>
+                        <a:t>30E</a:t>
+                      </a:r>
+                    </a:p>
+                  </a:txBody>
+                  <a:tcPr marL="54864" marR="54864" marT="18288" marB="18288" anchor="ctr">
+                    <a:solidFill>
+                      <a:srgbClr val="FFFFFF"/>
+                    </a:solidFill>
+                    <a:lnB w="6350" cap="flat">
+                      <a:solidFill>
+                        <a:srgbClr val="E7E9EB"/>
+                      </a:solidFill>
+                    </a:lnB>
+                  </a:tcPr>
+                </a:tc>
+                <a:tc>
+                  <a:txBody>
+                    <a:bodyPr/>
+                    <a:lstStyle/>
+                    <a:p>
+                      <a:pPr algn="l"/>
+                      <a:r>
+                        <a:rPr sz="800" b="0">
+                          <a:solidFill>
+                            <a:srgbClr val="30353A"/>
+                          </a:solidFill>
+                          <a:latin typeface="Arial"/>
+                        </a:rPr>
+                        <a:t>Fomento Mercantil</a:t>
+                      </a:r>
+                    </a:p>
+                  </a:txBody>
+                  <a:tcPr marL="54864" marR="54864" marT="18288" marB="18288" anchor="ctr">
+                    <a:solidFill>
+                      <a:srgbClr val="FFFFFF"/>
+                    </a:solidFill>
+                    <a:lnB w="6350" cap="flat">
+                      <a:solidFill>
+                        <a:srgbClr val="E7E9EB"/>
+                      </a:solidFill>
+                    </a:lnB>
+                  </a:tcPr>
+                </a:tc>
+                <a:tc>
+                  <a:txBody>
+                    <a:bodyPr/>
+                    <a:lstStyle/>
+                    <a:p>
+                      <a:pPr algn="l"/>
+                      <a:r>
+                        <a:rPr sz="800" b="0">
+                          <a:solidFill>
+                            <a:srgbClr val="30353A"/>
+                          </a:solidFill>
+                          <a:latin typeface="Arial"/>
+                        </a:rPr>
+                        <a:t>Fomento Mercantil</a:t>
+                      </a:r>
+                    </a:p>
+                  </a:txBody>
+                  <a:tcPr marL="54864" marR="54864" marT="18288" marB="18288" anchor="ctr">
+                    <a:solidFill>
+                      <a:srgbClr val="FFFFFF"/>
+                    </a:solidFill>
+                    <a:lnB w="6350" cap="flat">
+                      <a:solidFill>
+                        <a:srgbClr val="E7E9EB"/>
+                      </a:solidFill>
+                    </a:lnB>
+                  </a:tcPr>
+                </a:tc>
+                <a:tc>
+                  <a:txBody>
+                    <a:bodyPr/>
+                    <a:lstStyle/>
+                    <a:p>
+                      <a:pPr algn="r"/>
+                      <a:r>
+                        <a:rPr sz="800" b="0">
+                          <a:solidFill>
+                            <a:srgbClr val="30353A"/>
+                          </a:solidFill>
+                          <a:latin typeface="Arial"/>
+                        </a:rPr>
+                        <a:t>0,06</a:t>
+                      </a:r>
+                    </a:p>
+                  </a:txBody>
+                  <a:tcPr marL="54864" marR="54864" marT="18288" marB="18288" anchor="ctr">
+                    <a:solidFill>
+                      <a:srgbClr val="FFFFFF"/>
+                    </a:solidFill>
+                    <a:lnB w="6350" cap="flat">
+                      <a:solidFill>
+                        <a:srgbClr val="E7E9EB"/>
+                      </a:solidFill>
+                    </a:lnB>
+                  </a:tcPr>
+                </a:tc>
+                <a:tc>
+                  <a:txBody>
+                    <a:bodyPr/>
+                    <a:lstStyle/>
+                    <a:p>
+                      <a:pPr algn="l"/>
+                      <a:r>
+                        <a:rPr sz="800" b="0">
+                          <a:solidFill>
+                            <a:srgbClr val="30353A"/>
+                          </a:solidFill>
+                          <a:latin typeface="Arial"/>
+                        </a:rPr>
+                        <a:t>Não – Singulare</a:t>
+                      </a:r>
+                    </a:p>
+                  </a:txBody>
+                  <a:tcPr marL="54864" marR="54864" marT="18288" marB="18288" anchor="ctr">
+                    <a:solidFill>
+                      <a:srgbClr val="FFFFFF"/>
+                    </a:solidFill>
+                    <a:lnB w="6350" cap="flat">
+                      <a:solidFill>
+                        <a:srgbClr val="E7E9EB"/>
+                      </a:solidFill>
+                    </a:lnB>
+                  </a:tcPr>
+                </a:tc>
+                <a:tc>
+                  <a:txBody>
+                    <a:bodyPr/>
+                    <a:lstStyle/>
+                    <a:p>
+                      <a:pPr algn="l"/>
+                      <a:r>
+                        <a:rPr sz="800" b="0">
+                          <a:solidFill>
+                            <a:srgbClr val="30353A"/>
+                          </a:solidFill>
+                          <a:latin typeface="Arial"/>
+                        </a:rPr>
+                        <a:t>Não</a:t>
+                      </a:r>
+                    </a:p>
+                  </a:txBody>
+                  <a:tcPr marL="54864" marR="54864" marT="18288" marB="18288" anchor="ctr">
+                    <a:solidFill>
+                      <a:srgbClr val="FFFFFF"/>
+                    </a:solidFill>
+                    <a:lnB w="6350" cap="flat">
+                      <a:solidFill>
+                        <a:srgbClr val="E7E9EB"/>
+                      </a:solidFill>
+                    </a:lnB>
+                  </a:tcPr>
+                </a:tc>
+                <a:tc>
+                  <a:txBody>
+                    <a:bodyPr/>
+                    <a:lstStyle/>
+                    <a:p>
+                      <a:pPr algn="l"/>
+                      <a:r>
+                        <a:rPr sz="800" b="0">
+                          <a:solidFill>
+                            <a:srgbClr val="30353A"/>
+                          </a:solidFill>
+                          <a:latin typeface="Arial"/>
+                        </a:rPr>
+                        <a:t/>
+                      </a:r>
+                    </a:p>
+                  </a:txBody>
+                  <a:tcPr marL="54864" marR="54864" marT="18288" marB="18288" anchor="ctr">
+                    <a:solidFill>
+                      <a:srgbClr val="FFFFFF"/>
+                    </a:solidFill>
+                    <a:lnB w="6350" cap="flat">
+                      <a:solidFill>
+                        <a:srgbClr val="E7E9EB"/>
+                      </a:solidFill>
+                    </a:lnB>
+                  </a:tcPr>
+                </a:tc>
+                <a:tc>
+                  <a:txBody>
+                    <a:bodyPr/>
+                    <a:lstStyle/>
+                    <a:p>
+                      <a:pPr algn="l"/>
+                      <a:r>
+                        <a:rPr sz="800" b="0">
+                          <a:solidFill>
+                            <a:srgbClr val="30353A"/>
+                          </a:solidFill>
+                          <a:latin typeface="Arial"/>
+                        </a:rPr>
+                        <a:t/>
+                      </a:r>
+                    </a:p>
+                  </a:txBody>
+                  <a:tcPr marL="54864" marR="54864" marT="18288" marB="18288" anchor="ctr">
+                    <a:solidFill>
+                      <a:srgbClr val="FFFFFF"/>
+                    </a:solidFill>
+                    <a:lnB w="6350" cap="flat">
+                      <a:solidFill>
+                        <a:srgbClr val="E7E9EB"/>
+                      </a:solidFill>
+                    </a:lnB>
+                  </a:tcPr>
+                </a:tc>
+              </a:tr>
+              <a:tr h="224028">
+                <a:tc>
+                  <a:txBody>
+                    <a:bodyPr/>
+                    <a:lstStyle/>
+                    <a:p>
+                      <a:pPr algn="l"/>
+                      <a:r>
+                        <a:rPr sz="800" b="0">
+                          <a:solidFill>
+                            <a:srgbClr val="30353A"/>
+                          </a:solidFill>
+                          <a:latin typeface="Arial"/>
+                        </a:rPr>
+                        <a:t>2</a:t>
+                      </a:r>
+                    </a:p>
+                  </a:txBody>
+                  <a:tcPr marL="54864" marR="54864" marT="18288" marB="18288" anchor="ctr">
+                    <a:solidFill>
+                      <a:srgbClr val="FFFFFF"/>
+                    </a:solidFill>
+                    <a:lnB w="6350" cap="flat">
+                      <a:solidFill>
+                        <a:srgbClr val="E7E9EB"/>
+                      </a:solidFill>
+                    </a:lnB>
+                  </a:tcPr>
+                </a:tc>
+                <a:tc>
+                  <a:txBody>
+                    <a:bodyPr/>
+                    <a:lstStyle/>
+                    <a:p>
+                      <a:pPr algn="l"/>
+                      <a:r>
+                        <a:rPr sz="800" b="0">
+                          <a:solidFill>
+                            <a:srgbClr val="30353A"/>
+                          </a:solidFill>
+                          <a:latin typeface="Arial"/>
+                        </a:rPr>
+                        <a:t>Afinity MF</a:t>
+                      </a:r>
+                    </a:p>
+                  </a:txBody>
+                  <a:tcPr marL="54864" marR="54864" marT="18288" marB="18288" anchor="ctr">
+                    <a:solidFill>
+                      <a:srgbClr val="FFFFFF"/>
+                    </a:solidFill>
+                    <a:lnB w="6350" cap="flat">
+                      <a:solidFill>
+                        <a:srgbClr val="E7E9EB"/>
+                      </a:solidFill>
+                    </a:lnB>
+                  </a:tcPr>
+                </a:tc>
+                <a:tc>
+                  <a:txBody>
+                    <a:bodyPr/>
+                    <a:lstStyle/>
+                    <a:p>
+                      <a:pPr algn="l"/>
+                      <a:r>
+                        <a:rPr sz="800" b="0">
+                          <a:solidFill>
+                            <a:srgbClr val="30353A"/>
+                          </a:solidFill>
+                          <a:latin typeface="Arial"/>
+                        </a:rPr>
+                        <a:t>Crefaz</a:t>
+                      </a:r>
+                    </a:p>
+                  </a:txBody>
+                  <a:tcPr marL="54864" marR="54864" marT="18288" marB="18288" anchor="ctr">
+                    <a:solidFill>
+                      <a:srgbClr val="FFFFFF"/>
+                    </a:solidFill>
+                    <a:lnB w="6350" cap="flat">
+                      <a:solidFill>
+                        <a:srgbClr val="E7E9EB"/>
+                      </a:solidFill>
+                    </a:lnB>
+                  </a:tcPr>
+                </a:tc>
+                <a:tc>
+                  <a:txBody>
+                    <a:bodyPr/>
+                    <a:lstStyle/>
+                    <a:p>
+                      <a:pPr algn="l"/>
+                      <a:r>
+                        <a:rPr sz="800" b="0">
+                          <a:solidFill>
+                            <a:srgbClr val="30353A"/>
+                          </a:solidFill>
+                          <a:latin typeface="Arial"/>
+                        </a:rPr>
+                        <a:t>Financeiro</a:t>
+                      </a:r>
+                    </a:p>
+                  </a:txBody>
+                  <a:tcPr marL="54864" marR="54864" marT="18288" marB="18288" anchor="ctr">
+                    <a:solidFill>
+                      <a:srgbClr val="FFFFFF"/>
+                    </a:solidFill>
+                    <a:lnB w="6350" cap="flat">
+                      <a:solidFill>
+                        <a:srgbClr val="E7E9EB"/>
+                      </a:solidFill>
+                    </a:lnB>
+                  </a:tcPr>
+                </a:tc>
+                <a:tc>
+                  <a:txBody>
+                    <a:bodyPr/>
+                    <a:lstStyle/>
+                    <a:p>
+                      <a:pPr algn="l"/>
+                      <a:r>
+                        <a:rPr sz="800" b="0">
+                          <a:solidFill>
+                            <a:srgbClr val="30353A"/>
+                          </a:solidFill>
+                          <a:latin typeface="Arial"/>
+                        </a:rPr>
+                        <a:t>Multicarteira Financeiro</a:t>
+                      </a:r>
+                    </a:p>
+                  </a:txBody>
+                  <a:tcPr marL="54864" marR="54864" marT="18288" marB="18288" anchor="ctr">
+                    <a:solidFill>
+                      <a:srgbClr val="FFFFFF"/>
+                    </a:solidFill>
+                    <a:lnB w="6350" cap="flat">
+                      <a:solidFill>
+                        <a:srgbClr val="E7E9EB"/>
+                      </a:solidFill>
+                    </a:lnB>
+                  </a:tcPr>
+                </a:tc>
+                <a:tc>
+                  <a:txBody>
+                    <a:bodyPr/>
+                    <a:lstStyle/>
+                    <a:p>
+                      <a:pPr algn="r"/>
+                      <a:r>
+                        <a:rPr sz="800" b="0">
+                          <a:solidFill>
+                            <a:srgbClr val="30353A"/>
+                          </a:solidFill>
+                          <a:latin typeface="Arial"/>
+                        </a:rPr>
+                        <a:t>0,10</a:t>
+                      </a:r>
+                    </a:p>
+                  </a:txBody>
+                  <a:tcPr marL="54864" marR="54864" marT="18288" marB="18288" anchor="ctr">
+                    <a:solidFill>
+                      <a:srgbClr val="FFFFFF"/>
+                    </a:solidFill>
+                    <a:lnB w="6350" cap="flat">
+                      <a:solidFill>
+                        <a:srgbClr val="E7E9EB"/>
+                      </a:solidFill>
+                    </a:lnB>
+                  </a:tcPr>
+                </a:tc>
+                <a:tc>
+                  <a:txBody>
+                    <a:bodyPr/>
+                    <a:lstStyle/>
+                    <a:p>
+                      <a:pPr algn="l"/>
+                      <a:r>
+                        <a:rPr sz="800" b="0">
+                          <a:solidFill>
+                            <a:srgbClr val="30353A"/>
+                          </a:solidFill>
+                          <a:latin typeface="Arial"/>
+                        </a:rPr>
+                        <a:t>Não – Singulare</a:t>
+                      </a:r>
+                    </a:p>
+                  </a:txBody>
+                  <a:tcPr marL="54864" marR="54864" marT="18288" marB="18288" anchor="ctr">
+                    <a:solidFill>
+                      <a:srgbClr val="FFFFFF"/>
+                    </a:solidFill>
+                    <a:lnB w="6350" cap="flat">
+                      <a:solidFill>
+                        <a:srgbClr val="E7E9EB"/>
+                      </a:solidFill>
+                    </a:lnB>
+                  </a:tcPr>
+                </a:tc>
+                <a:tc>
+                  <a:txBody>
+                    <a:bodyPr/>
+                    <a:lstStyle/>
+                    <a:p>
+                      <a:pPr algn="l"/>
+                      <a:r>
+                        <a:rPr sz="800" b="0">
+                          <a:solidFill>
+                            <a:srgbClr val="30353A"/>
+                          </a:solidFill>
+                          <a:latin typeface="Arial"/>
+                        </a:rPr>
+                        <a:t>Não</a:t>
+                      </a:r>
+                    </a:p>
+                  </a:txBody>
+                  <a:tcPr marL="54864" marR="54864" marT="18288" marB="18288" anchor="ctr">
+                    <a:solidFill>
+                      <a:srgbClr val="FFFFFF"/>
+                    </a:solidFill>
+                    <a:lnB w="6350" cap="flat">
+                      <a:solidFill>
+                        <a:srgbClr val="E7E9EB"/>
+                      </a:solidFill>
+                    </a:lnB>
+                  </a:tcPr>
+                </a:tc>
+                <a:tc>
+                  <a:txBody>
+                    <a:bodyPr/>
+                    <a:lstStyle/>
+                    <a:p>
+                      <a:pPr algn="l"/>
+                      <a:r>
+                        <a:rPr sz="800" b="0">
+                          <a:solidFill>
+                            <a:srgbClr val="30353A"/>
+                          </a:solidFill>
+                          <a:latin typeface="Arial"/>
+                        </a:rPr>
+                        <a:t/>
+                      </a:r>
+                    </a:p>
+                  </a:txBody>
+                  <a:tcPr marL="54864" marR="54864" marT="18288" marB="18288" anchor="ctr">
+                    <a:solidFill>
+                      <a:srgbClr val="FFFFFF"/>
+                    </a:solidFill>
+                    <a:lnB w="6350" cap="flat">
+                      <a:solidFill>
+                        <a:srgbClr val="E7E9EB"/>
+                      </a:solidFill>
+                    </a:lnB>
+                  </a:tcPr>
+                </a:tc>
+                <a:tc>
+                  <a:txBody>
+                    <a:bodyPr/>
+                    <a:lstStyle/>
+                    <a:p>
+                      <a:pPr algn="l"/>
+                      <a:r>
+                        <a:rPr sz="800" b="0">
+                          <a:solidFill>
+                            <a:srgbClr val="30353A"/>
+                          </a:solidFill>
+                          <a:latin typeface="Arial"/>
+                        </a:rPr>
+                        <a:t/>
+                      </a:r>
+                    </a:p>
+                  </a:txBody>
+                  <a:tcPr marL="54864" marR="54864" marT="18288" marB="18288" anchor="ctr">
+                    <a:solidFill>
+                      <a:srgbClr val="FFFFFF"/>
+                    </a:solidFill>
+                    <a:lnB w="6350" cap="flat">
+                      <a:solidFill>
+                        <a:srgbClr val="E7E9EB"/>
+                      </a:solidFill>
+                    </a:lnB>
+                  </a:tcPr>
+                </a:tc>
+              </a:tr>
+              <a:tr h="224028">
+                <a:tc>
+                  <a:txBody>
+                    <a:bodyPr/>
+                    <a:lstStyle/>
+                    <a:p>
+                      <a:pPr algn="l"/>
+                      <a:r>
+                        <a:rPr sz="800" b="0">
+                          <a:solidFill>
+                            <a:srgbClr val="30353A"/>
+                          </a:solidFill>
+                          <a:latin typeface="Arial"/>
+                        </a:rPr>
+                        <a:t>3</a:t>
+                      </a:r>
+                    </a:p>
+                  </a:txBody>
+                  <a:tcPr marL="54864" marR="54864" marT="18288" marB="18288" anchor="ctr">
+                    <a:solidFill>
+                      <a:srgbClr val="FFFFFF"/>
+                    </a:solidFill>
+                    <a:lnB w="6350" cap="flat">
+                      <a:solidFill>
+                        <a:srgbClr val="E7E9EB"/>
+                      </a:solidFill>
+                    </a:lnB>
+                  </a:tcPr>
+                </a:tc>
+                <a:tc>
+                  <a:txBody>
+                    <a:bodyPr/>
+                    <a:lstStyle/>
+                    <a:p>
+                      <a:pPr algn="l"/>
+                      <a:r>
+                        <a:rPr sz="800" b="0">
+                          <a:solidFill>
+                            <a:srgbClr val="30353A"/>
+                          </a:solidFill>
+                          <a:latin typeface="Arial"/>
+                        </a:rPr>
+                        <a:t>Cobuccio</a:t>
+                      </a:r>
+                    </a:p>
+                  </a:txBody>
+                  <a:tcPr marL="54864" marR="54864" marT="18288" marB="18288" anchor="ctr">
+                    <a:solidFill>
+                      <a:srgbClr val="FFFFFF"/>
+                    </a:solidFill>
+                    <a:lnB w="6350" cap="flat">
+                      <a:solidFill>
+                        <a:srgbClr val="E7E9EB"/>
+                      </a:solidFill>
+                    </a:lnB>
+                  </a:tcPr>
+                </a:tc>
+                <a:tc>
+                  <a:txBody>
+                    <a:bodyPr/>
+                    <a:lstStyle/>
+                    <a:p>
+                      <a:pPr algn="l"/>
+                      <a:r>
+                        <a:rPr sz="800" b="0">
+                          <a:solidFill>
+                            <a:srgbClr val="30353A"/>
+                          </a:solidFill>
+                          <a:latin typeface="Arial"/>
+                        </a:rPr>
+                        <a:t>Cobuccio S/A</a:t>
+                      </a:r>
+                    </a:p>
+                  </a:txBody>
+                  <a:tcPr marL="54864" marR="54864" marT="18288" marB="18288" anchor="ctr">
+                    <a:solidFill>
+                      <a:srgbClr val="FFFFFF"/>
+                    </a:solidFill>
+                    <a:lnB w="6350" cap="flat">
+                      <a:solidFill>
+                        <a:srgbClr val="E7E9EB"/>
+                      </a:solidFill>
+                    </a:lnB>
+                  </a:tcPr>
+                </a:tc>
+                <a:tc>
+                  <a:txBody>
+                    <a:bodyPr/>
+                    <a:lstStyle/>
+                    <a:p>
+                      <a:pPr algn="l"/>
+                      <a:r>
+                        <a:rPr sz="800" b="0">
+                          <a:solidFill>
+                            <a:srgbClr val="30353A"/>
+                          </a:solidFill>
+                          <a:latin typeface="Arial"/>
+                        </a:rPr>
+                        <a:t>Agro, Ind. e Com.</a:t>
+                      </a:r>
+                    </a:p>
+                  </a:txBody>
+                  <a:tcPr marL="54864" marR="54864" marT="18288" marB="18288" anchor="ctr">
+                    <a:solidFill>
+                      <a:srgbClr val="FFFFFF"/>
+                    </a:solidFill>
+                    <a:lnB w="6350" cap="flat">
+                      <a:solidFill>
+                        <a:srgbClr val="E7E9EB"/>
+                      </a:solidFill>
+                    </a:lnB>
+                  </a:tcPr>
+                </a:tc>
+                <a:tc>
+                  <a:txBody>
+                    <a:bodyPr/>
+                    <a:lstStyle/>
+                    <a:p>
+                      <a:pPr algn="l"/>
+                      <a:r>
+                        <a:rPr sz="800" b="0">
+                          <a:solidFill>
+                            <a:srgbClr val="30353A"/>
+                          </a:solidFill>
+                          <a:latin typeface="Arial"/>
+                        </a:rPr>
+                        <a:t>Recebíveis Comerciais</a:t>
+                      </a:r>
+                    </a:p>
+                  </a:txBody>
+                  <a:tcPr marL="54864" marR="54864" marT="18288" marB="18288" anchor="ctr">
+                    <a:solidFill>
+                      <a:srgbClr val="FFFFFF"/>
+                    </a:solidFill>
+                    <a:lnB w="6350" cap="flat">
+                      <a:solidFill>
+                        <a:srgbClr val="E7E9EB"/>
+                      </a:solidFill>
+                    </a:lnB>
+                  </a:tcPr>
+                </a:tc>
+                <a:tc>
+                  <a:txBody>
+                    <a:bodyPr/>
+                    <a:lstStyle/>
+                    <a:p>
+                      <a:pPr algn="r"/>
+                      <a:r>
+                        <a:rPr sz="800" b="0">
+                          <a:solidFill>
+                            <a:srgbClr val="30353A"/>
+                          </a:solidFill>
+                          <a:latin typeface="Arial"/>
+                        </a:rPr>
+                        <a:t>0,05</a:t>
+                      </a:r>
+                    </a:p>
+                  </a:txBody>
+                  <a:tcPr marL="54864" marR="54864" marT="18288" marB="18288" anchor="ctr">
+                    <a:solidFill>
+                      <a:srgbClr val="FFFFFF"/>
+                    </a:solidFill>
+                    <a:lnB w="6350" cap="flat">
+                      <a:solidFill>
+                        <a:srgbClr val="E7E9EB"/>
+                      </a:solidFill>
+                    </a:lnB>
+                  </a:tcPr>
+                </a:tc>
+                <a:tc>
+                  <a:txBody>
+                    <a:bodyPr/>
+                    <a:lstStyle/>
+                    <a:p>
+                      <a:pPr algn="l"/>
+                      <a:r>
+                        <a:rPr sz="800" b="0">
+                          <a:solidFill>
+                            <a:srgbClr val="30353A"/>
+                          </a:solidFill>
+                          <a:latin typeface="Arial"/>
+                        </a:rPr>
+                        <a:t>Não – ABC Brasil</a:t>
+                      </a:r>
+                    </a:p>
+                  </a:txBody>
+                  <a:tcPr marL="54864" marR="54864" marT="18288" marB="18288" anchor="ctr">
+                    <a:solidFill>
+                      <a:srgbClr val="FFFFFF"/>
+                    </a:solidFill>
+                    <a:lnB w="6350" cap="flat">
+                      <a:solidFill>
+                        <a:srgbClr val="E7E9EB"/>
+                      </a:solidFill>
+                    </a:lnB>
+                  </a:tcPr>
+                </a:tc>
+                <a:tc>
+                  <a:txBody>
+                    <a:bodyPr/>
+                    <a:lstStyle/>
+                    <a:p>
+                      <a:pPr algn="l"/>
+                      <a:r>
+                        <a:rPr sz="800" b="0">
+                          <a:solidFill>
+                            <a:srgbClr val="30353A"/>
+                          </a:solidFill>
+                          <a:latin typeface="Arial"/>
+                        </a:rPr>
+                        <a:t>Sim</a:t>
+                      </a:r>
+                    </a:p>
+                  </a:txBody>
+                  <a:tcPr marL="54864" marR="54864" marT="18288" marB="18288" anchor="ctr">
+                    <a:solidFill>
+                      <a:srgbClr val="FFFFFF"/>
+                    </a:solidFill>
+                    <a:lnB w="6350" cap="flat">
+                      <a:solidFill>
+                        <a:srgbClr val="E7E9EB"/>
+                      </a:solidFill>
+                    </a:lnB>
+                  </a:tcPr>
+                </a:tc>
+                <a:tc>
+                  <a:txBody>
+                    <a:bodyPr/>
+                    <a:lstStyle/>
+                    <a:p>
+                      <a:pPr algn="l"/>
+                      <a:r>
+                        <a:rPr sz="800" b="0">
+                          <a:solidFill>
+                            <a:srgbClr val="30353A"/>
+                          </a:solidFill>
+                          <a:latin typeface="Arial"/>
+                        </a:rPr>
+                        <a:t/>
+                      </a:r>
+                    </a:p>
+                  </a:txBody>
+                  <a:tcPr marL="54864" marR="54864" marT="18288" marB="18288" anchor="ctr">
+                    <a:solidFill>
+                      <a:srgbClr val="FFFFFF"/>
+                    </a:solidFill>
+                    <a:lnB w="6350" cap="flat">
+                      <a:solidFill>
+                        <a:srgbClr val="E7E9EB"/>
+                      </a:solidFill>
+                    </a:lnB>
+                  </a:tcPr>
+                </a:tc>
+                <a:tc>
+                  <a:txBody>
+                    <a:bodyPr/>
+                    <a:lstStyle/>
+                    <a:p>
+                      <a:pPr algn="l"/>
+                      <a:r>
+                        <a:rPr sz="800" b="0">
+                          <a:solidFill>
+                            <a:srgbClr val="30353A"/>
+                          </a:solidFill>
+                          <a:latin typeface="Arial"/>
+                        </a:rPr>
+                        <a:t/>
+                      </a:r>
+                    </a:p>
+                  </a:txBody>
+                  <a:tcPr marL="54864" marR="54864" marT="18288" marB="18288" anchor="ctr">
+                    <a:solidFill>
+                      <a:srgbClr val="FFFFFF"/>
+                    </a:solidFill>
+                    <a:lnB w="6350" cap="flat">
+                      <a:solidFill>
+                        <a:srgbClr val="E7E9EB"/>
+                      </a:solidFill>
+                    </a:lnB>
+                  </a:tcPr>
+                </a:tc>
+              </a:tr>
+              <a:tr h="224028">
+                <a:tc>
+                  <a:txBody>
+                    <a:bodyPr/>
+                    <a:lstStyle/>
+                    <a:p>
+                      <a:pPr algn="l"/>
+                      <a:r>
+                        <a:rPr sz="800" b="0">
+                          <a:solidFill>
+                            <a:srgbClr val="30353A"/>
+                          </a:solidFill>
+                          <a:latin typeface="Arial"/>
+                        </a:rPr>
+                        <a:t>4</a:t>
+                      </a:r>
+                    </a:p>
+                  </a:txBody>
+                  <a:tcPr marL="54864" marR="54864" marT="18288" marB="18288" anchor="ctr">
+                    <a:solidFill>
+                      <a:srgbClr val="FFFFFF"/>
+                    </a:solidFill>
+                    <a:lnB w="6350" cap="flat">
+                      <a:solidFill>
+                        <a:srgbClr val="E7E9EB"/>
+                      </a:solidFill>
+                    </a:lnB>
+                  </a:tcPr>
+                </a:tc>
+                <a:tc>
+                  <a:txBody>
+                    <a:bodyPr/>
+                    <a:lstStyle/>
+                    <a:p>
+                      <a:pPr algn="l"/>
+                      <a:r>
+                        <a:rPr sz="800" b="0">
+                          <a:solidFill>
+                            <a:srgbClr val="30353A"/>
+                          </a:solidFill>
+                          <a:latin typeface="Arial"/>
+                        </a:rPr>
+                        <a:t>For-Te</a:t>
+                      </a:r>
+                    </a:p>
+                  </a:txBody>
+                  <a:tcPr marL="54864" marR="54864" marT="18288" marB="18288" anchor="ctr">
+                    <a:solidFill>
+                      <a:srgbClr val="FFFFFF"/>
+                    </a:solidFill>
+                    <a:lnB w="6350" cap="flat">
+                      <a:solidFill>
+                        <a:srgbClr val="E7E9EB"/>
+                      </a:solidFill>
+                    </a:lnB>
+                  </a:tcPr>
+                </a:tc>
+                <a:tc>
+                  <a:txBody>
+                    <a:bodyPr/>
+                    <a:lstStyle/>
+                    <a:p>
+                      <a:pPr algn="l"/>
+                      <a:r>
+                        <a:rPr sz="800" b="0">
+                          <a:solidFill>
+                            <a:srgbClr val="30353A"/>
+                          </a:solidFill>
+                          <a:latin typeface="Arial"/>
+                        </a:rPr>
+                        <a:t>TEL</a:t>
+                      </a:r>
+                    </a:p>
+                  </a:txBody>
+                  <a:tcPr marL="54864" marR="54864" marT="18288" marB="18288" anchor="ctr">
+                    <a:solidFill>
+                      <a:srgbClr val="FFFFFF"/>
+                    </a:solidFill>
+                    <a:lnB w="6350" cap="flat">
+                      <a:solidFill>
+                        <a:srgbClr val="E7E9EB"/>
+                      </a:solidFill>
+                    </a:lnB>
+                  </a:tcPr>
+                </a:tc>
+                <a:tc>
+                  <a:txBody>
+                    <a:bodyPr/>
+                    <a:lstStyle/>
+                    <a:p>
+                      <a:pPr algn="l"/>
+                      <a:r>
+                        <a:rPr sz="800" b="0">
+                          <a:solidFill>
+                            <a:srgbClr val="30353A"/>
+                          </a:solidFill>
+                          <a:latin typeface="Arial"/>
+                        </a:rPr>
+                        <a:t>Fomento Mercantil</a:t>
+                      </a:r>
+                    </a:p>
+                  </a:txBody>
+                  <a:tcPr marL="54864" marR="54864" marT="18288" marB="18288" anchor="ctr">
+                    <a:solidFill>
+                      <a:srgbClr val="FFFFFF"/>
+                    </a:solidFill>
+                    <a:lnB w="6350" cap="flat">
+                      <a:solidFill>
+                        <a:srgbClr val="E7E9EB"/>
+                      </a:solidFill>
+                    </a:lnB>
+                  </a:tcPr>
+                </a:tc>
+                <a:tc>
+                  <a:txBody>
+                    <a:bodyPr/>
+                    <a:lstStyle/>
+                    <a:p>
+                      <a:pPr algn="l"/>
+                      <a:r>
+                        <a:rPr sz="800" b="0">
+                          <a:solidFill>
+                            <a:srgbClr val="30353A"/>
+                          </a:solidFill>
+                          <a:latin typeface="Arial"/>
+                        </a:rPr>
+                        <a:t>Fomento Mercantil</a:t>
+                      </a:r>
+                    </a:p>
+                  </a:txBody>
+                  <a:tcPr marL="54864" marR="54864" marT="18288" marB="18288" anchor="ctr">
+                    <a:solidFill>
+                      <a:srgbClr val="FFFFFF"/>
+                    </a:solidFill>
+                    <a:lnB w="6350" cap="flat">
+                      <a:solidFill>
+                        <a:srgbClr val="E7E9EB"/>
+                      </a:solidFill>
+                    </a:lnB>
+                  </a:tcPr>
+                </a:tc>
+                <a:tc>
+                  <a:txBody>
+                    <a:bodyPr/>
+                    <a:lstStyle/>
+                    <a:p>
+                      <a:pPr algn="r"/>
+                      <a:r>
+                        <a:rPr sz="800" b="0">
+                          <a:solidFill>
+                            <a:srgbClr val="30353A"/>
+                          </a:solidFill>
+                          <a:latin typeface="Arial"/>
+                        </a:rPr>
+                        <a:t>n/d</a:t>
+                      </a:r>
+                    </a:p>
+                  </a:txBody>
+                  <a:tcPr marL="54864" marR="54864" marT="18288" marB="18288" anchor="ctr">
+                    <a:solidFill>
+                      <a:srgbClr val="FFFFFF"/>
+                    </a:solidFill>
+                    <a:lnB w="6350" cap="flat">
+                      <a:solidFill>
+                        <a:srgbClr val="E7E9EB"/>
+                      </a:solidFill>
+                    </a:lnB>
+                  </a:tcPr>
+                </a:tc>
+                <a:tc>
+                  <a:txBody>
+                    <a:bodyPr/>
+                    <a:lstStyle/>
+                    <a:p>
+                      <a:pPr algn="l"/>
+                      <a:r>
+                        <a:rPr sz="800" b="0">
+                          <a:solidFill>
+                            <a:srgbClr val="30353A"/>
+                          </a:solidFill>
+                          <a:latin typeface="Arial"/>
+                        </a:rPr>
+                        <a:t>Não identificado</a:t>
+                      </a:r>
+                    </a:p>
+                  </a:txBody>
+                  <a:tcPr marL="54864" marR="54864" marT="18288" marB="18288" anchor="ctr">
+                    <a:solidFill>
+                      <a:srgbClr val="FFFFFF"/>
+                    </a:solidFill>
+                    <a:lnB w="6350" cap="flat">
+                      <a:solidFill>
+                        <a:srgbClr val="E7E9EB"/>
+                      </a:solidFill>
+                    </a:lnB>
+                  </a:tcPr>
+                </a:tc>
+                <a:tc>
+                  <a:txBody>
+                    <a:bodyPr/>
+                    <a:lstStyle/>
+                    <a:p>
+                      <a:pPr algn="l"/>
+                      <a:r>
+                        <a:rPr sz="800" b="0">
+                          <a:solidFill>
+                            <a:srgbClr val="30353A"/>
+                          </a:solidFill>
+                          <a:latin typeface="Arial"/>
+                        </a:rPr>
+                        <a:t>Não identificado</a:t>
+                      </a:r>
+                    </a:p>
+                  </a:txBody>
+                  <a:tcPr marL="54864" marR="54864" marT="18288" marB="18288" anchor="ctr">
+                    <a:solidFill>
+                      <a:srgbClr val="FFFFFF"/>
+                    </a:solidFill>
+                    <a:lnB w="6350" cap="flat">
+                      <a:solidFill>
+                        <a:srgbClr val="E7E9EB"/>
+                      </a:solidFill>
+                    </a:lnB>
+                  </a:tcPr>
+                </a:tc>
+                <a:tc>
+                  <a:txBody>
+                    <a:bodyPr/>
+                    <a:lstStyle/>
+                    <a:p>
+                      <a:pPr algn="l"/>
+                      <a:r>
+                        <a:rPr sz="800" b="0">
+                          <a:solidFill>
+                            <a:srgbClr val="30353A"/>
+                          </a:solidFill>
+                          <a:latin typeface="Arial"/>
+                        </a:rPr>
+                        <a:t/>
+                      </a:r>
+                    </a:p>
+                  </a:txBody>
+                  <a:tcPr marL="54864" marR="54864" marT="18288" marB="18288" anchor="ctr">
+                    <a:solidFill>
+                      <a:srgbClr val="FFFFFF"/>
+                    </a:solidFill>
+                    <a:lnB w="6350" cap="flat">
+                      <a:solidFill>
+                        <a:srgbClr val="E7E9EB"/>
+                      </a:solidFill>
+                    </a:lnB>
+                  </a:tcPr>
+                </a:tc>
+                <a:tc>
+                  <a:txBody>
+                    <a:bodyPr/>
+                    <a:lstStyle/>
+                    <a:p>
+                      <a:pPr algn="l"/>
+                      <a:r>
+                        <a:rPr sz="800" b="0">
+                          <a:solidFill>
+                            <a:srgbClr val="30353A"/>
+                          </a:solidFill>
+                          <a:latin typeface="Arial"/>
+                        </a:rPr>
+                        <a:t/>
+                      </a:r>
+                    </a:p>
+                  </a:txBody>
+                  <a:tcPr marL="54864" marR="54864" marT="18288" marB="18288" anchor="ctr">
+                    <a:solidFill>
+                      <a:srgbClr val="FFFFFF"/>
+                    </a:solidFill>
+                    <a:lnB w="6350" cap="flat">
+                      <a:solidFill>
+                        <a:srgbClr val="E7E9EB"/>
+                      </a:solidFill>
+                    </a:lnB>
+                  </a:tcPr>
+                </a:tc>
+              </a:tr>
+              <a:tr h="224028">
+                <a:tc>
+                  <a:txBody>
+                    <a:bodyPr/>
+                    <a:lstStyle/>
+                    <a:p>
+                      <a:pPr algn="l"/>
+                      <a:r>
+                        <a:rPr sz="800" b="0">
+                          <a:solidFill>
+                            <a:srgbClr val="30353A"/>
+                          </a:solidFill>
+                          <a:latin typeface="Arial"/>
+                        </a:rPr>
+                        <a:t>5</a:t>
+                      </a:r>
+                    </a:p>
+                  </a:txBody>
+                  <a:tcPr marL="54864" marR="54864" marT="18288" marB="18288" anchor="ctr">
+                    <a:solidFill>
+                      <a:srgbClr val="FFFFFF"/>
+                    </a:solidFill>
+                    <a:lnB w="6350" cap="flat">
+                      <a:solidFill>
+                        <a:srgbClr val="E7E9EB"/>
+                      </a:solidFill>
+                    </a:lnB>
+                  </a:tcPr>
+                </a:tc>
+                <a:tc>
+                  <a:txBody>
+                    <a:bodyPr/>
+                    <a:lstStyle/>
+                    <a:p>
+                      <a:pPr algn="l"/>
+                      <a:r>
+                        <a:rPr sz="800" b="0">
+                          <a:solidFill>
+                            <a:srgbClr val="30353A"/>
+                          </a:solidFill>
+                          <a:latin typeface="Arial"/>
+                        </a:rPr>
+                        <a:t>Consignado Privado Paketá</a:t>
+                      </a:r>
+                    </a:p>
+                  </a:txBody>
+                  <a:tcPr marL="54864" marR="54864" marT="18288" marB="18288" anchor="ctr">
+                    <a:solidFill>
+                      <a:srgbClr val="FFFFFF"/>
+                    </a:solidFill>
+                    <a:lnB w="6350" cap="flat">
+                      <a:solidFill>
+                        <a:srgbClr val="E7E9EB"/>
+                      </a:solidFill>
+                    </a:lnB>
+                  </a:tcPr>
+                </a:tc>
+                <a:tc>
+                  <a:txBody>
+                    <a:bodyPr/>
+                    <a:lstStyle/>
+                    <a:p>
+                      <a:pPr algn="l"/>
+                      <a:r>
+                        <a:rPr sz="800" b="0">
+                          <a:solidFill>
+                            <a:srgbClr val="30353A"/>
+                          </a:solidFill>
+                          <a:latin typeface="Arial"/>
+                        </a:rPr>
+                        <a:t>QI</a:t>
+                      </a:r>
+                    </a:p>
+                  </a:txBody>
+                  <a:tcPr marL="54864" marR="54864" marT="18288" marB="18288" anchor="ctr">
+                    <a:solidFill>
+                      <a:srgbClr val="FFFFFF"/>
+                    </a:solidFill>
+                    <a:lnB w="6350" cap="flat">
+                      <a:solidFill>
+                        <a:srgbClr val="E7E9EB"/>
+                      </a:solidFill>
+                    </a:lnB>
+                  </a:tcPr>
+                </a:tc>
+                <a:tc>
+                  <a:txBody>
+                    <a:bodyPr/>
+                    <a:lstStyle/>
+                    <a:p>
+                      <a:pPr algn="l"/>
+                      <a:r>
+                        <a:rPr sz="800" b="0">
+                          <a:solidFill>
+                            <a:srgbClr val="30353A"/>
+                          </a:solidFill>
+                          <a:latin typeface="Arial"/>
+                        </a:rPr>
+                        <a:t>Financeiro</a:t>
+                      </a:r>
+                    </a:p>
+                  </a:txBody>
+                  <a:tcPr marL="54864" marR="54864" marT="18288" marB="18288" anchor="ctr">
+                    <a:solidFill>
+                      <a:srgbClr val="FFFFFF"/>
+                    </a:solidFill>
+                    <a:lnB w="6350" cap="flat">
+                      <a:solidFill>
+                        <a:srgbClr val="E7E9EB"/>
+                      </a:solidFill>
+                    </a:lnB>
+                  </a:tcPr>
+                </a:tc>
+                <a:tc>
+                  <a:txBody>
+                    <a:bodyPr/>
+                    <a:lstStyle/>
+                    <a:p>
+                      <a:pPr algn="l"/>
+                      <a:r>
+                        <a:rPr sz="800" b="0">
+                          <a:solidFill>
+                            <a:srgbClr val="30353A"/>
+                          </a:solidFill>
+                          <a:latin typeface="Arial"/>
+                        </a:rPr>
+                        <a:t>Crédito Consignado</a:t>
+                      </a:r>
+                    </a:p>
+                  </a:txBody>
+                  <a:tcPr marL="54864" marR="54864" marT="18288" marB="18288" anchor="ctr">
+                    <a:solidFill>
+                      <a:srgbClr val="FFFFFF"/>
+                    </a:solidFill>
+                    <a:lnB w="6350" cap="flat">
+                      <a:solidFill>
+                        <a:srgbClr val="E7E9EB"/>
+                      </a:solidFill>
+                    </a:lnB>
+                  </a:tcPr>
+                </a:tc>
+                <a:tc>
+                  <a:txBody>
+                    <a:bodyPr/>
+                    <a:lstStyle/>
+                    <a:p>
+                      <a:pPr algn="r"/>
+                      <a:r>
+                        <a:rPr sz="800" b="0">
+                          <a:solidFill>
+                            <a:srgbClr val="30353A"/>
+                          </a:solidFill>
+                          <a:latin typeface="Arial"/>
+                        </a:rPr>
+                        <a:t>0,67</a:t>
+                      </a:r>
+                    </a:p>
+                  </a:txBody>
+                  <a:tcPr marL="54864" marR="54864" marT="18288" marB="18288" anchor="ctr">
+                    <a:solidFill>
+                      <a:srgbClr val="FFFFFF"/>
+                    </a:solidFill>
+                    <a:lnB w="6350" cap="flat">
+                      <a:solidFill>
+                        <a:srgbClr val="E7E9EB"/>
+                      </a:solidFill>
+                    </a:lnB>
+                  </a:tcPr>
+                </a:tc>
+                <a:tc>
+                  <a:txBody>
+                    <a:bodyPr/>
+                    <a:lstStyle/>
+                    <a:p>
+                      <a:pPr algn="l"/>
+                      <a:r>
+                        <a:rPr sz="800" b="0">
+                          <a:solidFill>
+                            <a:srgbClr val="30353A"/>
+                          </a:solidFill>
+                          <a:latin typeface="Arial"/>
+                        </a:rPr>
+                        <a:t>Não – Singulare / XP</a:t>
+                      </a:r>
+                    </a:p>
+                  </a:txBody>
+                  <a:tcPr marL="54864" marR="54864" marT="18288" marB="18288" anchor="ctr">
+                    <a:solidFill>
+                      <a:srgbClr val="FFFFFF"/>
+                    </a:solidFill>
+                    <a:lnB w="6350" cap="flat">
+                      <a:solidFill>
+                        <a:srgbClr val="E7E9EB"/>
+                      </a:solidFill>
+                    </a:lnB>
+                  </a:tcPr>
+                </a:tc>
+                <a:tc>
+                  <a:txBody>
+                    <a:bodyPr/>
+                    <a:lstStyle/>
+                    <a:p>
+                      <a:pPr algn="l"/>
+                      <a:r>
+                        <a:rPr sz="800" b="0">
+                          <a:solidFill>
+                            <a:srgbClr val="30353A"/>
+                          </a:solidFill>
+                          <a:latin typeface="Arial"/>
+                        </a:rPr>
+                        <a:t>Não</a:t>
+                      </a:r>
+                    </a:p>
+                  </a:txBody>
+                  <a:tcPr marL="54864" marR="54864" marT="18288" marB="18288" anchor="ctr">
+                    <a:solidFill>
+                      <a:srgbClr val="FFFFFF"/>
+                    </a:solidFill>
+                    <a:lnB w="6350" cap="flat">
+                      <a:solidFill>
+                        <a:srgbClr val="E7E9EB"/>
+                      </a:solidFill>
+                    </a:lnB>
+                  </a:tcPr>
+                </a:tc>
+                <a:tc>
+                  <a:txBody>
+                    <a:bodyPr/>
+                    <a:lstStyle/>
+                    <a:p>
+                      <a:pPr algn="l"/>
+                      <a:r>
+                        <a:rPr sz="800" b="0">
+                          <a:solidFill>
+                            <a:srgbClr val="30353A"/>
+                          </a:solidFill>
+                          <a:latin typeface="Arial"/>
+                        </a:rPr>
+                        <a:t/>
+                      </a:r>
+                    </a:p>
+                  </a:txBody>
+                  <a:tcPr marL="54864" marR="54864" marT="18288" marB="18288" anchor="ctr">
+                    <a:solidFill>
+                      <a:srgbClr val="FFFFFF"/>
+                    </a:solidFill>
+                    <a:lnB w="6350" cap="flat">
+                      <a:solidFill>
+                        <a:srgbClr val="E7E9EB"/>
+                      </a:solidFill>
+                    </a:lnB>
+                  </a:tcPr>
+                </a:tc>
+                <a:tc>
+                  <a:txBody>
+                    <a:bodyPr/>
+                    <a:lstStyle/>
+                    <a:p>
+                      <a:pPr algn="l"/>
+                      <a:r>
+                        <a:rPr sz="800" b="0">
+                          <a:solidFill>
+                            <a:srgbClr val="30353A"/>
+                          </a:solidFill>
+                          <a:latin typeface="Arial"/>
+                        </a:rPr>
+                        <a:t/>
+                      </a:r>
+                    </a:p>
+                  </a:txBody>
+                  <a:tcPr marL="54864" marR="54864" marT="18288" marB="18288" anchor="ctr">
+                    <a:solidFill>
+                      <a:srgbClr val="FFFFFF"/>
+                    </a:solidFill>
+                    <a:lnB w="6350" cap="flat">
+                      <a:solidFill>
+                        <a:srgbClr val="E7E9EB"/>
+                      </a:solidFill>
+                    </a:lnB>
+                  </a:tcPr>
+                </a:tc>
+              </a:tr>
+              <a:tr h="224028">
+                <a:tc>
+                  <a:txBody>
+                    <a:bodyPr/>
+                    <a:lstStyle/>
+                    <a:p>
+                      <a:pPr algn="l"/>
+                      <a:r>
+                        <a:rPr sz="800" b="0">
+                          <a:solidFill>
+                            <a:srgbClr val="30353A"/>
+                          </a:solidFill>
+                          <a:latin typeface="Arial"/>
+                        </a:rPr>
+                        <a:t>6</a:t>
+                      </a:r>
+                    </a:p>
+                  </a:txBody>
+                  <a:tcPr marL="54864" marR="54864" marT="18288" marB="18288" anchor="ctr">
+                    <a:solidFill>
+                      <a:srgbClr val="FFFFFF"/>
+                    </a:solidFill>
+                    <a:lnB w="6350" cap="flat">
+                      <a:solidFill>
+                        <a:srgbClr val="E7E9EB"/>
+                      </a:solidFill>
+                    </a:lnB>
+                  </a:tcPr>
+                </a:tc>
+                <a:tc>
+                  <a:txBody>
+                    <a:bodyPr/>
+                    <a:lstStyle/>
+                    <a:p>
+                      <a:pPr algn="l"/>
+                      <a:r>
+                        <a:rPr sz="800" b="0">
+                          <a:solidFill>
+                            <a:srgbClr val="30353A"/>
+                          </a:solidFill>
+                          <a:latin typeface="Arial"/>
+                        </a:rPr>
+                        <a:t>Cash Flow Multissegmentos</a:t>
+                      </a:r>
+                    </a:p>
+                  </a:txBody>
+                  <a:tcPr marL="54864" marR="54864" marT="18288" marB="18288" anchor="ctr">
+                    <a:solidFill>
+                      <a:srgbClr val="FFFFFF"/>
+                    </a:solidFill>
+                    <a:lnB w="6350" cap="flat">
+                      <a:solidFill>
+                        <a:srgbClr val="E7E9EB"/>
+                      </a:solidFill>
+                    </a:lnB>
+                  </a:tcPr>
+                </a:tc>
+                <a:tc>
+                  <a:txBody>
+                    <a:bodyPr/>
+                    <a:lstStyle/>
+                    <a:p>
+                      <a:pPr algn="l"/>
+                      <a:r>
+                        <a:rPr sz="800" b="0">
+                          <a:solidFill>
+                            <a:srgbClr val="30353A"/>
+                          </a:solidFill>
+                          <a:latin typeface="Arial"/>
+                        </a:rPr>
+                        <a:t>RQ</a:t>
+                      </a:r>
+                    </a:p>
+                  </a:txBody>
+                  <a:tcPr marL="54864" marR="54864" marT="18288" marB="18288" anchor="ctr">
+                    <a:solidFill>
+                      <a:srgbClr val="FFFFFF"/>
+                    </a:solidFill>
+                    <a:lnB w="6350" cap="flat">
+                      <a:solidFill>
+                        <a:srgbClr val="E7E9EB"/>
+                      </a:solidFill>
+                    </a:lnB>
+                  </a:tcPr>
+                </a:tc>
+                <a:tc>
+                  <a:txBody>
+                    <a:bodyPr/>
+                    <a:lstStyle/>
+                    <a:p>
+                      <a:pPr algn="l"/>
+                      <a:r>
+                        <a:rPr sz="800" b="0">
+                          <a:solidFill>
+                            <a:srgbClr val="30353A"/>
+                          </a:solidFill>
+                          <a:latin typeface="Arial"/>
+                        </a:rPr>
+                        <a:t>Agro, Ind. e Com.</a:t>
+                      </a:r>
+                    </a:p>
+                  </a:txBody>
+                  <a:tcPr marL="54864" marR="54864" marT="18288" marB="18288" anchor="ctr">
+                    <a:solidFill>
+                      <a:srgbClr val="FFFFFF"/>
+                    </a:solidFill>
+                    <a:lnB w="6350" cap="flat">
+                      <a:solidFill>
+                        <a:srgbClr val="E7E9EB"/>
+                      </a:solidFill>
+                    </a:lnB>
+                  </a:tcPr>
+                </a:tc>
+                <a:tc>
+                  <a:txBody>
+                    <a:bodyPr/>
+                    <a:lstStyle/>
+                    <a:p>
+                      <a:pPr algn="l"/>
+                      <a:r>
+                        <a:rPr sz="800" b="0">
+                          <a:solidFill>
+                            <a:srgbClr val="30353A"/>
+                          </a:solidFill>
+                          <a:latin typeface="Arial"/>
+                        </a:rPr>
+                        <a:t>Multicarteira Agro/Ind.</a:t>
+                      </a:r>
+                    </a:p>
+                  </a:txBody>
+                  <a:tcPr marL="54864" marR="54864" marT="18288" marB="18288" anchor="ctr">
+                    <a:solidFill>
+                      <a:srgbClr val="FFFFFF"/>
+                    </a:solidFill>
+                    <a:lnB w="6350" cap="flat">
+                      <a:solidFill>
+                        <a:srgbClr val="E7E9EB"/>
+                      </a:solidFill>
+                    </a:lnB>
+                  </a:tcPr>
+                </a:tc>
+                <a:tc>
+                  <a:txBody>
+                    <a:bodyPr/>
+                    <a:lstStyle/>
+                    <a:p>
+                      <a:pPr algn="r"/>
+                      <a:r>
+                        <a:rPr sz="800" b="0">
+                          <a:solidFill>
+                            <a:srgbClr val="30353A"/>
+                          </a:solidFill>
+                          <a:latin typeface="Arial"/>
+                        </a:rPr>
+                        <a:t>n/d</a:t>
+                      </a:r>
+                    </a:p>
+                  </a:txBody>
+                  <a:tcPr marL="54864" marR="54864" marT="18288" marB="18288" anchor="ctr">
+                    <a:solidFill>
+                      <a:srgbClr val="FFFFFF"/>
+                    </a:solidFill>
+                    <a:lnB w="6350" cap="flat">
+                      <a:solidFill>
+                        <a:srgbClr val="E7E9EB"/>
+                      </a:solidFill>
+                    </a:lnB>
+                  </a:tcPr>
+                </a:tc>
+                <a:tc>
+                  <a:txBody>
+                    <a:bodyPr/>
+                    <a:lstStyle/>
+                    <a:p>
+                      <a:pPr algn="l"/>
+                      <a:r>
+                        <a:rPr sz="800" b="0">
+                          <a:solidFill>
+                            <a:srgbClr val="30353A"/>
+                          </a:solidFill>
+                          <a:latin typeface="Arial"/>
+                        </a:rPr>
+                        <a:t>Não identificado</a:t>
+                      </a:r>
+                    </a:p>
+                  </a:txBody>
+                  <a:tcPr marL="54864" marR="54864" marT="18288" marB="18288" anchor="ctr">
+                    <a:solidFill>
+                      <a:srgbClr val="FFFFFF"/>
+                    </a:solidFill>
+                    <a:lnB w="6350" cap="flat">
+                      <a:solidFill>
+                        <a:srgbClr val="E7E9EB"/>
+                      </a:solidFill>
+                    </a:lnB>
+                  </a:tcPr>
+                </a:tc>
+                <a:tc>
+                  <a:txBody>
+                    <a:bodyPr/>
+                    <a:lstStyle/>
+                    <a:p>
+                      <a:pPr algn="l"/>
+                      <a:r>
+                        <a:rPr sz="800" b="0">
+                          <a:solidFill>
+                            <a:srgbClr val="30353A"/>
+                          </a:solidFill>
+                          <a:latin typeface="Arial"/>
+                        </a:rPr>
+                        <a:t>Não identificado</a:t>
+                      </a:r>
+                    </a:p>
+                  </a:txBody>
+                  <a:tcPr marL="54864" marR="54864" marT="18288" marB="18288" anchor="ctr">
+                    <a:solidFill>
+                      <a:srgbClr val="FFFFFF"/>
+                    </a:solidFill>
+                    <a:lnB w="6350" cap="flat">
+                      <a:solidFill>
+                        <a:srgbClr val="E7E9EB"/>
+                      </a:solidFill>
+                    </a:lnB>
+                  </a:tcPr>
+                </a:tc>
+                <a:tc>
+                  <a:txBody>
+                    <a:bodyPr/>
+                    <a:lstStyle/>
+                    <a:p>
+                      <a:pPr algn="l"/>
+                      <a:r>
+                        <a:rPr sz="800" b="0">
+                          <a:solidFill>
+                            <a:srgbClr val="30353A"/>
+                          </a:solidFill>
+                          <a:latin typeface="Arial"/>
+                        </a:rPr>
+                        <a:t/>
+                      </a:r>
+                    </a:p>
+                  </a:txBody>
+                  <a:tcPr marL="54864" marR="54864" marT="18288" marB="18288" anchor="ctr">
+                    <a:solidFill>
+                      <a:srgbClr val="FFFFFF"/>
+                    </a:solidFill>
+                    <a:lnB w="6350" cap="flat">
+                      <a:solidFill>
+                        <a:srgbClr val="E7E9EB"/>
+                      </a:solidFill>
+                    </a:lnB>
+                  </a:tcPr>
+                </a:tc>
+                <a:tc>
+                  <a:txBody>
+                    <a:bodyPr/>
+                    <a:lstStyle/>
+                    <a:p>
+                      <a:pPr algn="l"/>
+                      <a:r>
+                        <a:rPr sz="800" b="0">
+                          <a:solidFill>
+                            <a:srgbClr val="30353A"/>
+                          </a:solidFill>
+                          <a:latin typeface="Arial"/>
+                        </a:rPr>
+                        <a:t/>
+                      </a:r>
+                    </a:p>
+                  </a:txBody>
+                  <a:tcPr marL="54864" marR="54864" marT="18288" marB="18288" anchor="ctr">
+                    <a:solidFill>
+                      <a:srgbClr val="FFFFFF"/>
+                    </a:solidFill>
+                    <a:lnB w="6350" cap="flat">
+                      <a:solidFill>
+                        <a:srgbClr val="E7E9EB"/>
+                      </a:solidFill>
+                    </a:lnB>
+                  </a:tcPr>
+                </a:tc>
+              </a:tr>
+              <a:tr h="224028">
+                <a:tc>
+                  <a:txBody>
+                    <a:bodyPr/>
+                    <a:lstStyle/>
+                    <a:p>
+                      <a:pPr algn="l"/>
+                      <a:r>
+                        <a:rPr sz="800" b="0">
+                          <a:solidFill>
+                            <a:srgbClr val="30353A"/>
+                          </a:solidFill>
+                          <a:latin typeface="Arial"/>
+                        </a:rPr>
+                        <a:t>7</a:t>
+                      </a:r>
+                    </a:p>
+                  </a:txBody>
+                  <a:tcPr marL="54864" marR="54864" marT="18288" marB="18288" anchor="ctr">
+                    <a:solidFill>
+                      <a:srgbClr val="FFFFFF"/>
+                    </a:solidFill>
+                    <a:lnB w="6350" cap="flat">
+                      <a:solidFill>
+                        <a:srgbClr val="E7E9EB"/>
+                      </a:solidFill>
+                    </a:lnB>
+                  </a:tcPr>
+                </a:tc>
+                <a:tc>
+                  <a:txBody>
+                    <a:bodyPr/>
+                    <a:lstStyle/>
+                    <a:p>
+                      <a:pPr algn="l"/>
+                      <a:r>
+                        <a:rPr sz="800" b="0">
+                          <a:solidFill>
+                            <a:srgbClr val="30353A"/>
+                          </a:solidFill>
+                          <a:latin typeface="Arial"/>
+                        </a:rPr>
+                        <a:t>Monee I</a:t>
+                      </a:r>
+                    </a:p>
+                  </a:txBody>
+                  <a:tcPr marL="54864" marR="54864" marT="18288" marB="18288" anchor="ctr">
+                    <a:solidFill>
+                      <a:srgbClr val="FFFFFF"/>
+                    </a:solidFill>
+                    <a:lnB w="6350" cap="flat">
+                      <a:solidFill>
+                        <a:srgbClr val="E7E9EB"/>
+                      </a:solidFill>
+                    </a:lnB>
+                  </a:tcPr>
+                </a:tc>
+                <a:tc>
+                  <a:txBody>
+                    <a:bodyPr/>
+                    <a:lstStyle/>
+                    <a:p>
+                      <a:pPr algn="l"/>
+                      <a:r>
+                        <a:rPr sz="800" b="0">
+                          <a:solidFill>
+                            <a:srgbClr val="30353A"/>
+                          </a:solidFill>
+                          <a:latin typeface="Arial"/>
+                        </a:rPr>
+                        <a:t>Maree</a:t>
+                      </a:r>
+                    </a:p>
+                  </a:txBody>
+                  <a:tcPr marL="54864" marR="54864" marT="18288" marB="18288" anchor="ctr">
+                    <a:solidFill>
+                      <a:srgbClr val="FFFFFF"/>
+                    </a:solidFill>
+                    <a:lnB w="6350" cap="flat">
+                      <a:solidFill>
+                        <a:srgbClr val="E7E9EB"/>
+                      </a:solidFill>
+                    </a:lnB>
+                  </a:tcPr>
+                </a:tc>
+                <a:tc>
+                  <a:txBody>
+                    <a:bodyPr/>
+                    <a:lstStyle/>
+                    <a:p>
+                      <a:pPr algn="l"/>
+                      <a:r>
+                        <a:rPr sz="800" b="0">
+                          <a:solidFill>
+                            <a:srgbClr val="30353A"/>
+                          </a:solidFill>
+                          <a:latin typeface="Arial"/>
+                        </a:rPr>
+                        <a:t>Outros</a:t>
+                      </a:r>
+                    </a:p>
+                  </a:txBody>
+                  <a:tcPr marL="54864" marR="54864" marT="18288" marB="18288" anchor="ctr">
+                    <a:solidFill>
+                      <a:srgbClr val="FFFFFF"/>
+                    </a:solidFill>
+                    <a:lnB w="6350" cap="flat">
+                      <a:solidFill>
+                        <a:srgbClr val="E7E9EB"/>
+                      </a:solidFill>
+                    </a:lnB>
+                  </a:tcPr>
+                </a:tc>
+                <a:tc>
+                  <a:txBody>
+                    <a:bodyPr/>
+                    <a:lstStyle/>
+                    <a:p>
+                      <a:pPr algn="l"/>
+                      <a:r>
+                        <a:rPr sz="800" b="0">
+                          <a:solidFill>
+                            <a:srgbClr val="30353A"/>
+                          </a:solidFill>
+                          <a:latin typeface="Arial"/>
+                        </a:rPr>
+                        <a:t>Multicarteira Outros</a:t>
+                      </a:r>
+                    </a:p>
+                  </a:txBody>
+                  <a:tcPr marL="54864" marR="54864" marT="18288" marB="18288" anchor="ctr">
+                    <a:solidFill>
+                      <a:srgbClr val="FFFFFF"/>
+                    </a:solidFill>
+                    <a:lnB w="6350" cap="flat">
+                      <a:solidFill>
+                        <a:srgbClr val="E7E9EB"/>
+                      </a:solidFill>
+                    </a:lnB>
+                  </a:tcPr>
+                </a:tc>
+                <a:tc>
+                  <a:txBody>
+                    <a:bodyPr/>
+                    <a:lstStyle/>
+                    <a:p>
+                      <a:pPr algn="r"/>
+                      <a:r>
+                        <a:rPr sz="800" b="0">
+                          <a:solidFill>
+                            <a:srgbClr val="30353A"/>
+                          </a:solidFill>
+                          <a:latin typeface="Arial"/>
+                        </a:rPr>
+                        <a:t>n/d</a:t>
+                      </a:r>
+                    </a:p>
+                  </a:txBody>
+                  <a:tcPr marL="54864" marR="54864" marT="18288" marB="18288" anchor="ctr">
+                    <a:solidFill>
+                      <a:srgbClr val="FFFFFF"/>
+                    </a:solidFill>
+                    <a:lnB w="6350" cap="flat">
+                      <a:solidFill>
+                        <a:srgbClr val="E7E9EB"/>
+                      </a:solidFill>
+                    </a:lnB>
+                  </a:tcPr>
+                </a:tc>
+                <a:tc>
+                  <a:txBody>
+                    <a:bodyPr/>
+                    <a:lstStyle/>
+                    <a:p>
+                      <a:pPr algn="l"/>
+                      <a:r>
+                        <a:rPr sz="800" b="0">
+                          <a:solidFill>
+                            <a:srgbClr val="30353A"/>
+                          </a:solidFill>
+                          <a:latin typeface="Arial"/>
+                        </a:rPr>
+                        <a:t>Não identificado</a:t>
+                      </a:r>
+                    </a:p>
+                  </a:txBody>
+                  <a:tcPr marL="54864" marR="54864" marT="18288" marB="18288" anchor="ctr">
+                    <a:solidFill>
+                      <a:srgbClr val="FFFFFF"/>
+                    </a:solidFill>
+                    <a:lnB w="6350" cap="flat">
+                      <a:solidFill>
+                        <a:srgbClr val="E7E9EB"/>
+                      </a:solidFill>
+                    </a:lnB>
+                  </a:tcPr>
+                </a:tc>
+                <a:tc>
+                  <a:txBody>
+                    <a:bodyPr/>
+                    <a:lstStyle/>
+                    <a:p>
+                      <a:pPr algn="l"/>
+                      <a:r>
+                        <a:rPr sz="800" b="0">
+                          <a:solidFill>
+                            <a:srgbClr val="30353A"/>
+                          </a:solidFill>
+                          <a:latin typeface="Arial"/>
+                        </a:rPr>
+                        <a:t>Não identificado</a:t>
+                      </a:r>
+                    </a:p>
+                  </a:txBody>
+                  <a:tcPr marL="54864" marR="54864" marT="18288" marB="18288" anchor="ctr">
+                    <a:solidFill>
+                      <a:srgbClr val="FFFFFF"/>
+                    </a:solidFill>
+                    <a:lnB w="6350" cap="flat">
+                      <a:solidFill>
+                        <a:srgbClr val="E7E9EB"/>
+                      </a:solidFill>
+                    </a:lnB>
+                  </a:tcPr>
+                </a:tc>
+                <a:tc>
+                  <a:txBody>
+                    <a:bodyPr/>
+                    <a:lstStyle/>
+                    <a:p>
+                      <a:pPr algn="l"/>
+                      <a:r>
+                        <a:rPr sz="800" b="0">
+                          <a:solidFill>
+                            <a:srgbClr val="30353A"/>
+                          </a:solidFill>
+                          <a:latin typeface="Arial"/>
+                        </a:rPr>
+                        <a:t/>
+                      </a:r>
+                    </a:p>
+                  </a:txBody>
+                  <a:tcPr marL="54864" marR="54864" marT="18288" marB="18288" anchor="ctr">
+                    <a:solidFill>
+                      <a:srgbClr val="FFFFFF"/>
+                    </a:solidFill>
+                    <a:lnB w="6350" cap="flat">
+                      <a:solidFill>
+                        <a:srgbClr val="E7E9EB"/>
+                      </a:solidFill>
+                    </a:lnB>
+                  </a:tcPr>
+                </a:tc>
+                <a:tc>
+                  <a:txBody>
+                    <a:bodyPr/>
+                    <a:lstStyle/>
+                    <a:p>
+                      <a:pPr algn="l"/>
+                      <a:r>
+                        <a:rPr sz="800" b="0">
+                          <a:solidFill>
+                            <a:srgbClr val="30353A"/>
+                          </a:solidFill>
+                          <a:latin typeface="Arial"/>
+                        </a:rPr>
+                        <a:t/>
+                      </a:r>
+                    </a:p>
+                  </a:txBody>
+                  <a:tcPr marL="54864" marR="54864" marT="18288" marB="18288" anchor="ctr">
+                    <a:solidFill>
+                      <a:srgbClr val="FFFFFF"/>
+                    </a:solidFill>
+                    <a:lnB w="6350" cap="flat">
+                      <a:solidFill>
+                        <a:srgbClr val="E7E9EB"/>
+                      </a:solidFill>
+                    </a:lnB>
+                  </a:tcPr>
+                </a:tc>
+              </a:tr>
+              <a:tr h="224028">
+                <a:tc>
+                  <a:txBody>
+                    <a:bodyPr/>
+                    <a:lstStyle/>
+                    <a:p>
+                      <a:pPr algn="l"/>
+                      <a:r>
+                        <a:rPr sz="800" b="0">
+                          <a:solidFill>
+                            <a:srgbClr val="30353A"/>
+                          </a:solidFill>
+                          <a:latin typeface="Arial"/>
+                        </a:rPr>
+                        <a:t>8</a:t>
+                      </a:r>
+                    </a:p>
+                  </a:txBody>
+                  <a:tcPr marL="54864" marR="54864" marT="18288" marB="18288" anchor="ctr">
+                    <a:solidFill>
+                      <a:srgbClr val="FFFFFF"/>
+                    </a:solidFill>
+                    <a:lnB w="6350" cap="flat">
+                      <a:solidFill>
+                        <a:srgbClr val="E7E9EB"/>
+                      </a:solidFill>
+                    </a:lnB>
+                  </a:tcPr>
+                </a:tc>
+                <a:tc>
+                  <a:txBody>
+                    <a:bodyPr/>
+                    <a:lstStyle/>
+                    <a:p>
+                      <a:pPr algn="l"/>
+                      <a:r>
+                        <a:rPr sz="800" b="0">
+                          <a:solidFill>
+                            <a:srgbClr val="30353A"/>
+                          </a:solidFill>
+                          <a:latin typeface="Arial"/>
+                        </a:rPr>
+                        <a:t>Turbi I</a:t>
+                      </a:r>
+                    </a:p>
+                  </a:txBody>
+                  <a:tcPr marL="54864" marR="54864" marT="18288" marB="18288" anchor="ctr">
+                    <a:solidFill>
+                      <a:srgbClr val="FFFFFF"/>
+                    </a:solidFill>
+                    <a:lnB w="6350" cap="flat">
+                      <a:solidFill>
+                        <a:srgbClr val="E7E9EB"/>
+                      </a:solidFill>
+                    </a:lnB>
+                  </a:tcPr>
+                </a:tc>
+                <a:tc>
+                  <a:txBody>
+                    <a:bodyPr/>
+                    <a:lstStyle/>
+                    <a:p>
+                      <a:pPr algn="l"/>
+                      <a:r>
+                        <a:rPr sz="800" b="0">
+                          <a:solidFill>
+                            <a:srgbClr val="30353A"/>
+                          </a:solidFill>
+                          <a:latin typeface="Arial"/>
+                        </a:rPr>
+                        <a:t>Turbi</a:t>
+                      </a:r>
+                    </a:p>
+                  </a:txBody>
+                  <a:tcPr marL="54864" marR="54864" marT="18288" marB="18288" anchor="ctr">
+                    <a:solidFill>
+                      <a:srgbClr val="FFFFFF"/>
+                    </a:solidFill>
+                    <a:lnB w="6350" cap="flat">
+                      <a:solidFill>
+                        <a:srgbClr val="E7E9EB"/>
+                      </a:solidFill>
+                    </a:lnB>
+                  </a:tcPr>
+                </a:tc>
+                <a:tc>
+                  <a:txBody>
+                    <a:bodyPr/>
+                    <a:lstStyle/>
+                    <a:p>
+                      <a:pPr algn="l"/>
+                      <a:r>
+                        <a:rPr sz="800" b="0">
+                          <a:solidFill>
+                            <a:srgbClr val="30353A"/>
+                          </a:solidFill>
+                          <a:latin typeface="Arial"/>
+                        </a:rPr>
+                        <a:t>Financeiro</a:t>
+                      </a:r>
+                    </a:p>
+                  </a:txBody>
+                  <a:tcPr marL="54864" marR="54864" marT="18288" marB="18288" anchor="ctr">
+                    <a:solidFill>
+                      <a:srgbClr val="FFFFFF"/>
+                    </a:solidFill>
+                    <a:lnB w="6350" cap="flat">
+                      <a:solidFill>
+                        <a:srgbClr val="E7E9EB"/>
+                      </a:solidFill>
+                    </a:lnB>
+                  </a:tcPr>
+                </a:tc>
+                <a:tc>
+                  <a:txBody>
+                    <a:bodyPr/>
+                    <a:lstStyle/>
+                    <a:p>
+                      <a:pPr algn="l"/>
+                      <a:r>
+                        <a:rPr sz="800" b="0">
+                          <a:solidFill>
+                            <a:srgbClr val="30353A"/>
+                          </a:solidFill>
+                          <a:latin typeface="Arial"/>
+                        </a:rPr>
+                        <a:t>Financiamento de Veículos</a:t>
+                      </a:r>
+                    </a:p>
+                  </a:txBody>
+                  <a:tcPr marL="54864" marR="54864" marT="18288" marB="18288" anchor="ctr">
+                    <a:solidFill>
+                      <a:srgbClr val="FFFFFF"/>
+                    </a:solidFill>
+                    <a:lnB w="6350" cap="flat">
+                      <a:solidFill>
+                        <a:srgbClr val="E7E9EB"/>
+                      </a:solidFill>
+                    </a:lnB>
+                  </a:tcPr>
+                </a:tc>
+                <a:tc>
+                  <a:txBody>
+                    <a:bodyPr/>
+                    <a:lstStyle/>
+                    <a:p>
+                      <a:pPr algn="r"/>
+                      <a:r>
+                        <a:rPr sz="800" b="0">
+                          <a:solidFill>
+                            <a:srgbClr val="30353A"/>
+                          </a:solidFill>
+                          <a:latin typeface="Arial"/>
+                        </a:rPr>
+                        <a:t>0,12</a:t>
+                      </a:r>
+                    </a:p>
+                  </a:txBody>
+                  <a:tcPr marL="54864" marR="54864" marT="18288" marB="18288" anchor="ctr">
+                    <a:solidFill>
+                      <a:srgbClr val="FFFFFF"/>
+                    </a:solidFill>
+                    <a:lnB w="6350" cap="flat">
+                      <a:solidFill>
+                        <a:srgbClr val="E7E9EB"/>
+                      </a:solidFill>
+                    </a:lnB>
+                  </a:tcPr>
+                </a:tc>
+                <a:tc>
+                  <a:txBody>
+                    <a:bodyPr/>
+                    <a:lstStyle/>
+                    <a:p>
+                      <a:pPr algn="l"/>
+                      <a:r>
+                        <a:rPr sz="800" b="0">
+                          <a:solidFill>
+                            <a:srgbClr val="30353A"/>
+                          </a:solidFill>
+                          <a:latin typeface="Arial"/>
+                        </a:rPr>
+                        <a:t>Não – UBS BB</a:t>
+                      </a:r>
+                    </a:p>
+                  </a:txBody>
+                  <a:tcPr marL="54864" marR="54864" marT="18288" marB="18288" anchor="ctr">
+                    <a:solidFill>
+                      <a:srgbClr val="FFFFFF"/>
+                    </a:solidFill>
+                    <a:lnB w="6350" cap="flat">
+                      <a:solidFill>
+                        <a:srgbClr val="E7E9EB"/>
+                      </a:solidFill>
+                    </a:lnB>
+                  </a:tcPr>
+                </a:tc>
+                <a:tc>
+                  <a:txBody>
+                    <a:bodyPr/>
+                    <a:lstStyle/>
+                    <a:p>
+                      <a:pPr algn="l"/>
+                      <a:r>
+                        <a:rPr sz="800" b="0">
+                          <a:solidFill>
+                            <a:srgbClr val="30353A"/>
+                          </a:solidFill>
+                          <a:latin typeface="Arial"/>
+                        </a:rPr>
+                        <a:t>Misto</a:t>
+                      </a:r>
+                    </a:p>
+                  </a:txBody>
+                  <a:tcPr marL="54864" marR="54864" marT="18288" marB="18288" anchor="ctr">
+                    <a:solidFill>
+                      <a:srgbClr val="FFFFFF"/>
+                    </a:solidFill>
+                    <a:lnB w="6350" cap="flat">
+                      <a:solidFill>
+                        <a:srgbClr val="E7E9EB"/>
+                      </a:solidFill>
+                    </a:lnB>
+                  </a:tcPr>
+                </a:tc>
+                <a:tc>
+                  <a:txBody>
+                    <a:bodyPr/>
+                    <a:lstStyle/>
+                    <a:p>
+                      <a:pPr algn="l"/>
+                      <a:r>
+                        <a:rPr sz="800" b="0">
+                          <a:solidFill>
+                            <a:srgbClr val="30353A"/>
+                          </a:solidFill>
+                          <a:latin typeface="Arial"/>
+                        </a:rPr>
+                        <a:t/>
+                      </a:r>
+                    </a:p>
+                  </a:txBody>
+                  <a:tcPr marL="54864" marR="54864" marT="18288" marB="18288" anchor="ctr">
+                    <a:solidFill>
+                      <a:srgbClr val="FFFFFF"/>
+                    </a:solidFill>
+                    <a:lnB w="6350" cap="flat">
+                      <a:solidFill>
+                        <a:srgbClr val="E7E9EB"/>
+                      </a:solidFill>
+                    </a:lnB>
+                  </a:tcPr>
+                </a:tc>
+                <a:tc>
+                  <a:txBody>
+                    <a:bodyPr/>
+                    <a:lstStyle/>
+                    <a:p>
+                      <a:pPr algn="l"/>
+                      <a:r>
+                        <a:rPr sz="800" b="0">
+                          <a:solidFill>
+                            <a:srgbClr val="30353A"/>
+                          </a:solidFill>
+                          <a:latin typeface="Arial"/>
+                        </a:rPr>
+                        <a:t/>
+                      </a:r>
+                    </a:p>
+                  </a:txBody>
+                  <a:tcPr marL="54864" marR="54864" marT="18288" marB="18288" anchor="ctr">
+                    <a:solidFill>
+                      <a:srgbClr val="FFFFFF"/>
+                    </a:solidFill>
+                    <a:lnB w="6350" cap="flat">
+                      <a:solidFill>
+                        <a:srgbClr val="E7E9EB"/>
+                      </a:solidFill>
+                    </a:lnB>
+                  </a:tcPr>
+                </a:tc>
+              </a:tr>
+              <a:tr h="224028">
+                <a:tc>
+                  <a:txBody>
+                    <a:bodyPr/>
+                    <a:lstStyle/>
+                    <a:p>
+                      <a:pPr algn="l"/>
+                      <a:r>
+                        <a:rPr sz="800" b="0">
+                          <a:solidFill>
+                            <a:srgbClr val="30353A"/>
+                          </a:solidFill>
+                          <a:latin typeface="Arial"/>
+                        </a:rPr>
+                        <a:t>9</a:t>
+                      </a:r>
+                    </a:p>
+                  </a:txBody>
+                  <a:tcPr marL="54864" marR="54864" marT="18288" marB="18288" anchor="ctr">
+                    <a:solidFill>
+                      <a:srgbClr val="FFFFFF"/>
+                    </a:solidFill>
+                    <a:lnB w="6350" cap="flat">
+                      <a:solidFill>
+                        <a:srgbClr val="E7E9EB"/>
+                      </a:solidFill>
+                    </a:lnB>
+                  </a:tcPr>
+                </a:tc>
+                <a:tc>
+                  <a:txBody>
+                    <a:bodyPr/>
+                    <a:lstStyle/>
+                    <a:p>
+                      <a:pPr algn="l"/>
+                      <a:r>
+                        <a:rPr sz="800" b="0">
+                          <a:solidFill>
+                            <a:srgbClr val="30353A"/>
+                          </a:solidFill>
+                          <a:latin typeface="Arial"/>
+                        </a:rPr>
+                        <a:t>XPCE Infra</a:t>
+                      </a:r>
+                    </a:p>
+                  </a:txBody>
+                  <a:tcPr marL="54864" marR="54864" marT="18288" marB="18288" anchor="ctr">
+                    <a:solidFill>
+                      <a:srgbClr val="FFFFFF"/>
+                    </a:solidFill>
+                    <a:lnB w="6350" cap="flat">
+                      <a:solidFill>
+                        <a:srgbClr val="E7E9EB"/>
+                      </a:solidFill>
+                    </a:lnB>
+                  </a:tcPr>
+                </a:tc>
+                <a:tc>
+                  <a:txBody>
+                    <a:bodyPr/>
+                    <a:lstStyle/>
+                    <a:p>
+                      <a:pPr algn="l"/>
+                      <a:r>
+                        <a:rPr sz="800" b="0">
+                          <a:solidFill>
+                            <a:srgbClr val="30353A"/>
+                          </a:solidFill>
+                          <a:latin typeface="Arial"/>
+                        </a:rPr>
+                        <a:t>Arapua</a:t>
+                      </a:r>
+                    </a:p>
+                  </a:txBody>
+                  <a:tcPr marL="54864" marR="54864" marT="18288" marB="18288" anchor="ctr">
+                    <a:solidFill>
+                      <a:srgbClr val="FFFFFF"/>
+                    </a:solidFill>
+                    <a:lnB w="6350" cap="flat">
+                      <a:solidFill>
+                        <a:srgbClr val="E7E9EB"/>
+                      </a:solidFill>
+                    </a:lnB>
+                  </a:tcPr>
+                </a:tc>
+                <a:tc>
+                  <a:txBody>
+                    <a:bodyPr/>
+                    <a:lstStyle/>
+                    <a:p>
+                      <a:pPr algn="l"/>
+                      <a:r>
+                        <a:rPr sz="800" b="0">
+                          <a:solidFill>
+                            <a:srgbClr val="30353A"/>
+                          </a:solidFill>
+                          <a:latin typeface="Arial"/>
+                        </a:rPr>
+                        <a:t>Outros</a:t>
+                      </a:r>
+                    </a:p>
+                  </a:txBody>
+                  <a:tcPr marL="54864" marR="54864" marT="18288" marB="18288" anchor="ctr">
+                    <a:solidFill>
+                      <a:srgbClr val="FFFFFF"/>
+                    </a:solidFill>
+                    <a:lnB w="6350" cap="flat">
+                      <a:solidFill>
+                        <a:srgbClr val="E7E9EB"/>
+                      </a:solidFill>
+                    </a:lnB>
+                  </a:tcPr>
+                </a:tc>
+                <a:tc>
+                  <a:txBody>
+                    <a:bodyPr/>
+                    <a:lstStyle/>
+                    <a:p>
+                      <a:pPr algn="l"/>
+                      <a:r>
+                        <a:rPr sz="800" b="0">
+                          <a:solidFill>
+                            <a:srgbClr val="30353A"/>
+                          </a:solidFill>
+                          <a:latin typeface="Arial"/>
+                        </a:rPr>
+                        <a:t>Multicarteira Outros</a:t>
+                      </a:r>
+                    </a:p>
+                  </a:txBody>
+                  <a:tcPr marL="54864" marR="54864" marT="18288" marB="18288" anchor="ctr">
+                    <a:solidFill>
+                      <a:srgbClr val="FFFFFF"/>
+                    </a:solidFill>
+                    <a:lnB w="6350" cap="flat">
+                      <a:solidFill>
+                        <a:srgbClr val="E7E9EB"/>
+                      </a:solidFill>
+                    </a:lnB>
+                  </a:tcPr>
+                </a:tc>
+                <a:tc>
+                  <a:txBody>
+                    <a:bodyPr/>
+                    <a:lstStyle/>
+                    <a:p>
+                      <a:pPr algn="r"/>
+                      <a:r>
+                        <a:rPr sz="800" b="0">
+                          <a:solidFill>
+                            <a:srgbClr val="30353A"/>
+                          </a:solidFill>
+                          <a:latin typeface="Arial"/>
+                        </a:rPr>
+                        <a:t>n/d</a:t>
+                      </a:r>
+                    </a:p>
+                  </a:txBody>
+                  <a:tcPr marL="54864" marR="54864" marT="18288" marB="18288" anchor="ctr">
+                    <a:solidFill>
+                      <a:srgbClr val="FFFFFF"/>
+                    </a:solidFill>
+                    <a:lnB w="6350" cap="flat">
+                      <a:solidFill>
+                        <a:srgbClr val="E7E9EB"/>
+                      </a:solidFill>
+                    </a:lnB>
+                  </a:tcPr>
+                </a:tc>
+                <a:tc>
+                  <a:txBody>
+                    <a:bodyPr/>
+                    <a:lstStyle/>
+                    <a:p>
+                      <a:pPr algn="l"/>
+                      <a:r>
+                        <a:rPr sz="800" b="0">
+                          <a:solidFill>
+                            <a:srgbClr val="30353A"/>
+                          </a:solidFill>
+                          <a:latin typeface="Arial"/>
+                        </a:rPr>
+                        <a:t>Não identificado</a:t>
+                      </a:r>
+                    </a:p>
+                  </a:txBody>
+                  <a:tcPr marL="54864" marR="54864" marT="18288" marB="18288" anchor="ctr">
+                    <a:solidFill>
+                      <a:srgbClr val="FFFFFF"/>
+                    </a:solidFill>
+                    <a:lnB w="6350" cap="flat">
+                      <a:solidFill>
+                        <a:srgbClr val="E7E9EB"/>
+                      </a:solidFill>
+                    </a:lnB>
+                  </a:tcPr>
+                </a:tc>
+                <a:tc>
+                  <a:txBody>
+                    <a:bodyPr/>
+                    <a:lstStyle/>
+                    <a:p>
+                      <a:pPr algn="l"/>
+                      <a:r>
+                        <a:rPr sz="800" b="0">
+                          <a:solidFill>
+                            <a:srgbClr val="30353A"/>
+                          </a:solidFill>
+                          <a:latin typeface="Arial"/>
+                        </a:rPr>
+                        <a:t>Não identificado</a:t>
+                      </a:r>
+                    </a:p>
+                  </a:txBody>
+                  <a:tcPr marL="54864" marR="54864" marT="18288" marB="18288" anchor="ctr">
+                    <a:solidFill>
+                      <a:srgbClr val="FFFFFF"/>
+                    </a:solidFill>
+                    <a:lnB w="6350" cap="flat">
+                      <a:solidFill>
+                        <a:srgbClr val="E7E9EB"/>
+                      </a:solidFill>
+                    </a:lnB>
+                  </a:tcPr>
+                </a:tc>
+                <a:tc>
+                  <a:txBody>
+                    <a:bodyPr/>
+                    <a:lstStyle/>
+                    <a:p>
+                      <a:pPr algn="l"/>
+                      <a:r>
+                        <a:rPr sz="800" b="0">
+                          <a:solidFill>
+                            <a:srgbClr val="30353A"/>
+                          </a:solidFill>
+                          <a:latin typeface="Arial"/>
+                        </a:rPr>
+                        <a:t/>
+                      </a:r>
+                    </a:p>
+                  </a:txBody>
+                  <a:tcPr marL="54864" marR="54864" marT="18288" marB="18288" anchor="ctr">
+                    <a:solidFill>
+                      <a:srgbClr val="FFFFFF"/>
+                    </a:solidFill>
+                    <a:lnB w="6350" cap="flat">
+                      <a:solidFill>
+                        <a:srgbClr val="E7E9EB"/>
+                      </a:solidFill>
+                    </a:lnB>
+                  </a:tcPr>
+                </a:tc>
+                <a:tc>
+                  <a:txBody>
+                    <a:bodyPr/>
+                    <a:lstStyle/>
+                    <a:p>
+                      <a:pPr algn="l"/>
+                      <a:r>
+                        <a:rPr sz="800" b="0">
+                          <a:solidFill>
+                            <a:srgbClr val="30353A"/>
+                          </a:solidFill>
+                          <a:latin typeface="Arial"/>
+                        </a:rPr>
+                        <a:t/>
+                      </a:r>
+                    </a:p>
+                  </a:txBody>
+                  <a:tcPr marL="54864" marR="54864" marT="18288" marB="18288" anchor="ctr">
+                    <a:solidFill>
+                      <a:srgbClr val="FFFFFF"/>
+                    </a:solidFill>
+                    <a:lnB w="6350" cap="flat">
+                      <a:solidFill>
+                        <a:srgbClr val="E7E9EB"/>
+                      </a:solidFill>
+                    </a:lnB>
+                  </a:tcPr>
+                </a:tc>
+              </a:tr>
+              <a:tr h="224028">
+                <a:tc>
+                  <a:txBody>
+                    <a:bodyPr/>
+                    <a:lstStyle/>
+                    <a:p>
+                      <a:pPr algn="l"/>
+                      <a:r>
+                        <a:rPr sz="800" b="0">
+                          <a:solidFill>
+                            <a:srgbClr val="30353A"/>
+                          </a:solidFill>
+                          <a:latin typeface="Arial"/>
+                        </a:rPr>
+                        <a:t>10</a:t>
+                      </a:r>
+                    </a:p>
+                  </a:txBody>
+                  <a:tcPr marL="54864" marR="54864" marT="18288" marB="18288" anchor="ctr">
+                    <a:solidFill>
+                      <a:srgbClr val="FFFFFF"/>
+                    </a:solidFill>
+                    <a:lnB w="6350" cap="flat">
+                      <a:solidFill>
+                        <a:srgbClr val="E7E9EB"/>
+                      </a:solidFill>
+                    </a:lnB>
+                  </a:tcPr>
+                </a:tc>
+                <a:tc>
+                  <a:txBody>
+                    <a:bodyPr/>
+                    <a:lstStyle/>
+                    <a:p>
+                      <a:pPr algn="l"/>
+                      <a:r>
+                        <a:rPr sz="800" b="0">
+                          <a:solidFill>
+                            <a:srgbClr val="30353A"/>
+                          </a:solidFill>
+                          <a:latin typeface="Arial"/>
+                        </a:rPr>
+                        <a:t>Jefer Banking NP</a:t>
+                      </a:r>
+                    </a:p>
+                  </a:txBody>
+                  <a:tcPr marL="54864" marR="54864" marT="18288" marB="18288" anchor="ctr">
+                    <a:solidFill>
+                      <a:srgbClr val="FFFFFF"/>
+                    </a:solidFill>
+                    <a:lnB w="6350" cap="flat">
+                      <a:solidFill>
+                        <a:srgbClr val="E7E9EB"/>
+                      </a:solidFill>
+                    </a:lnB>
+                  </a:tcPr>
+                </a:tc>
+                <a:tc>
+                  <a:txBody>
+                    <a:bodyPr/>
+                    <a:lstStyle/>
+                    <a:p>
+                      <a:pPr algn="l"/>
+                      <a:r>
+                        <a:rPr sz="800" b="0">
+                          <a:solidFill>
+                            <a:srgbClr val="30353A"/>
+                          </a:solidFill>
+                          <a:latin typeface="Arial"/>
+                        </a:rPr>
+                        <a:t>BWT</a:t>
+                      </a:r>
+                    </a:p>
+                  </a:txBody>
+                  <a:tcPr marL="54864" marR="54864" marT="18288" marB="18288" anchor="ctr">
+                    <a:solidFill>
+                      <a:srgbClr val="FFFFFF"/>
+                    </a:solidFill>
+                    <a:lnB w="6350" cap="flat">
+                      <a:solidFill>
+                        <a:srgbClr val="E7E9EB"/>
+                      </a:solidFill>
+                    </a:lnB>
+                  </a:tcPr>
+                </a:tc>
+                <a:tc>
+                  <a:txBody>
+                    <a:bodyPr/>
+                    <a:lstStyle/>
+                    <a:p>
+                      <a:pPr algn="l"/>
+                      <a:r>
+                        <a:rPr sz="800" b="0">
+                          <a:solidFill>
+                            <a:srgbClr val="30353A"/>
+                          </a:solidFill>
+                          <a:latin typeface="Arial"/>
+                        </a:rPr>
+                        <a:t>Outros</a:t>
+                      </a:r>
+                    </a:p>
+                  </a:txBody>
+                  <a:tcPr marL="54864" marR="54864" marT="18288" marB="18288" anchor="ctr">
+                    <a:solidFill>
+                      <a:srgbClr val="FFFFFF"/>
+                    </a:solidFill>
+                    <a:lnB w="6350" cap="flat">
+                      <a:solidFill>
+                        <a:srgbClr val="E7E9EB"/>
+                      </a:solidFill>
+                    </a:lnB>
+                  </a:tcPr>
+                </a:tc>
+                <a:tc>
+                  <a:txBody>
+                    <a:bodyPr/>
+                    <a:lstStyle/>
+                    <a:p>
+                      <a:pPr algn="l"/>
+                      <a:r>
+                        <a:rPr sz="800" b="0">
+                          <a:solidFill>
+                            <a:srgbClr val="30353A"/>
+                          </a:solidFill>
+                          <a:latin typeface="Arial"/>
+                        </a:rPr>
+                        <a:t>Multicarteira Outros</a:t>
+                      </a:r>
+                    </a:p>
+                  </a:txBody>
+                  <a:tcPr marL="54864" marR="54864" marT="18288" marB="18288" anchor="ctr">
+                    <a:solidFill>
+                      <a:srgbClr val="FFFFFF"/>
+                    </a:solidFill>
+                    <a:lnB w="6350" cap="flat">
+                      <a:solidFill>
+                        <a:srgbClr val="E7E9EB"/>
+                      </a:solidFill>
+                    </a:lnB>
+                  </a:tcPr>
+                </a:tc>
+                <a:tc>
+                  <a:txBody>
+                    <a:bodyPr/>
+                    <a:lstStyle/>
+                    <a:p>
+                      <a:pPr algn="r"/>
+                      <a:r>
+                        <a:rPr sz="800" b="0">
+                          <a:solidFill>
+                            <a:srgbClr val="30353A"/>
+                          </a:solidFill>
+                          <a:latin typeface="Arial"/>
+                        </a:rPr>
+                        <a:t>n/d</a:t>
+                      </a:r>
+                    </a:p>
+                  </a:txBody>
+                  <a:tcPr marL="54864" marR="54864" marT="18288" marB="18288" anchor="ctr">
+                    <a:solidFill>
+                      <a:srgbClr val="FFFFFF"/>
+                    </a:solidFill>
+                    <a:lnB w="6350" cap="flat">
+                      <a:solidFill>
+                        <a:srgbClr val="E7E9EB"/>
+                      </a:solidFill>
+                    </a:lnB>
+                  </a:tcPr>
+                </a:tc>
+                <a:tc>
+                  <a:txBody>
+                    <a:bodyPr/>
+                    <a:lstStyle/>
+                    <a:p>
+                      <a:pPr algn="l"/>
+                      <a:r>
+                        <a:rPr sz="800" b="0">
+                          <a:solidFill>
+                            <a:srgbClr val="30353A"/>
+                          </a:solidFill>
+                          <a:latin typeface="Arial"/>
+                        </a:rPr>
+                        <a:t>Não identificado</a:t>
+                      </a:r>
+                    </a:p>
+                  </a:txBody>
+                  <a:tcPr marL="54864" marR="54864" marT="18288" marB="18288" anchor="ctr">
+                    <a:solidFill>
+                      <a:srgbClr val="FFFFFF"/>
+                    </a:solidFill>
+                    <a:lnB w="6350" cap="flat">
+                      <a:solidFill>
+                        <a:srgbClr val="E7E9EB"/>
+                      </a:solidFill>
+                    </a:lnB>
+                  </a:tcPr>
+                </a:tc>
+                <a:tc>
+                  <a:txBody>
+                    <a:bodyPr/>
+                    <a:lstStyle/>
+                    <a:p>
+                      <a:pPr algn="l"/>
+                      <a:r>
+                        <a:rPr sz="800" b="0">
+                          <a:solidFill>
+                            <a:srgbClr val="30353A"/>
+                          </a:solidFill>
+                          <a:latin typeface="Arial"/>
+                        </a:rPr>
+                        <a:t>Não identificado</a:t>
+                      </a:r>
+                    </a:p>
+                  </a:txBody>
+                  <a:tcPr marL="54864" marR="54864" marT="18288" marB="18288" anchor="ctr">
+                    <a:solidFill>
+                      <a:srgbClr val="FFFFFF"/>
+                    </a:solidFill>
+                    <a:lnB w="6350" cap="flat">
+                      <a:solidFill>
+                        <a:srgbClr val="E7E9EB"/>
+                      </a:solidFill>
+                    </a:lnB>
+                  </a:tcPr>
+                </a:tc>
+                <a:tc>
+                  <a:txBody>
+                    <a:bodyPr/>
+                    <a:lstStyle/>
+                    <a:p>
+                      <a:pPr algn="l"/>
+                      <a:r>
+                        <a:rPr sz="800" b="0">
+                          <a:solidFill>
+                            <a:srgbClr val="30353A"/>
+                          </a:solidFill>
+                          <a:latin typeface="Arial"/>
+                        </a:rPr>
+                        <a:t/>
+                      </a:r>
+                    </a:p>
+                  </a:txBody>
+                  <a:tcPr marL="54864" marR="54864" marT="18288" marB="18288" anchor="ctr">
+                    <a:solidFill>
+                      <a:srgbClr val="FFFFFF"/>
+                    </a:solidFill>
+                    <a:lnB w="6350" cap="flat">
+                      <a:solidFill>
+                        <a:srgbClr val="E7E9EB"/>
+                      </a:solidFill>
+                    </a:lnB>
+                  </a:tcPr>
+                </a:tc>
+                <a:tc>
+                  <a:txBody>
+                    <a:bodyPr/>
+                    <a:lstStyle/>
+                    <a:p>
+                      <a:pPr algn="l"/>
+                      <a:r>
+                        <a:rPr sz="800" b="0">
+                          <a:solidFill>
+                            <a:srgbClr val="30353A"/>
+                          </a:solidFill>
+                          <a:latin typeface="Arial"/>
+                        </a:rPr>
+                        <a:t/>
+                      </a:r>
+                    </a:p>
+                  </a:txBody>
+                  <a:tcPr marL="54864" marR="54864" marT="18288" marB="18288" anchor="ctr">
+                    <a:solidFill>
+                      <a:srgbClr val="FFFFFF"/>
+                    </a:solidFill>
+                    <a:lnB w="6350" cap="flat">
+                      <a:solidFill>
+                        <a:srgbClr val="E7E9EB"/>
+                      </a:solidFill>
+                    </a:lnB>
+                  </a:tcPr>
+                </a:tc>
+              </a:tr>
+              <a:tr h="224028">
+                <a:tc>
+                  <a:txBody>
+                    <a:bodyPr/>
+                    <a:lstStyle/>
+                    <a:p>
+                      <a:pPr algn="l"/>
+                      <a:r>
+                        <a:rPr sz="800" b="0">
+                          <a:solidFill>
+                            <a:srgbClr val="30353A"/>
+                          </a:solidFill>
+                          <a:latin typeface="Arial"/>
+                        </a:rPr>
+                        <a:t>11</a:t>
+                      </a:r>
+                    </a:p>
+                  </a:txBody>
+                  <a:tcPr marL="54864" marR="54864" marT="18288" marB="18288" anchor="ctr">
+                    <a:solidFill>
+                      <a:srgbClr val="FFFFFF"/>
+                    </a:solidFill>
+                    <a:lnB w="6350" cap="flat">
+                      <a:solidFill>
+                        <a:srgbClr val="E7E9EB"/>
+                      </a:solidFill>
+                    </a:lnB>
+                  </a:tcPr>
+                </a:tc>
+                <a:tc>
+                  <a:txBody>
+                    <a:bodyPr/>
+                    <a:lstStyle/>
+                    <a:p>
+                      <a:pPr algn="l"/>
+                      <a:r>
+                        <a:rPr sz="800" b="0">
+                          <a:solidFill>
+                            <a:srgbClr val="30353A"/>
+                          </a:solidFill>
+                          <a:latin typeface="Arial"/>
+                        </a:rPr>
+                        <a:t>Kyklos N</a:t>
+                      </a:r>
+                    </a:p>
+                  </a:txBody>
+                  <a:tcPr marL="54864" marR="54864" marT="18288" marB="18288" anchor="ctr">
+                    <a:solidFill>
+                      <a:srgbClr val="FFFFFF"/>
+                    </a:solidFill>
+                    <a:lnB w="6350" cap="flat">
+                      <a:solidFill>
+                        <a:srgbClr val="E7E9EB"/>
+                      </a:solidFill>
+                    </a:lnB>
+                  </a:tcPr>
+                </a:tc>
+                <a:tc>
+                  <a:txBody>
+                    <a:bodyPr/>
+                    <a:lstStyle/>
+                    <a:p>
+                      <a:pPr algn="l"/>
+                      <a:r>
+                        <a:rPr sz="800" b="0">
+                          <a:solidFill>
+                            <a:srgbClr val="30353A"/>
+                          </a:solidFill>
+                          <a:latin typeface="Arial"/>
+                        </a:rPr>
+                        <a:t>Latasa</a:t>
+                      </a:r>
+                    </a:p>
+                  </a:txBody>
+                  <a:tcPr marL="54864" marR="54864" marT="18288" marB="18288" anchor="ctr">
+                    <a:solidFill>
+                      <a:srgbClr val="FFFFFF"/>
+                    </a:solidFill>
+                    <a:lnB w="6350" cap="flat">
+                      <a:solidFill>
+                        <a:srgbClr val="E7E9EB"/>
+                      </a:solidFill>
+                    </a:lnB>
+                  </a:tcPr>
+                </a:tc>
+                <a:tc>
+                  <a:txBody>
+                    <a:bodyPr/>
+                    <a:lstStyle/>
+                    <a:p>
+                      <a:pPr algn="l"/>
+                      <a:r>
+                        <a:rPr sz="800" b="0">
+                          <a:solidFill>
+                            <a:srgbClr val="30353A"/>
+                          </a:solidFill>
+                          <a:latin typeface="Arial"/>
+                        </a:rPr>
+                        <a:t>Outros</a:t>
+                      </a:r>
+                    </a:p>
+                  </a:txBody>
+                  <a:tcPr marL="54864" marR="54864" marT="18288" marB="18288" anchor="ctr">
+                    <a:solidFill>
+                      <a:srgbClr val="FFFFFF"/>
+                    </a:solidFill>
+                    <a:lnB w="6350" cap="flat">
+                      <a:solidFill>
+                        <a:srgbClr val="E7E9EB"/>
+                      </a:solidFill>
+                    </a:lnB>
+                  </a:tcPr>
+                </a:tc>
+                <a:tc>
+                  <a:txBody>
+                    <a:bodyPr/>
+                    <a:lstStyle/>
+                    <a:p>
+                      <a:pPr algn="l"/>
+                      <a:r>
+                        <a:rPr sz="800" b="0">
+                          <a:solidFill>
+                            <a:srgbClr val="30353A"/>
+                          </a:solidFill>
+                          <a:latin typeface="Arial"/>
+                        </a:rPr>
+                        <a:t>Multicarteira Outros</a:t>
+                      </a:r>
+                    </a:p>
+                  </a:txBody>
+                  <a:tcPr marL="54864" marR="54864" marT="18288" marB="18288" anchor="ctr">
+                    <a:solidFill>
+                      <a:srgbClr val="FFFFFF"/>
+                    </a:solidFill>
+                    <a:lnB w="6350" cap="flat">
+                      <a:solidFill>
+                        <a:srgbClr val="E7E9EB"/>
+                      </a:solidFill>
+                    </a:lnB>
+                  </a:tcPr>
+                </a:tc>
+                <a:tc>
+                  <a:txBody>
+                    <a:bodyPr/>
+                    <a:lstStyle/>
+                    <a:p>
+                      <a:pPr algn="r"/>
+                      <a:r>
+                        <a:rPr sz="800" b="0">
+                          <a:solidFill>
+                            <a:srgbClr val="30353A"/>
+                          </a:solidFill>
+                          <a:latin typeface="Arial"/>
+                        </a:rPr>
+                        <a:t>0,01</a:t>
+                      </a:r>
+                    </a:p>
+                  </a:txBody>
+                  <a:tcPr marL="54864" marR="54864" marT="18288" marB="18288" anchor="ctr">
+                    <a:solidFill>
+                      <a:srgbClr val="FFFFFF"/>
+                    </a:solidFill>
+                    <a:lnB w="6350" cap="flat">
+                      <a:solidFill>
+                        <a:srgbClr val="E7E9EB"/>
+                      </a:solidFill>
+                    </a:lnB>
+                  </a:tcPr>
+                </a:tc>
+                <a:tc>
+                  <a:txBody>
+                    <a:bodyPr/>
+                    <a:lstStyle/>
+                    <a:p>
+                      <a:pPr algn="l"/>
+                      <a:r>
+                        <a:rPr sz="800" b="0">
+                          <a:solidFill>
+                            <a:srgbClr val="30353A"/>
+                          </a:solidFill>
+                          <a:latin typeface="Arial"/>
+                        </a:rPr>
+                        <a:t>Não – Finaxis</a:t>
+                      </a:r>
+                    </a:p>
+                  </a:txBody>
+                  <a:tcPr marL="54864" marR="54864" marT="18288" marB="18288" anchor="ctr">
+                    <a:solidFill>
+                      <a:srgbClr val="FFFFFF"/>
+                    </a:solidFill>
+                    <a:lnB w="6350" cap="flat">
+                      <a:solidFill>
+                        <a:srgbClr val="E7E9EB"/>
+                      </a:solidFill>
+                    </a:lnB>
+                  </a:tcPr>
+                </a:tc>
+                <a:tc>
+                  <a:txBody>
+                    <a:bodyPr/>
+                    <a:lstStyle/>
+                    <a:p>
+                      <a:pPr algn="l"/>
+                      <a:r>
+                        <a:rPr sz="800" b="0">
+                          <a:solidFill>
+                            <a:srgbClr val="30353A"/>
+                          </a:solidFill>
+                          <a:latin typeface="Arial"/>
+                        </a:rPr>
+                        <a:t>Não</a:t>
+                      </a:r>
+                    </a:p>
+                  </a:txBody>
+                  <a:tcPr marL="54864" marR="54864" marT="18288" marB="18288" anchor="ctr">
+                    <a:solidFill>
+                      <a:srgbClr val="FFFFFF"/>
+                    </a:solidFill>
+                    <a:lnB w="6350" cap="flat">
+                      <a:solidFill>
+                        <a:srgbClr val="E7E9EB"/>
+                      </a:solidFill>
+                    </a:lnB>
+                  </a:tcPr>
+                </a:tc>
+                <a:tc>
+                  <a:txBody>
+                    <a:bodyPr/>
+                    <a:lstStyle/>
+                    <a:p>
+                      <a:pPr algn="l"/>
+                      <a:r>
+                        <a:rPr sz="800" b="0">
+                          <a:solidFill>
+                            <a:srgbClr val="30353A"/>
+                          </a:solidFill>
+                          <a:latin typeface="Arial"/>
+                        </a:rPr>
+                        <a:t/>
+                      </a:r>
+                    </a:p>
+                  </a:txBody>
+                  <a:tcPr marL="54864" marR="54864" marT="18288" marB="18288" anchor="ctr">
+                    <a:solidFill>
+                      <a:srgbClr val="FFFFFF"/>
+                    </a:solidFill>
+                    <a:lnB w="6350" cap="flat">
+                      <a:solidFill>
+                        <a:srgbClr val="E7E9EB"/>
+                      </a:solidFill>
+                    </a:lnB>
+                  </a:tcPr>
+                </a:tc>
+                <a:tc>
+                  <a:txBody>
+                    <a:bodyPr/>
+                    <a:lstStyle/>
+                    <a:p>
+                      <a:pPr algn="l"/>
+                      <a:r>
+                        <a:rPr sz="800" b="0">
+                          <a:solidFill>
+                            <a:srgbClr val="30353A"/>
+                          </a:solidFill>
+                          <a:latin typeface="Arial"/>
+                        </a:rPr>
+                        <a:t/>
+                      </a:r>
+                    </a:p>
+                  </a:txBody>
+                  <a:tcPr marL="54864" marR="54864" marT="18288" marB="18288" anchor="ctr">
+                    <a:solidFill>
+                      <a:srgbClr val="FFFFFF"/>
+                    </a:solidFill>
+                    <a:lnB w="6350" cap="flat">
+                      <a:solidFill>
+                        <a:srgbClr val="E7E9EB"/>
+                      </a:solidFill>
+                    </a:lnB>
+                  </a:tcPr>
+                </a:tc>
+              </a:tr>
+              <a:tr h="224028">
+                <a:tc>
+                  <a:txBody>
+                    <a:bodyPr/>
+                    <a:lstStyle/>
+                    <a:p>
+                      <a:pPr algn="l"/>
+                      <a:r>
+                        <a:rPr sz="800" b="0">
+                          <a:solidFill>
+                            <a:srgbClr val="30353A"/>
+                          </a:solidFill>
+                          <a:latin typeface="Arial"/>
+                        </a:rPr>
+                        <a:t>12</a:t>
+                      </a:r>
+                    </a:p>
+                  </a:txBody>
+                  <a:tcPr marL="54864" marR="54864" marT="18288" marB="18288" anchor="ctr">
+                    <a:solidFill>
+                      <a:srgbClr val="FFFFFF"/>
+                    </a:solidFill>
+                    <a:lnB w="6350" cap="flat">
+                      <a:solidFill>
+                        <a:srgbClr val="E7E9EB"/>
+                      </a:solidFill>
+                    </a:lnB>
+                  </a:tcPr>
+                </a:tc>
+                <a:tc>
+                  <a:txBody>
+                    <a:bodyPr/>
+                    <a:lstStyle/>
+                    <a:p>
+                      <a:pPr algn="l"/>
+                      <a:r>
+                        <a:rPr sz="800" b="0">
+                          <a:solidFill>
+                            <a:srgbClr val="30353A"/>
+                          </a:solidFill>
+                          <a:latin typeface="Arial"/>
+                        </a:rPr>
+                        <a:t>LF III</a:t>
+                      </a:r>
+                    </a:p>
+                  </a:txBody>
+                  <a:tcPr marL="54864" marR="54864" marT="18288" marB="18288" anchor="ctr">
+                    <a:solidFill>
+                      <a:srgbClr val="FFFFFF"/>
+                    </a:solidFill>
+                    <a:lnB w="6350" cap="flat">
+                      <a:solidFill>
+                        <a:srgbClr val="E7E9EB"/>
+                      </a:solidFill>
+                    </a:lnB>
+                  </a:tcPr>
+                </a:tc>
+                <a:tc>
+                  <a:txBody>
+                    <a:bodyPr/>
+                    <a:lstStyle/>
+                    <a:p>
+                      <a:pPr algn="l"/>
+                      <a:r>
+                        <a:rPr sz="800" b="0">
+                          <a:solidFill>
+                            <a:srgbClr val="30353A"/>
+                          </a:solidFill>
+                          <a:latin typeface="Arial"/>
+                        </a:rPr>
+                        <a:t>Listo</a:t>
+                      </a:r>
+                    </a:p>
+                  </a:txBody>
+                  <a:tcPr marL="54864" marR="54864" marT="18288" marB="18288" anchor="ctr">
+                    <a:solidFill>
+                      <a:srgbClr val="FFFFFF"/>
+                    </a:solidFill>
+                    <a:lnB w="6350" cap="flat">
+                      <a:solidFill>
+                        <a:srgbClr val="E7E9EB"/>
+                      </a:solidFill>
+                    </a:lnB>
+                  </a:tcPr>
+                </a:tc>
+                <a:tc>
+                  <a:txBody>
+                    <a:bodyPr/>
+                    <a:lstStyle/>
+                    <a:p>
+                      <a:pPr algn="l"/>
+                      <a:r>
+                        <a:rPr sz="800" b="0">
+                          <a:solidFill>
+                            <a:srgbClr val="30353A"/>
+                          </a:solidFill>
+                          <a:latin typeface="Arial"/>
+                        </a:rPr>
+                        <a:t>Agro, Ind. e Com.</a:t>
+                      </a:r>
+                    </a:p>
+                  </a:txBody>
+                  <a:tcPr marL="54864" marR="54864" marT="18288" marB="18288" anchor="ctr">
+                    <a:solidFill>
+                      <a:srgbClr val="FFFFFF"/>
+                    </a:solidFill>
+                    <a:lnB w="6350" cap="flat">
+                      <a:solidFill>
+                        <a:srgbClr val="E7E9EB"/>
+                      </a:solidFill>
+                    </a:lnB>
+                  </a:tcPr>
+                </a:tc>
+                <a:tc>
+                  <a:txBody>
+                    <a:bodyPr/>
+                    <a:lstStyle/>
+                    <a:p>
+                      <a:pPr algn="l"/>
+                      <a:r>
+                        <a:rPr sz="800" b="0">
+                          <a:solidFill>
+                            <a:srgbClr val="30353A"/>
+                          </a:solidFill>
+                          <a:latin typeface="Arial"/>
+                        </a:rPr>
+                        <a:t>Recebíveis Comerciais</a:t>
+                      </a:r>
+                    </a:p>
+                  </a:txBody>
+                  <a:tcPr marL="54864" marR="54864" marT="18288" marB="18288" anchor="ctr">
+                    <a:solidFill>
+                      <a:srgbClr val="FFFFFF"/>
+                    </a:solidFill>
+                    <a:lnB w="6350" cap="flat">
+                      <a:solidFill>
+                        <a:srgbClr val="E7E9EB"/>
+                      </a:solidFill>
+                    </a:lnB>
+                  </a:tcPr>
+                </a:tc>
+                <a:tc>
+                  <a:txBody>
+                    <a:bodyPr/>
+                    <a:lstStyle/>
+                    <a:p>
+                      <a:pPr algn="r"/>
+                      <a:r>
+                        <a:rPr sz="800" b="0">
+                          <a:solidFill>
+                            <a:srgbClr val="30353A"/>
+                          </a:solidFill>
+                          <a:latin typeface="Arial"/>
+                        </a:rPr>
+                        <a:t>0,60</a:t>
+                      </a:r>
+                    </a:p>
+                  </a:txBody>
+                  <a:tcPr marL="54864" marR="54864" marT="18288" marB="18288" anchor="ctr">
+                    <a:solidFill>
+                      <a:srgbClr val="FFFFFF"/>
+                    </a:solidFill>
+                    <a:lnB w="6350" cap="flat">
+                      <a:solidFill>
+                        <a:srgbClr val="E7E9EB"/>
+                      </a:solidFill>
+                    </a:lnB>
+                  </a:tcPr>
+                </a:tc>
+                <a:tc>
+                  <a:txBody>
+                    <a:bodyPr/>
+                    <a:lstStyle/>
+                    <a:p>
+                      <a:pPr algn="l"/>
+                      <a:r>
+                        <a:rPr sz="800" b="0">
+                          <a:solidFill>
+                            <a:srgbClr val="30353A"/>
+                          </a:solidFill>
+                          <a:latin typeface="Arial"/>
+                        </a:rPr>
+                        <a:t>Não – UBS BB</a:t>
+                      </a:r>
+                    </a:p>
+                  </a:txBody>
+                  <a:tcPr marL="54864" marR="54864" marT="18288" marB="18288" anchor="ctr">
+                    <a:solidFill>
+                      <a:srgbClr val="FFFFFF"/>
+                    </a:solidFill>
+                    <a:lnB w="6350" cap="flat">
+                      <a:solidFill>
+                        <a:srgbClr val="E7E9EB"/>
+                      </a:solidFill>
+                    </a:lnB>
+                  </a:tcPr>
+                </a:tc>
+                <a:tc>
+                  <a:txBody>
+                    <a:bodyPr/>
+                    <a:lstStyle/>
+                    <a:p>
+                      <a:pPr algn="l"/>
+                      <a:r>
+                        <a:rPr sz="800" b="0">
+                          <a:solidFill>
+                            <a:srgbClr val="30353A"/>
+                          </a:solidFill>
+                          <a:latin typeface="Arial"/>
+                        </a:rPr>
+                        <a:t>Misto</a:t>
+                      </a:r>
+                    </a:p>
+                  </a:txBody>
+                  <a:tcPr marL="54864" marR="54864" marT="18288" marB="18288" anchor="ctr">
+                    <a:solidFill>
+                      <a:srgbClr val="FFFFFF"/>
+                    </a:solidFill>
+                    <a:lnB w="6350" cap="flat">
+                      <a:solidFill>
+                        <a:srgbClr val="E7E9EB"/>
+                      </a:solidFill>
+                    </a:lnB>
+                  </a:tcPr>
+                </a:tc>
+                <a:tc>
+                  <a:txBody>
+                    <a:bodyPr/>
+                    <a:lstStyle/>
+                    <a:p>
+                      <a:pPr algn="l"/>
+                      <a:r>
+                        <a:rPr sz="800" b="0">
+                          <a:solidFill>
+                            <a:srgbClr val="30353A"/>
+                          </a:solidFill>
+                          <a:latin typeface="Arial"/>
+                        </a:rPr>
+                        <a:t/>
+                      </a:r>
+                    </a:p>
+                  </a:txBody>
+                  <a:tcPr marL="54864" marR="54864" marT="18288" marB="18288" anchor="ctr">
+                    <a:solidFill>
+                      <a:srgbClr val="FFFFFF"/>
+                    </a:solidFill>
+                    <a:lnB w="6350" cap="flat">
+                      <a:solidFill>
+                        <a:srgbClr val="E7E9EB"/>
+                      </a:solidFill>
+                    </a:lnB>
+                  </a:tcPr>
+                </a:tc>
+                <a:tc>
+                  <a:txBody>
+                    <a:bodyPr/>
+                    <a:lstStyle/>
+                    <a:p>
+                      <a:pPr algn="l"/>
+                      <a:r>
+                        <a:rPr sz="800" b="0">
+                          <a:solidFill>
+                            <a:srgbClr val="30353A"/>
+                          </a:solidFill>
+                          <a:latin typeface="Arial"/>
+                        </a:rPr>
+                        <a:t/>
+                      </a:r>
+                    </a:p>
+                  </a:txBody>
+                  <a:tcPr marL="54864" marR="54864" marT="18288" marB="18288" anchor="ctr">
+                    <a:solidFill>
+                      <a:srgbClr val="FFFFFF"/>
+                    </a:solidFill>
+                    <a:lnB w="6350" cap="flat">
+                      <a:solidFill>
+                        <a:srgbClr val="E7E9EB"/>
+                      </a:solidFill>
+                    </a:lnB>
+                  </a:tcPr>
+                </a:tc>
+              </a:tr>
+              <a:tr h="224028">
+                <a:tc>
+                  <a:txBody>
+                    <a:bodyPr/>
+                    <a:lstStyle/>
+                    <a:p>
+                      <a:pPr algn="l"/>
+                      <a:r>
+                        <a:rPr sz="800" b="0">
+                          <a:solidFill>
+                            <a:srgbClr val="30353A"/>
+                          </a:solidFill>
+                          <a:latin typeface="Arial"/>
+                        </a:rPr>
+                        <a:t>13</a:t>
+                      </a:r>
+                    </a:p>
+                  </a:txBody>
+                  <a:tcPr marL="54864" marR="54864" marT="18288" marB="18288" anchor="ctr">
+                    <a:solidFill>
+                      <a:srgbClr val="FFFFFF"/>
+                    </a:solidFill>
+                    <a:lnB w="6350" cap="flat">
+                      <a:solidFill>
+                        <a:srgbClr val="E7E9EB"/>
+                      </a:solidFill>
+                    </a:lnB>
+                  </a:tcPr>
+                </a:tc>
+                <a:tc>
+                  <a:txBody>
+                    <a:bodyPr/>
+                    <a:lstStyle/>
+                    <a:p>
+                      <a:pPr algn="l"/>
+                      <a:r>
+                        <a:rPr sz="800" b="0">
+                          <a:solidFill>
+                            <a:srgbClr val="30353A"/>
+                          </a:solidFill>
+                          <a:latin typeface="Arial"/>
+                        </a:rPr>
+                        <a:t>Multiplica</a:t>
+                      </a:r>
+                    </a:p>
+                  </a:txBody>
+                  <a:tcPr marL="54864" marR="54864" marT="18288" marB="18288" anchor="ctr">
+                    <a:solidFill>
+                      <a:srgbClr val="FFFFFF"/>
+                    </a:solidFill>
+                    <a:lnB w="6350" cap="flat">
+                      <a:solidFill>
+                        <a:srgbClr val="E7E9EB"/>
+                      </a:solidFill>
+                    </a:lnB>
+                  </a:tcPr>
+                </a:tc>
+                <a:tc>
+                  <a:txBody>
+                    <a:bodyPr/>
+                    <a:lstStyle/>
+                    <a:p>
+                      <a:pPr algn="l"/>
+                      <a:r>
+                        <a:rPr sz="800" b="0">
+                          <a:solidFill>
+                            <a:srgbClr val="30353A"/>
+                          </a:solidFill>
+                          <a:latin typeface="Arial"/>
+                        </a:rPr>
+                        <a:t>Q</a:t>
+                      </a:r>
+                    </a:p>
+                  </a:txBody>
+                  <a:tcPr marL="54864" marR="54864" marT="18288" marB="18288" anchor="ctr">
+                    <a:solidFill>
+                      <a:srgbClr val="FFFFFF"/>
+                    </a:solidFill>
+                    <a:lnB w="6350" cap="flat">
+                      <a:solidFill>
+                        <a:srgbClr val="E7E9EB"/>
+                      </a:solidFill>
+                    </a:lnB>
+                  </a:tcPr>
+                </a:tc>
+                <a:tc>
+                  <a:txBody>
+                    <a:bodyPr/>
+                    <a:lstStyle/>
+                    <a:p>
+                      <a:pPr algn="l"/>
+                      <a:r>
+                        <a:rPr sz="800" b="0">
+                          <a:solidFill>
+                            <a:srgbClr val="30353A"/>
+                          </a:solidFill>
+                          <a:latin typeface="Arial"/>
+                        </a:rPr>
+                        <a:t>Fomento Mercantil</a:t>
+                      </a:r>
+                    </a:p>
+                  </a:txBody>
+                  <a:tcPr marL="54864" marR="54864" marT="18288" marB="18288" anchor="ctr">
+                    <a:solidFill>
+                      <a:srgbClr val="FFFFFF"/>
+                    </a:solidFill>
+                    <a:lnB w="6350" cap="flat">
+                      <a:solidFill>
+                        <a:srgbClr val="E7E9EB"/>
+                      </a:solidFill>
+                    </a:lnB>
+                  </a:tcPr>
+                </a:tc>
+                <a:tc>
+                  <a:txBody>
+                    <a:bodyPr/>
+                    <a:lstStyle/>
+                    <a:p>
+                      <a:pPr algn="l"/>
+                      <a:r>
+                        <a:rPr sz="800" b="0">
+                          <a:solidFill>
+                            <a:srgbClr val="30353A"/>
+                          </a:solidFill>
+                          <a:latin typeface="Arial"/>
+                        </a:rPr>
+                        <a:t>Fomento Mercantil</a:t>
+                      </a:r>
+                    </a:p>
+                  </a:txBody>
+                  <a:tcPr marL="54864" marR="54864" marT="18288" marB="18288" anchor="ctr">
+                    <a:solidFill>
+                      <a:srgbClr val="FFFFFF"/>
+                    </a:solidFill>
+                    <a:lnB w="6350" cap="flat">
+                      <a:solidFill>
+                        <a:srgbClr val="E7E9EB"/>
+                      </a:solidFill>
+                    </a:lnB>
+                  </a:tcPr>
+                </a:tc>
+                <a:tc>
+                  <a:txBody>
+                    <a:bodyPr/>
+                    <a:lstStyle/>
+                    <a:p>
+                      <a:pPr algn="r"/>
+                      <a:r>
+                        <a:rPr sz="800" b="0">
+                          <a:solidFill>
+                            <a:srgbClr val="30353A"/>
+                          </a:solidFill>
+                          <a:latin typeface="Arial"/>
+                        </a:rPr>
+                        <a:t>n/d</a:t>
+                      </a:r>
+                    </a:p>
+                  </a:txBody>
+                  <a:tcPr marL="54864" marR="54864" marT="18288" marB="18288" anchor="ctr">
+                    <a:solidFill>
+                      <a:srgbClr val="FFFFFF"/>
+                    </a:solidFill>
+                    <a:lnB w="6350" cap="flat">
+                      <a:solidFill>
+                        <a:srgbClr val="E7E9EB"/>
+                      </a:solidFill>
+                    </a:lnB>
+                  </a:tcPr>
+                </a:tc>
+                <a:tc>
+                  <a:txBody>
+                    <a:bodyPr/>
+                    <a:lstStyle/>
+                    <a:p>
+                      <a:pPr algn="l"/>
+                      <a:r>
+                        <a:rPr sz="800" b="0">
+                          <a:solidFill>
+                            <a:srgbClr val="30353A"/>
+                          </a:solidFill>
+                          <a:latin typeface="Arial"/>
+                        </a:rPr>
+                        <a:t>Não identificado</a:t>
+                      </a:r>
+                    </a:p>
+                  </a:txBody>
+                  <a:tcPr marL="54864" marR="54864" marT="18288" marB="18288" anchor="ctr">
+                    <a:solidFill>
+                      <a:srgbClr val="FFFFFF"/>
+                    </a:solidFill>
+                    <a:lnB w="6350" cap="flat">
+                      <a:solidFill>
+                        <a:srgbClr val="E7E9EB"/>
+                      </a:solidFill>
+                    </a:lnB>
+                  </a:tcPr>
+                </a:tc>
+                <a:tc>
+                  <a:txBody>
+                    <a:bodyPr/>
+                    <a:lstStyle/>
+                    <a:p>
+                      <a:pPr algn="l"/>
+                      <a:r>
+                        <a:rPr sz="800" b="0">
+                          <a:solidFill>
+                            <a:srgbClr val="30353A"/>
+                          </a:solidFill>
+                          <a:latin typeface="Arial"/>
+                        </a:rPr>
+                        <a:t>Não identificado</a:t>
+                      </a:r>
+                    </a:p>
+                  </a:txBody>
+                  <a:tcPr marL="54864" marR="54864" marT="18288" marB="18288" anchor="ctr">
+                    <a:solidFill>
+                      <a:srgbClr val="FFFFFF"/>
+                    </a:solidFill>
+                    <a:lnB w="6350" cap="flat">
+                      <a:solidFill>
+                        <a:srgbClr val="E7E9EB"/>
+                      </a:solidFill>
+                    </a:lnB>
+                  </a:tcPr>
+                </a:tc>
+                <a:tc>
+                  <a:txBody>
+                    <a:bodyPr/>
+                    <a:lstStyle/>
+                    <a:p>
+                      <a:pPr algn="l"/>
+                      <a:r>
+                        <a:rPr sz="800" b="0">
+                          <a:solidFill>
+                            <a:srgbClr val="30353A"/>
+                          </a:solidFill>
+                          <a:latin typeface="Arial"/>
+                        </a:rPr>
+                        <a:t/>
+                      </a:r>
+                    </a:p>
+                  </a:txBody>
+                  <a:tcPr marL="54864" marR="54864" marT="18288" marB="18288" anchor="ctr">
+                    <a:solidFill>
+                      <a:srgbClr val="FFFFFF"/>
+                    </a:solidFill>
+                    <a:lnB w="6350" cap="flat">
+                      <a:solidFill>
+                        <a:srgbClr val="E7E9EB"/>
+                      </a:solidFill>
+                    </a:lnB>
+                  </a:tcPr>
+                </a:tc>
+                <a:tc>
+                  <a:txBody>
+                    <a:bodyPr/>
+                    <a:lstStyle/>
+                    <a:p>
+                      <a:pPr algn="l"/>
+                      <a:r>
+                        <a:rPr sz="800" b="0">
+                          <a:solidFill>
+                            <a:srgbClr val="30353A"/>
+                          </a:solidFill>
+                          <a:latin typeface="Arial"/>
+                        </a:rPr>
+                        <a:t/>
+                      </a:r>
+                    </a:p>
+                  </a:txBody>
+                  <a:tcPr marL="54864" marR="54864" marT="18288" marB="18288" anchor="ctr">
+                    <a:solidFill>
+                      <a:srgbClr val="FFFFFF"/>
+                    </a:solidFill>
+                    <a:lnB w="6350" cap="flat">
+                      <a:solidFill>
+                        <a:srgbClr val="E7E9EB"/>
+                      </a:solidFill>
+                    </a:lnB>
+                  </a:tcPr>
+                </a:tc>
+              </a:tr>
+              <a:tr h="224028">
+                <a:tc>
+                  <a:txBody>
+                    <a:bodyPr/>
+                    <a:lstStyle/>
+                    <a:p>
+                      <a:pPr algn="l"/>
+                      <a:r>
+                        <a:rPr sz="800" b="0">
+                          <a:solidFill>
+                            <a:srgbClr val="30353A"/>
+                          </a:solidFill>
+                          <a:latin typeface="Arial"/>
+                        </a:rPr>
+                        <a:t>14</a:t>
+                      </a:r>
+                    </a:p>
+                  </a:txBody>
+                  <a:tcPr marL="54864" marR="54864" marT="18288" marB="18288" anchor="ctr">
+                    <a:solidFill>
+                      <a:srgbClr val="FFFFFF"/>
+                    </a:solidFill>
+                    <a:lnB w="6350" cap="flat">
+                      <a:solidFill>
+                        <a:srgbClr val="E7E9EB"/>
+                      </a:solidFill>
+                    </a:lnB>
+                  </a:tcPr>
+                </a:tc>
+                <a:tc>
+                  <a:txBody>
+                    <a:bodyPr/>
+                    <a:lstStyle/>
+                    <a:p>
+                      <a:pPr algn="l"/>
+                      <a:r>
+                        <a:rPr sz="800" b="0">
+                          <a:solidFill>
+                            <a:srgbClr val="30353A"/>
+                          </a:solidFill>
+                          <a:latin typeface="Arial"/>
+                        </a:rPr>
+                        <a:t>Red Real LP</a:t>
+                      </a:r>
+                    </a:p>
+                  </a:txBody>
+                  <a:tcPr marL="54864" marR="54864" marT="18288" marB="18288" anchor="ctr">
+                    <a:solidFill>
+                      <a:srgbClr val="FFFFFF"/>
+                    </a:solidFill>
+                    <a:lnB w="6350" cap="flat">
+                      <a:solidFill>
+                        <a:srgbClr val="E7E9EB"/>
+                      </a:solidFill>
+                    </a:lnB>
+                  </a:tcPr>
+                </a:tc>
+                <a:tc>
+                  <a:txBody>
+                    <a:bodyPr/>
+                    <a:lstStyle/>
+                    <a:p>
+                      <a:pPr algn="l"/>
+                      <a:r>
+                        <a:rPr sz="800" b="0">
+                          <a:solidFill>
+                            <a:srgbClr val="30353A"/>
+                          </a:solidFill>
+                          <a:latin typeface="Arial"/>
+                        </a:rPr>
+                        <a:t>BMP</a:t>
+                      </a:r>
+                    </a:p>
+                  </a:txBody>
+                  <a:tcPr marL="54864" marR="54864" marT="18288" marB="18288" anchor="ctr">
+                    <a:solidFill>
+                      <a:srgbClr val="FFFFFF"/>
+                    </a:solidFill>
+                    <a:lnB w="6350" cap="flat">
+                      <a:solidFill>
+                        <a:srgbClr val="E7E9EB"/>
+                      </a:solidFill>
+                    </a:lnB>
+                  </a:tcPr>
+                </a:tc>
+                <a:tc>
+                  <a:txBody>
+                    <a:bodyPr/>
+                    <a:lstStyle/>
+                    <a:p>
+                      <a:pPr algn="l"/>
+                      <a:r>
+                        <a:rPr sz="800" b="0">
+                          <a:solidFill>
+                            <a:srgbClr val="30353A"/>
+                          </a:solidFill>
+                          <a:latin typeface="Arial"/>
+                        </a:rPr>
+                        <a:t>Outros</a:t>
+                      </a:r>
+                    </a:p>
+                  </a:txBody>
+                  <a:tcPr marL="54864" marR="54864" marT="18288" marB="18288" anchor="ctr">
+                    <a:solidFill>
+                      <a:srgbClr val="FFFFFF"/>
+                    </a:solidFill>
+                    <a:lnB w="6350" cap="flat">
+                      <a:solidFill>
+                        <a:srgbClr val="E7E9EB"/>
+                      </a:solidFill>
+                    </a:lnB>
+                  </a:tcPr>
+                </a:tc>
+                <a:tc>
+                  <a:txBody>
+                    <a:bodyPr/>
+                    <a:lstStyle/>
+                    <a:p>
+                      <a:pPr algn="l"/>
+                      <a:r>
+                        <a:rPr sz="800" b="0">
+                          <a:solidFill>
+                            <a:srgbClr val="30353A"/>
+                          </a:solidFill>
+                          <a:latin typeface="Arial"/>
+                        </a:rPr>
+                        <a:t>Multicarteira Outros</a:t>
+                      </a:r>
+                    </a:p>
+                  </a:txBody>
+                  <a:tcPr marL="54864" marR="54864" marT="18288" marB="18288" anchor="ctr">
+                    <a:solidFill>
+                      <a:srgbClr val="FFFFFF"/>
+                    </a:solidFill>
+                    <a:lnB w="6350" cap="flat">
+                      <a:solidFill>
+                        <a:srgbClr val="E7E9EB"/>
+                      </a:solidFill>
+                    </a:lnB>
+                  </a:tcPr>
+                </a:tc>
+                <a:tc>
+                  <a:txBody>
+                    <a:bodyPr/>
+                    <a:lstStyle/>
+                    <a:p>
+                      <a:pPr algn="r"/>
+                      <a:r>
+                        <a:rPr sz="800" b="0">
+                          <a:solidFill>
+                            <a:srgbClr val="30353A"/>
+                          </a:solidFill>
+                          <a:latin typeface="Arial"/>
+                        </a:rPr>
+                        <a:t>1,00</a:t>
+                      </a:r>
+                    </a:p>
+                  </a:txBody>
+                  <a:tcPr marL="54864" marR="54864" marT="18288" marB="18288" anchor="ctr">
+                    <a:solidFill>
+                      <a:srgbClr val="FFFFFF"/>
+                    </a:solidFill>
+                    <a:lnB w="6350" cap="flat">
+                      <a:solidFill>
+                        <a:srgbClr val="E7E9EB"/>
+                      </a:solidFill>
+                    </a:lnB>
+                  </a:tcPr>
+                </a:tc>
+                <a:tc>
+                  <a:txBody>
+                    <a:bodyPr/>
+                    <a:lstStyle/>
+                    <a:p>
+                      <a:pPr algn="l"/>
+                      <a:r>
+                        <a:rPr sz="800" b="0">
+                          <a:solidFill>
+                            <a:srgbClr val="30353A"/>
+                          </a:solidFill>
+                          <a:latin typeface="Arial"/>
+                        </a:rPr>
+                        <a:t>Não – Finaxis</a:t>
+                      </a:r>
+                    </a:p>
+                  </a:txBody>
+                  <a:tcPr marL="54864" marR="54864" marT="18288" marB="18288" anchor="ctr">
+                    <a:solidFill>
+                      <a:srgbClr val="FFFFFF"/>
+                    </a:solidFill>
+                    <a:lnB w="6350" cap="flat">
+                      <a:solidFill>
+                        <a:srgbClr val="E7E9EB"/>
+                      </a:solidFill>
+                    </a:lnB>
+                  </a:tcPr>
+                </a:tc>
+                <a:tc>
+                  <a:txBody>
+                    <a:bodyPr/>
+                    <a:lstStyle/>
+                    <a:p>
+                      <a:pPr algn="l"/>
+                      <a:r>
+                        <a:rPr sz="800" b="0">
+                          <a:solidFill>
+                            <a:srgbClr val="30353A"/>
+                          </a:solidFill>
+                          <a:latin typeface="Arial"/>
+                        </a:rPr>
+                        <a:t>Não</a:t>
+                      </a:r>
+                    </a:p>
+                  </a:txBody>
+                  <a:tcPr marL="54864" marR="54864" marT="18288" marB="18288" anchor="ctr">
+                    <a:solidFill>
+                      <a:srgbClr val="FFFFFF"/>
+                    </a:solidFill>
+                    <a:lnB w="6350" cap="flat">
+                      <a:solidFill>
+                        <a:srgbClr val="E7E9EB"/>
+                      </a:solidFill>
+                    </a:lnB>
+                  </a:tcPr>
+                </a:tc>
+                <a:tc>
+                  <a:txBody>
+                    <a:bodyPr/>
+                    <a:lstStyle/>
+                    <a:p>
+                      <a:pPr algn="l"/>
+                      <a:r>
+                        <a:rPr sz="800" b="0">
+                          <a:solidFill>
+                            <a:srgbClr val="30353A"/>
+                          </a:solidFill>
+                          <a:latin typeface="Arial"/>
+                        </a:rPr>
+                        <a:t/>
+                      </a:r>
+                    </a:p>
+                  </a:txBody>
+                  <a:tcPr marL="54864" marR="54864" marT="18288" marB="18288" anchor="ctr">
+                    <a:solidFill>
+                      <a:srgbClr val="FFFFFF"/>
+                    </a:solidFill>
+                    <a:lnB w="6350" cap="flat">
+                      <a:solidFill>
+                        <a:srgbClr val="E7E9EB"/>
+                      </a:solidFill>
+                    </a:lnB>
+                  </a:tcPr>
+                </a:tc>
+                <a:tc>
+                  <a:txBody>
+                    <a:bodyPr/>
+                    <a:lstStyle/>
+                    <a:p>
+                      <a:pPr algn="l"/>
+                      <a:r>
+                        <a:rPr sz="800" b="0">
+                          <a:solidFill>
+                            <a:srgbClr val="30353A"/>
+                          </a:solidFill>
+                          <a:latin typeface="Arial"/>
+                        </a:rPr>
+                        <a:t/>
+                      </a:r>
+                    </a:p>
+                  </a:txBody>
+                  <a:tcPr marL="54864" marR="54864" marT="18288" marB="18288" anchor="ctr">
+                    <a:solidFill>
+                      <a:srgbClr val="FFFFFF"/>
+                    </a:solidFill>
+                    <a:lnB w="6350" cap="flat">
+                      <a:solidFill>
+                        <a:srgbClr val="E7E9EB"/>
+                      </a:solidFill>
+                    </a:lnB>
+                  </a:tcPr>
+                </a:tc>
+              </a:tr>
+              <a:tr h="224028">
+                <a:tc>
+                  <a:txBody>
+                    <a:bodyPr/>
+                    <a:lstStyle/>
+                    <a:p>
+                      <a:pPr algn="l"/>
+                      <a:r>
+                        <a:rPr sz="800" b="0">
+                          <a:solidFill>
+                            <a:srgbClr val="30353A"/>
+                          </a:solidFill>
+                          <a:latin typeface="Arial"/>
+                        </a:rPr>
+                        <a:t>15</a:t>
+                      </a:r>
+                    </a:p>
+                  </a:txBody>
+                  <a:tcPr marL="54864" marR="54864" marT="18288" marB="18288" anchor="ctr">
+                    <a:solidFill>
+                      <a:srgbClr val="FFFFFF"/>
+                    </a:solidFill>
+                    <a:lnB w="6350" cap="flat">
+                      <a:solidFill>
+                        <a:srgbClr val="E7E9EB"/>
+                      </a:solidFill>
+                    </a:lnB>
+                  </a:tcPr>
+                </a:tc>
+                <a:tc>
+                  <a:txBody>
+                    <a:bodyPr/>
+                    <a:lstStyle/>
+                    <a:p>
+                      <a:pPr algn="l"/>
+                      <a:r>
+                        <a:rPr sz="800" b="0">
+                          <a:solidFill>
+                            <a:srgbClr val="30353A"/>
+                          </a:solidFill>
+                          <a:latin typeface="Arial"/>
+                        </a:rPr>
+                        <a:t>Residence Club</a:t>
+                      </a:r>
+                    </a:p>
+                  </a:txBody>
+                  <a:tcPr marL="54864" marR="54864" marT="18288" marB="18288" anchor="ctr">
+                    <a:solidFill>
+                      <a:srgbClr val="FFFFFF"/>
+                    </a:solidFill>
+                    <a:lnB w="6350" cap="flat">
+                      <a:solidFill>
+                        <a:srgbClr val="E7E9EB"/>
+                      </a:solidFill>
+                    </a:lnB>
+                  </a:tcPr>
+                </a:tc>
+                <a:tc>
+                  <a:txBody>
+                    <a:bodyPr/>
+                    <a:lstStyle/>
+                    <a:p>
+                      <a:pPr algn="l"/>
+                      <a:r>
+                        <a:rPr sz="800" b="0">
+                          <a:solidFill>
+                            <a:srgbClr val="30353A"/>
+                          </a:solidFill>
+                          <a:latin typeface="Arial"/>
+                        </a:rPr>
+                        <a:t>HRH Fortaleza</a:t>
+                      </a:r>
+                    </a:p>
+                  </a:txBody>
+                  <a:tcPr marL="54864" marR="54864" marT="18288" marB="18288" anchor="ctr">
+                    <a:solidFill>
+                      <a:srgbClr val="FFFFFF"/>
+                    </a:solidFill>
+                    <a:lnB w="6350" cap="flat">
+                      <a:solidFill>
+                        <a:srgbClr val="E7E9EB"/>
+                      </a:solidFill>
+                    </a:lnB>
+                  </a:tcPr>
+                </a:tc>
+                <a:tc>
+                  <a:txBody>
+                    <a:bodyPr/>
+                    <a:lstStyle/>
+                    <a:p>
+                      <a:pPr algn="l"/>
+                      <a:r>
+                        <a:rPr sz="800" b="0">
+                          <a:solidFill>
+                            <a:srgbClr val="30353A"/>
+                          </a:solidFill>
+                          <a:latin typeface="Arial"/>
+                        </a:rPr>
+                        <a:t>Financeiro</a:t>
+                      </a:r>
+                    </a:p>
+                  </a:txBody>
+                  <a:tcPr marL="54864" marR="54864" marT="18288" marB="18288" anchor="ctr">
+                    <a:solidFill>
+                      <a:srgbClr val="FFFFFF"/>
+                    </a:solidFill>
+                    <a:lnB w="6350" cap="flat">
+                      <a:solidFill>
+                        <a:srgbClr val="E7E9EB"/>
+                      </a:solidFill>
+                    </a:lnB>
+                  </a:tcPr>
+                </a:tc>
+                <a:tc>
+                  <a:txBody>
+                    <a:bodyPr/>
+                    <a:lstStyle/>
+                    <a:p>
+                      <a:pPr algn="l"/>
+                      <a:r>
+                        <a:rPr sz="800" b="0">
+                          <a:solidFill>
+                            <a:srgbClr val="30353A"/>
+                          </a:solidFill>
+                          <a:latin typeface="Arial"/>
+                        </a:rPr>
+                        <a:t>Crédito Imobiliário</a:t>
+                      </a:r>
+                    </a:p>
+                  </a:txBody>
+                  <a:tcPr marL="54864" marR="54864" marT="18288" marB="18288" anchor="ctr">
+                    <a:solidFill>
+                      <a:srgbClr val="FFFFFF"/>
+                    </a:solidFill>
+                    <a:lnB w="6350" cap="flat">
+                      <a:solidFill>
+                        <a:srgbClr val="E7E9EB"/>
+                      </a:solidFill>
+                    </a:lnB>
+                  </a:tcPr>
+                </a:tc>
+                <a:tc>
+                  <a:txBody>
+                    <a:bodyPr/>
+                    <a:lstStyle/>
+                    <a:p>
+                      <a:pPr algn="r"/>
+                      <a:r>
+                        <a:rPr sz="800" b="0">
+                          <a:solidFill>
+                            <a:srgbClr val="30353A"/>
+                          </a:solidFill>
+                          <a:latin typeface="Arial"/>
+                        </a:rPr>
+                        <a:t>0,25</a:t>
+                      </a:r>
+                    </a:p>
+                  </a:txBody>
+                  <a:tcPr marL="54864" marR="54864" marT="18288" marB="18288" anchor="ctr">
+                    <a:solidFill>
+                      <a:srgbClr val="FFFFFF"/>
+                    </a:solidFill>
+                    <a:lnB w="6350" cap="flat">
+                      <a:solidFill>
+                        <a:srgbClr val="E7E9EB"/>
+                      </a:solidFill>
+                    </a:lnB>
+                  </a:tcPr>
+                </a:tc>
+                <a:tc>
+                  <a:txBody>
+                    <a:bodyPr/>
+                    <a:lstStyle/>
+                    <a:p>
+                      <a:pPr algn="l"/>
+                      <a:r>
+                        <a:rPr sz="800" b="0">
+                          <a:solidFill>
+                            <a:srgbClr val="30353A"/>
+                          </a:solidFill>
+                          <a:latin typeface="Arial"/>
+                        </a:rPr>
+                        <a:t>Sim – IBBA Líder</a:t>
+                      </a:r>
+                    </a:p>
+                  </a:txBody>
+                  <a:tcPr marL="54864" marR="54864" marT="18288" marB="18288" anchor="ctr">
+                    <a:solidFill>
+                      <a:srgbClr val="FFFFFF"/>
+                    </a:solidFill>
+                    <a:lnB w="6350" cap="flat">
+                      <a:solidFill>
+                        <a:srgbClr val="E7E9EB"/>
+                      </a:solidFill>
+                    </a:lnB>
+                  </a:tcPr>
+                </a:tc>
+                <a:tc>
+                  <a:txBody>
+                    <a:bodyPr/>
+                    <a:lstStyle/>
+                    <a:p>
+                      <a:pPr algn="l"/>
+                      <a:r>
+                        <a:rPr sz="800" b="0">
+                          <a:solidFill>
+                            <a:srgbClr val="30353A"/>
+                          </a:solidFill>
+                          <a:latin typeface="Arial"/>
+                        </a:rPr>
+                        <a:t>Não</a:t>
+                      </a:r>
+                    </a:p>
+                  </a:txBody>
+                  <a:tcPr marL="54864" marR="54864" marT="18288" marB="18288" anchor="ctr">
+                    <a:solidFill>
+                      <a:srgbClr val="FFFFFF"/>
+                    </a:solidFill>
+                    <a:lnB w="6350" cap="flat">
+                      <a:solidFill>
+                        <a:srgbClr val="E7E9EB"/>
+                      </a:solidFill>
+                    </a:lnB>
+                  </a:tcPr>
+                </a:tc>
+                <a:tc>
+                  <a:txBody>
+                    <a:bodyPr/>
+                    <a:lstStyle/>
+                    <a:p>
+                      <a:pPr algn="l"/>
+                      <a:r>
+                        <a:rPr sz="800" b="0">
+                          <a:solidFill>
+                            <a:srgbClr val="30353A"/>
+                          </a:solidFill>
+                          <a:latin typeface="Arial"/>
+                        </a:rPr>
+                        <a:t/>
+                      </a:r>
+                    </a:p>
+                  </a:txBody>
+                  <a:tcPr marL="54864" marR="54864" marT="18288" marB="18288" anchor="ctr">
+                    <a:solidFill>
+                      <a:srgbClr val="FFFFFF"/>
+                    </a:solidFill>
+                    <a:lnB w="6350" cap="flat">
+                      <a:solidFill>
+                        <a:srgbClr val="E7E9EB"/>
+                      </a:solidFill>
+                    </a:lnB>
+                  </a:tcPr>
+                </a:tc>
+                <a:tc>
+                  <a:txBody>
+                    <a:bodyPr/>
+                    <a:lstStyle/>
+                    <a:p>
+                      <a:pPr algn="l"/>
+                      <a:r>
+                        <a:rPr sz="800" b="0">
+                          <a:solidFill>
+                            <a:srgbClr val="30353A"/>
+                          </a:solidFill>
+                          <a:latin typeface="Arial"/>
+                        </a:rPr>
+                        <a:t/>
+                      </a:r>
+                    </a:p>
+                  </a:txBody>
+                  <a:tcPr marL="54864" marR="54864" marT="18288" marB="18288" anchor="ctr">
+                    <a:solidFill>
+                      <a:srgbClr val="FFFFFF"/>
+                    </a:solidFill>
+                    <a:lnB w="6350" cap="flat">
+                      <a:solidFill>
+                        <a:srgbClr val="E7E9EB"/>
+                      </a:solidFill>
+                    </a:lnB>
+                  </a:tcPr>
+                </a:tc>
+              </a:tr>
+              <a:tr h="224028">
+                <a:tc>
+                  <a:txBody>
+                    <a:bodyPr/>
+                    <a:lstStyle/>
+                    <a:p>
+                      <a:pPr algn="l"/>
+                      <a:r>
+                        <a:rPr sz="800" b="0">
+                          <a:solidFill>
+                            <a:srgbClr val="30353A"/>
+                          </a:solidFill>
+                          <a:latin typeface="Arial"/>
+                        </a:rPr>
+                        <a:t>16</a:t>
+                      </a:r>
+                    </a:p>
+                  </a:txBody>
+                  <a:tcPr marL="54864" marR="54864" marT="18288" marB="18288" anchor="ctr">
+                    <a:solidFill>
+                      <a:srgbClr val="FFFFFF"/>
+                    </a:solidFill>
+                    <a:lnB w="6350" cap="flat">
+                      <a:solidFill>
+                        <a:srgbClr val="E7E9EB"/>
+                      </a:solidFill>
+                    </a:lnB>
+                  </a:tcPr>
+                </a:tc>
+                <a:tc>
+                  <a:txBody>
+                    <a:bodyPr/>
+                    <a:lstStyle/>
+                    <a:p>
+                      <a:pPr algn="l"/>
+                      <a:r>
+                        <a:rPr sz="800" b="0">
+                          <a:solidFill>
+                            <a:srgbClr val="30353A"/>
+                          </a:solidFill>
+                          <a:latin typeface="Arial"/>
+                        </a:rPr>
+                        <a:t>Roqdeal</a:t>
+                      </a:r>
+                    </a:p>
+                  </a:txBody>
+                  <a:tcPr marL="54864" marR="54864" marT="18288" marB="18288" anchor="ctr">
+                    <a:solidFill>
+                      <a:srgbClr val="FFFFFF"/>
+                    </a:solidFill>
+                    <a:lnB w="6350" cap="flat">
+                      <a:solidFill>
+                        <a:srgbClr val="E7E9EB"/>
+                      </a:solidFill>
+                    </a:lnB>
+                  </a:tcPr>
+                </a:tc>
+                <a:tc>
+                  <a:txBody>
+                    <a:bodyPr/>
+                    <a:lstStyle/>
+                    <a:p>
+                      <a:pPr algn="l"/>
+                      <a:r>
+                        <a:rPr sz="800" b="0">
+                          <a:solidFill>
+                            <a:srgbClr val="30353A"/>
+                          </a:solidFill>
+                          <a:latin typeface="Arial"/>
+                        </a:rPr>
+                        <a:t>Ventisol</a:t>
+                      </a:r>
+                    </a:p>
+                  </a:txBody>
+                  <a:tcPr marL="54864" marR="54864" marT="18288" marB="18288" anchor="ctr">
+                    <a:solidFill>
+                      <a:srgbClr val="FFFFFF"/>
+                    </a:solidFill>
+                    <a:lnB w="6350" cap="flat">
+                      <a:solidFill>
+                        <a:srgbClr val="E7E9EB"/>
+                      </a:solidFill>
+                    </a:lnB>
+                  </a:tcPr>
+                </a:tc>
+                <a:tc>
+                  <a:txBody>
+                    <a:bodyPr/>
+                    <a:lstStyle/>
+                    <a:p>
+                      <a:pPr algn="l"/>
+                      <a:r>
+                        <a:rPr sz="800" b="0">
+                          <a:solidFill>
+                            <a:srgbClr val="30353A"/>
+                          </a:solidFill>
+                          <a:latin typeface="Arial"/>
+                        </a:rPr>
+                        <a:t>Outros</a:t>
+                      </a:r>
+                    </a:p>
+                  </a:txBody>
+                  <a:tcPr marL="54864" marR="54864" marT="18288" marB="18288" anchor="ctr">
+                    <a:solidFill>
+                      <a:srgbClr val="FFFFFF"/>
+                    </a:solidFill>
+                    <a:lnB w="6350" cap="flat">
+                      <a:solidFill>
+                        <a:srgbClr val="E7E9EB"/>
+                      </a:solidFill>
+                    </a:lnB>
+                  </a:tcPr>
+                </a:tc>
+                <a:tc>
+                  <a:txBody>
+                    <a:bodyPr/>
+                    <a:lstStyle/>
+                    <a:p>
+                      <a:pPr algn="l"/>
+                      <a:r>
+                        <a:rPr sz="800" b="0">
+                          <a:solidFill>
+                            <a:srgbClr val="30353A"/>
+                          </a:solidFill>
+                          <a:latin typeface="Arial"/>
+                        </a:rPr>
+                        <a:t>Multicarteira Outros</a:t>
+                      </a:r>
+                    </a:p>
+                  </a:txBody>
+                  <a:tcPr marL="54864" marR="54864" marT="18288" marB="18288" anchor="ctr">
+                    <a:solidFill>
+                      <a:srgbClr val="FFFFFF"/>
+                    </a:solidFill>
+                    <a:lnB w="6350" cap="flat">
+                      <a:solidFill>
+                        <a:srgbClr val="E7E9EB"/>
+                      </a:solidFill>
+                    </a:lnB>
+                  </a:tcPr>
+                </a:tc>
+                <a:tc>
+                  <a:txBody>
+                    <a:bodyPr/>
+                    <a:lstStyle/>
+                    <a:p>
+                      <a:pPr algn="r"/>
+                      <a:r>
+                        <a:rPr sz="800" b="0">
+                          <a:solidFill>
+                            <a:srgbClr val="30353A"/>
+                          </a:solidFill>
+                          <a:latin typeface="Arial"/>
+                        </a:rPr>
+                        <a:t>0,02</a:t>
+                      </a:r>
+                    </a:p>
+                  </a:txBody>
+                  <a:tcPr marL="54864" marR="54864" marT="18288" marB="18288" anchor="ctr">
+                    <a:solidFill>
+                      <a:srgbClr val="FFFFFF"/>
+                    </a:solidFill>
+                    <a:lnB w="6350" cap="flat">
+                      <a:solidFill>
+                        <a:srgbClr val="E7E9EB"/>
+                      </a:solidFill>
+                    </a:lnB>
+                  </a:tcPr>
+                </a:tc>
+                <a:tc>
+                  <a:txBody>
+                    <a:bodyPr/>
+                    <a:lstStyle/>
+                    <a:p>
+                      <a:pPr algn="l"/>
+                      <a:r>
+                        <a:rPr sz="800" b="0">
+                          <a:solidFill>
+                            <a:srgbClr val="30353A"/>
+                          </a:solidFill>
+                          <a:latin typeface="Arial"/>
+                        </a:rPr>
+                        <a:t>Não – Singulare</a:t>
+                      </a:r>
+                    </a:p>
+                  </a:txBody>
+                  <a:tcPr marL="54864" marR="54864" marT="18288" marB="18288" anchor="ctr">
+                    <a:solidFill>
+                      <a:srgbClr val="FFFFFF"/>
+                    </a:solidFill>
+                    <a:lnB w="6350" cap="flat">
+                      <a:solidFill>
+                        <a:srgbClr val="E7E9EB"/>
+                      </a:solidFill>
+                    </a:lnB>
+                  </a:tcPr>
+                </a:tc>
+                <a:tc>
+                  <a:txBody>
+                    <a:bodyPr/>
+                    <a:lstStyle/>
+                    <a:p>
+                      <a:pPr algn="l"/>
+                      <a:r>
+                        <a:rPr sz="800" b="0">
+                          <a:solidFill>
+                            <a:srgbClr val="30353A"/>
+                          </a:solidFill>
+                          <a:latin typeface="Arial"/>
+                        </a:rPr>
+                        <a:t>Não</a:t>
+                      </a:r>
+                    </a:p>
+                  </a:txBody>
+                  <a:tcPr marL="54864" marR="54864" marT="18288" marB="18288" anchor="ctr">
+                    <a:solidFill>
+                      <a:srgbClr val="FFFFFF"/>
+                    </a:solidFill>
+                    <a:lnB w="6350" cap="flat">
+                      <a:solidFill>
+                        <a:srgbClr val="E7E9EB"/>
+                      </a:solidFill>
+                    </a:lnB>
+                  </a:tcPr>
+                </a:tc>
+                <a:tc>
+                  <a:txBody>
+                    <a:bodyPr/>
+                    <a:lstStyle/>
+                    <a:p>
+                      <a:pPr algn="l"/>
+                      <a:r>
+                        <a:rPr sz="800" b="0">
+                          <a:solidFill>
+                            <a:srgbClr val="30353A"/>
+                          </a:solidFill>
+                          <a:latin typeface="Arial"/>
+                        </a:rPr>
+                        <a:t/>
+                      </a:r>
+                    </a:p>
+                  </a:txBody>
+                  <a:tcPr marL="54864" marR="54864" marT="18288" marB="18288" anchor="ctr">
+                    <a:solidFill>
+                      <a:srgbClr val="FFFFFF"/>
+                    </a:solidFill>
+                    <a:lnB w="6350" cap="flat">
+                      <a:solidFill>
+                        <a:srgbClr val="E7E9EB"/>
+                      </a:solidFill>
+                    </a:lnB>
+                  </a:tcPr>
+                </a:tc>
+                <a:tc>
+                  <a:txBody>
+                    <a:bodyPr/>
+                    <a:lstStyle/>
+                    <a:p>
+                      <a:pPr algn="l"/>
+                      <a:r>
+                        <a:rPr sz="800" b="0">
+                          <a:solidFill>
+                            <a:srgbClr val="30353A"/>
+                          </a:solidFill>
+                          <a:latin typeface="Arial"/>
+                        </a:rPr>
+                        <a:t/>
+                      </a:r>
+                    </a:p>
+                  </a:txBody>
+                  <a:tcPr marL="54864" marR="54864" marT="18288" marB="18288" anchor="ctr">
+                    <a:solidFill>
+                      <a:srgbClr val="FFFFFF"/>
+                    </a:solidFill>
+                    <a:lnB w="6350" cap="flat">
+                      <a:solidFill>
+                        <a:srgbClr val="E7E9EB"/>
+                      </a:solidFill>
+                    </a:lnB>
+                  </a:tcPr>
+                </a:tc>
+              </a:tr>
+              <a:tr h="224028">
+                <a:tc>
+                  <a:txBody>
+                    <a:bodyPr/>
+                    <a:lstStyle/>
+                    <a:p>
+                      <a:pPr algn="l"/>
+                      <a:r>
+                        <a:rPr sz="800" b="1">
+                          <a:solidFill>
+                            <a:srgbClr val="FFFFFF"/>
+                          </a:solidFill>
+                          <a:latin typeface="Arial"/>
+                        </a:rPr>
+                        <a:t/>
+                      </a:r>
+                    </a:p>
+                  </a:txBody>
+                  <a:tcPr marL="54864" marR="54864" marT="18288" marB="18288" anchor="ctr">
+                    <a:solidFill>
+                      <a:srgbClr val="E36C0A"/>
+                    </a:solidFill>
+                    <a:lnB w="6350" cap="flat">
+                      <a:solidFill>
+                        <a:srgbClr val="E7E9EB"/>
+                      </a:solidFill>
+                    </a:lnB>
+                  </a:tcPr>
+                </a:tc>
+                <a:tc>
+                  <a:txBody>
+                    <a:bodyPr/>
+                    <a:lstStyle/>
+                    <a:p>
+                      <a:pPr algn="l"/>
+                      <a:r>
+                        <a:rPr sz="800" b="1">
+                          <a:solidFill>
+                            <a:srgbClr val="FFFFFF"/>
+                          </a:solidFill>
+                          <a:latin typeface="Arial"/>
+                        </a:rPr>
+                        <a:t>Subtotal (R$ bi)</a:t>
+                      </a:r>
+                    </a:p>
+                  </a:txBody>
+                  <a:tcPr marL="54864" marR="54864" marT="18288" marB="18288" anchor="ctr">
+                    <a:solidFill>
+                      <a:srgbClr val="E36C0A"/>
+                    </a:solidFill>
+                    <a:lnB w="6350" cap="flat">
+                      <a:solidFill>
+                        <a:srgbClr val="E7E9EB"/>
+                      </a:solidFill>
+                    </a:lnB>
+                  </a:tcPr>
+                </a:tc>
+                <a:tc>
+                  <a:txBody>
+                    <a:bodyPr/>
+                    <a:lstStyle/>
+                    <a:p>
+                      <a:pPr algn="l"/>
+                      <a:r>
+                        <a:rPr sz="800" b="1">
+                          <a:solidFill>
+                            <a:srgbClr val="FFFFFF"/>
+                          </a:solidFill>
+                          <a:latin typeface="Arial"/>
+                        </a:rPr>
+                        <a:t/>
+                      </a:r>
+                    </a:p>
+                  </a:txBody>
+                  <a:tcPr marL="54864" marR="54864" marT="18288" marB="18288" anchor="ctr">
+                    <a:solidFill>
+                      <a:srgbClr val="E36C0A"/>
+                    </a:solidFill>
+                    <a:lnB w="6350" cap="flat">
+                      <a:solidFill>
+                        <a:srgbClr val="E7E9EB"/>
+                      </a:solidFill>
+                    </a:lnB>
+                  </a:tcPr>
+                </a:tc>
+                <a:tc>
+                  <a:txBody>
+                    <a:bodyPr/>
+                    <a:lstStyle/>
+                    <a:p>
+                      <a:pPr algn="l"/>
+                      <a:r>
+                        <a:rPr sz="800" b="1">
+                          <a:solidFill>
+                            <a:srgbClr val="FFFFFF"/>
+                          </a:solidFill>
+                          <a:latin typeface="Arial"/>
+                        </a:rPr>
+                        <a:t/>
+                      </a:r>
+                    </a:p>
+                  </a:txBody>
+                  <a:tcPr marL="54864" marR="54864" marT="18288" marB="18288" anchor="ctr">
+                    <a:solidFill>
+                      <a:srgbClr val="E36C0A"/>
+                    </a:solidFill>
+                    <a:lnB w="6350" cap="flat">
+                      <a:solidFill>
+                        <a:srgbClr val="E7E9EB"/>
+                      </a:solidFill>
+                    </a:lnB>
+                  </a:tcPr>
+                </a:tc>
+                <a:tc>
+                  <a:txBody>
+                    <a:bodyPr/>
+                    <a:lstStyle/>
+                    <a:p>
+                      <a:pPr algn="l"/>
+                      <a:r>
+                        <a:rPr sz="800" b="1">
+                          <a:solidFill>
+                            <a:srgbClr val="FFFFFF"/>
+                          </a:solidFill>
+                          <a:latin typeface="Arial"/>
+                        </a:rPr>
+                        <a:t/>
+                      </a:r>
+                    </a:p>
+                  </a:txBody>
+                  <a:tcPr marL="54864" marR="54864" marT="18288" marB="18288" anchor="ctr">
+                    <a:solidFill>
+                      <a:srgbClr val="E36C0A"/>
+                    </a:solidFill>
+                    <a:lnB w="6350" cap="flat">
+                      <a:solidFill>
+                        <a:srgbClr val="E7E9EB"/>
+                      </a:solidFill>
+                    </a:lnB>
+                  </a:tcPr>
+                </a:tc>
+                <a:tc>
+                  <a:txBody>
+                    <a:bodyPr/>
+                    <a:lstStyle/>
+                    <a:p>
+                      <a:pPr algn="r"/>
+                      <a:r>
+                        <a:rPr sz="800" b="1">
+                          <a:solidFill>
+                            <a:srgbClr val="FFFFFF"/>
+                          </a:solidFill>
+                          <a:latin typeface="Arial"/>
+                        </a:rPr>
+                        <a:t>2,87</a:t>
+                      </a:r>
+                    </a:p>
+                  </a:txBody>
+                  <a:tcPr marL="54864" marR="54864" marT="18288" marB="18288" anchor="ctr">
+                    <a:solidFill>
+                      <a:srgbClr val="E36C0A"/>
+                    </a:solidFill>
+                    <a:lnB w="6350" cap="flat">
+                      <a:solidFill>
+                        <a:srgbClr val="E7E9EB"/>
+                      </a:solidFill>
+                    </a:lnB>
+                  </a:tcPr>
+                </a:tc>
+                <a:tc>
+                  <a:txBody>
+                    <a:bodyPr/>
+                    <a:lstStyle/>
+                    <a:p>
+                      <a:pPr algn="l"/>
+                      <a:r>
+                        <a:rPr sz="800" b="1">
+                          <a:solidFill>
+                            <a:srgbClr val="FFFFFF"/>
+                          </a:solidFill>
+                          <a:latin typeface="Arial"/>
+                        </a:rPr>
+                        <a:t/>
+                      </a:r>
+                    </a:p>
+                  </a:txBody>
+                  <a:tcPr marL="54864" marR="54864" marT="18288" marB="18288" anchor="ctr">
+                    <a:solidFill>
+                      <a:srgbClr val="E36C0A"/>
+                    </a:solidFill>
+                    <a:lnB w="6350" cap="flat">
+                      <a:solidFill>
+                        <a:srgbClr val="E7E9EB"/>
+                      </a:solidFill>
+                    </a:lnB>
+                  </a:tcPr>
+                </a:tc>
+                <a:tc>
+                  <a:txBody>
+                    <a:bodyPr/>
+                    <a:lstStyle/>
+                    <a:p>
+                      <a:pPr algn="l"/>
+                      <a:r>
+                        <a:rPr sz="800" b="1">
+                          <a:solidFill>
+                            <a:srgbClr val="FFFFFF"/>
+                          </a:solidFill>
+                          <a:latin typeface="Arial"/>
+                        </a:rPr>
+                        <a:t/>
+                      </a:r>
+                    </a:p>
+                  </a:txBody>
+                  <a:tcPr marL="54864" marR="54864" marT="18288" marB="18288" anchor="ctr">
+                    <a:solidFill>
+                      <a:srgbClr val="E36C0A"/>
+                    </a:solidFill>
+                    <a:lnB w="6350" cap="flat">
+                      <a:solidFill>
+                        <a:srgbClr val="E7E9EB"/>
+                      </a:solidFill>
+                    </a:lnB>
+                  </a:tcPr>
+                </a:tc>
+                <a:tc>
+                  <a:txBody>
+                    <a:bodyPr/>
+                    <a:lstStyle/>
+                    <a:p>
+                      <a:pPr algn="l"/>
+                      <a:r>
+                        <a:rPr sz="800" b="1">
+                          <a:solidFill>
+                            <a:srgbClr val="FFFFFF"/>
+                          </a:solidFill>
+                          <a:latin typeface="Arial"/>
+                        </a:rPr>
+                        <a:t/>
+                      </a:r>
+                    </a:p>
+                  </a:txBody>
+                  <a:tcPr marL="54864" marR="54864" marT="18288" marB="18288" anchor="ctr">
+                    <a:solidFill>
+                      <a:srgbClr val="E36C0A"/>
+                    </a:solidFill>
+                    <a:lnB w="6350" cap="flat">
+                      <a:solidFill>
+                        <a:srgbClr val="E7E9EB"/>
+                      </a:solidFill>
+                    </a:lnB>
+                  </a:tcPr>
+                </a:tc>
+                <a:tc>
+                  <a:txBody>
+                    <a:bodyPr/>
+                    <a:lstStyle/>
+                    <a:p>
+                      <a:pPr algn="l"/>
+                      <a:r>
+                        <a:rPr sz="800" b="1">
+                          <a:solidFill>
+                            <a:srgbClr val="FFFFFF"/>
+                          </a:solidFill>
+                          <a:latin typeface="Arial"/>
+                        </a:rPr>
+                        <a:t/>
+                      </a:r>
+                    </a:p>
+                  </a:txBody>
+                  <a:tcPr marL="54864" marR="54864" marT="18288" marB="18288" anchor="ctr">
+                    <a:solidFill>
+                      <a:srgbClr val="E36C0A"/>
+                    </a:solidFill>
+                    <a:lnB w="6350" cap="flat">
+                      <a:solidFill>
+                        <a:srgbClr val="E7E9EB"/>
+                      </a:solidFill>
+                    </a:lnB>
+                  </a:tcPr>
+                </a:tc>
+              </a:tr>
+              <a:tr h="224028">
+                <a:tc>
+                  <a:txBody>
+                    <a:bodyPr/>
+                    <a:lstStyle/>
+                    <a:p>
+                      <a:pPr algn="l"/>
+                      <a:r>
+                        <a:rPr sz="800" b="1">
+                          <a:solidFill>
+                            <a:srgbClr val="FFFFFF"/>
+                          </a:solidFill>
+                          <a:latin typeface="Arial"/>
+                        </a:rPr>
+                        <a:t/>
+                      </a:r>
+                    </a:p>
+                  </a:txBody>
+                  <a:tcPr marL="54864" marR="54864" marT="18288" marB="18288" anchor="ctr">
+                    <a:solidFill>
+                      <a:srgbClr val="E36C0A"/>
+                    </a:solidFill>
+                    <a:lnB w="6350" cap="flat">
+                      <a:solidFill>
+                        <a:srgbClr val="E7E9EB"/>
+                      </a:solidFill>
+                    </a:lnB>
+                  </a:tcPr>
+                </a:tc>
+                <a:tc>
+                  <a:txBody>
+                    <a:bodyPr/>
+                    <a:lstStyle/>
+                    <a:p>
+                      <a:pPr algn="l"/>
+                      <a:r>
+                        <a:rPr sz="800" b="1">
+                          <a:solidFill>
+                            <a:srgbClr val="FFFFFF"/>
+                          </a:solidFill>
+                          <a:latin typeface="Arial"/>
+                        </a:rPr>
+                        <a:t>Subtotal 1S26 (% emissões FIDC CVM)</a:t>
+                      </a:r>
+                    </a:p>
+                  </a:txBody>
+                  <a:tcPr marL="54864" marR="54864" marT="18288" marB="18288" anchor="ctr">
+                    <a:solidFill>
+                      <a:srgbClr val="E36C0A"/>
+                    </a:solidFill>
+                    <a:lnB w="6350" cap="flat">
+                      <a:solidFill>
+                        <a:srgbClr val="E7E9EB"/>
+                      </a:solidFill>
+                    </a:lnB>
+                  </a:tcPr>
+                </a:tc>
+                <a:tc>
+                  <a:txBody>
+                    <a:bodyPr/>
+                    <a:lstStyle/>
+                    <a:p>
+                      <a:pPr algn="l"/>
+                      <a:r>
+                        <a:rPr sz="800" b="1">
+                          <a:solidFill>
+                            <a:srgbClr val="FFFFFF"/>
+                          </a:solidFill>
+                          <a:latin typeface="Arial"/>
+                        </a:rPr>
+                        <a:t/>
+                      </a:r>
+                    </a:p>
+                  </a:txBody>
+                  <a:tcPr marL="54864" marR="54864" marT="18288" marB="18288" anchor="ctr">
+                    <a:solidFill>
+                      <a:srgbClr val="E36C0A"/>
+                    </a:solidFill>
+                    <a:lnB w="6350" cap="flat">
+                      <a:solidFill>
+                        <a:srgbClr val="E7E9EB"/>
+                      </a:solidFill>
+                    </a:lnB>
+                  </a:tcPr>
+                </a:tc>
+                <a:tc>
+                  <a:txBody>
+                    <a:bodyPr/>
+                    <a:lstStyle/>
+                    <a:p>
+                      <a:pPr algn="l"/>
+                      <a:r>
+                        <a:rPr sz="800" b="1">
+                          <a:solidFill>
+                            <a:srgbClr val="FFFFFF"/>
+                          </a:solidFill>
+                          <a:latin typeface="Arial"/>
+                        </a:rPr>
+                        <a:t/>
+                      </a:r>
+                    </a:p>
+                  </a:txBody>
+                  <a:tcPr marL="54864" marR="54864" marT="18288" marB="18288" anchor="ctr">
+                    <a:solidFill>
+                      <a:srgbClr val="E36C0A"/>
+                    </a:solidFill>
+                    <a:lnB w="6350" cap="flat">
+                      <a:solidFill>
+                        <a:srgbClr val="E7E9EB"/>
+                      </a:solidFill>
+                    </a:lnB>
+                  </a:tcPr>
+                </a:tc>
+                <a:tc>
+                  <a:txBody>
+                    <a:bodyPr/>
+                    <a:lstStyle/>
+                    <a:p>
+                      <a:pPr algn="l"/>
+                      <a:r>
+                        <a:rPr sz="800" b="1">
+                          <a:solidFill>
+                            <a:srgbClr val="FFFFFF"/>
+                          </a:solidFill>
+                          <a:latin typeface="Arial"/>
+                        </a:rPr>
+                        <a:t/>
+                      </a:r>
+                    </a:p>
+                  </a:txBody>
+                  <a:tcPr marL="54864" marR="54864" marT="18288" marB="18288" anchor="ctr">
+                    <a:solidFill>
+                      <a:srgbClr val="E36C0A"/>
+                    </a:solidFill>
+                    <a:lnB w="6350" cap="flat">
+                      <a:solidFill>
+                        <a:srgbClr val="E7E9EB"/>
+                      </a:solidFill>
+                    </a:lnB>
+                  </a:tcPr>
+                </a:tc>
+                <a:tc>
+                  <a:txBody>
+                    <a:bodyPr/>
+                    <a:lstStyle/>
+                    <a:p>
+                      <a:pPr algn="r"/>
+                      <a:r>
+                        <a:rPr sz="800" b="1">
+                          <a:solidFill>
+                            <a:srgbClr val="FFFFFF"/>
+                          </a:solidFill>
+                          <a:latin typeface="Arial"/>
+                        </a:rPr>
+                        <a:t>2,2%</a:t>
+                      </a:r>
+                    </a:p>
+                  </a:txBody>
+                  <a:tcPr marL="54864" marR="54864" marT="18288" marB="18288" anchor="ctr">
+                    <a:solidFill>
+                      <a:srgbClr val="E36C0A"/>
+                    </a:solidFill>
+                    <a:lnB w="6350" cap="flat">
+                      <a:solidFill>
+                        <a:srgbClr val="E7E9EB"/>
+                      </a:solidFill>
+                    </a:lnB>
+                  </a:tcPr>
+                </a:tc>
+                <a:tc>
+                  <a:txBody>
+                    <a:bodyPr/>
+                    <a:lstStyle/>
+                    <a:p>
+                      <a:pPr algn="l"/>
+                      <a:r>
+                        <a:rPr sz="800" b="1">
+                          <a:solidFill>
+                            <a:srgbClr val="FFFFFF"/>
+                          </a:solidFill>
+                          <a:latin typeface="Arial"/>
+                        </a:rPr>
+                        <a:t/>
+                      </a:r>
+                    </a:p>
+                  </a:txBody>
+                  <a:tcPr marL="54864" marR="54864" marT="18288" marB="18288" anchor="ctr">
+                    <a:solidFill>
+                      <a:srgbClr val="E36C0A"/>
+                    </a:solidFill>
+                    <a:lnB w="6350" cap="flat">
+                      <a:solidFill>
+                        <a:srgbClr val="E7E9EB"/>
+                      </a:solidFill>
+                    </a:lnB>
+                  </a:tcPr>
+                </a:tc>
+                <a:tc>
+                  <a:txBody>
+                    <a:bodyPr/>
+                    <a:lstStyle/>
+                    <a:p>
+                      <a:pPr algn="l"/>
+                      <a:r>
+                        <a:rPr sz="800" b="1">
+                          <a:solidFill>
+                            <a:srgbClr val="FFFFFF"/>
+                          </a:solidFill>
+                          <a:latin typeface="Arial"/>
+                        </a:rPr>
+                        <a:t/>
+                      </a:r>
+                    </a:p>
+                  </a:txBody>
+                  <a:tcPr marL="54864" marR="54864" marT="18288" marB="18288" anchor="ctr">
+                    <a:solidFill>
+                      <a:srgbClr val="E36C0A"/>
+                    </a:solidFill>
+                    <a:lnB w="6350" cap="flat">
+                      <a:solidFill>
+                        <a:srgbClr val="E7E9EB"/>
+                      </a:solidFill>
+                    </a:lnB>
+                  </a:tcPr>
+                </a:tc>
+                <a:tc>
+                  <a:txBody>
+                    <a:bodyPr/>
+                    <a:lstStyle/>
+                    <a:p>
+                      <a:pPr algn="l"/>
+                      <a:r>
+                        <a:rPr sz="800" b="1">
+                          <a:solidFill>
+                            <a:srgbClr val="FFFFFF"/>
+                          </a:solidFill>
+                          <a:latin typeface="Arial"/>
+                        </a:rPr>
+                        <a:t/>
+                      </a:r>
+                    </a:p>
+                  </a:txBody>
+                  <a:tcPr marL="54864" marR="54864" marT="18288" marB="18288" anchor="ctr">
+                    <a:solidFill>
+                      <a:srgbClr val="E36C0A"/>
+                    </a:solidFill>
+                    <a:lnB w="6350" cap="flat">
+                      <a:solidFill>
+                        <a:srgbClr val="E7E9EB"/>
+                      </a:solidFill>
+                    </a:lnB>
+                  </a:tcPr>
+                </a:tc>
+                <a:tc>
+                  <a:txBody>
+                    <a:bodyPr/>
+                    <a:lstStyle/>
+                    <a:p>
+                      <a:pPr algn="l"/>
+                      <a:r>
+                        <a:rPr sz="800" b="1">
+                          <a:solidFill>
+                            <a:srgbClr val="FFFFFF"/>
+                          </a:solidFill>
+                          <a:latin typeface="Arial"/>
+                        </a:rPr>
+                        <a:t/>
+                      </a:r>
+                    </a:p>
+                  </a:txBody>
+                  <a:tcPr marL="54864" marR="54864" marT="18288" marB="18288" anchor="ctr">
+                    <a:solidFill>
+                      <a:srgbClr val="E36C0A"/>
+                    </a:solidFill>
+                    <a:lnB w="6350" cap="flat">
+                      <a:solidFill>
+                        <a:srgbClr val="E7E9EB"/>
+                      </a:solidFill>
+                    </a:lnB>
+                  </a:tcPr>
+                </a:tc>
+              </a:tr>
+            </a:tbl>
+          </a:graphicData>
+        </a:graphic>
+      </p:graphicFrame>
+      <p:sp>
+        <p:nvSpPr>
+          <p:cNvPr id="7" name="TextBox 6"/>
+          <p:cNvSpPr txBox="1"/>
+          <p:nvPr/>
+        </p:nvSpPr>
+        <p:spPr>
+          <a:xfrm>
+            <a:off x="566928" y="5806440"/>
+            <a:ext cx="11018520" cy="256032"/>
+          </a:xfrm>
+          <a:prstGeom prst="rect">
+            <a:avLst/>
+          </a:prstGeom>
+          <a:noFill/>
+        </p:spPr>
+        <p:txBody>
+          <a:bodyPr wrap="square" anchor="t" lIns="0" rIns="0" tIns="0" bIns="0">
+            <a:spAutoFit/>
+          </a:bodyPr>
+          <a:lstStyle/>
+          <a:p>
+            <a:pPr algn="l">
+              <a:defRPr sz="800" b="0">
+                <a:solidFill>
+                  <a:srgbClr val="5D6369"/>
+                </a:solidFill>
+                <a:latin typeface="Arial"/>
+              </a:defRPr>
+            </a:pPr>
+            <a:r>
+              <a:t>¹ A coluna Originador reproduz o cedente informado na planilha de entrada. A confirmação de que o cedente é também o originador dos direitos creditórios exige leitura do regulamento e dos documentos da oferta — ver nota técnica no slide seguinte.</a:t>
+            </a:r>
+          </a:p>
+        </p:txBody>
+      </p:sp>
+      <p:sp>
+        <p:nvSpPr>
+          <p:cNvPr id="8" name="TextBox 7"/>
+          <p:cNvSpPr txBox="1"/>
+          <p:nvPr/>
+        </p:nvSpPr>
+        <p:spPr>
+          <a:xfrm>
+            <a:off x="566928" y="6062472"/>
+            <a:ext cx="11018520" cy="256032"/>
+          </a:xfrm>
+          <a:prstGeom prst="rect">
+            <a:avLst/>
+          </a:prstGeom>
+          <a:noFill/>
+        </p:spPr>
+        <p:txBody>
+          <a:bodyPr wrap="square" anchor="t" lIns="0" rIns="0" tIns="0" bIns="0">
+            <a:spAutoFit/>
+          </a:bodyPr>
+          <a:lstStyle/>
+          <a:p>
+            <a:pPr algn="l">
+              <a:defRPr sz="800" b="0">
+                <a:solidFill>
+                  <a:srgbClr val="5D6369"/>
+                </a:solidFill>
+                <a:latin typeface="Arial"/>
+              </a:defRPr>
+            </a:pPr>
+            <a:r>
+              <a:t>Subtotal em R$ bi soma as ofertas de referência mostradas; o percentual usa apenas as encerradas no 1S26, sobre o universo CVM de cotas de FIDC do semestre (R$ 65,5 bi). Bookamos? e Risco IBBA em branco por instrução. 6 fundos não têm oferta pública encerrada registrada na CVM e aparecem como n/d em R$ bi e “Não identificado” nas colunas dependentes da oferta.</a:t>
+            </a:r>
+          </a:p>
+        </p:txBody>
+      </p:sp>
+      <p:sp>
+        <p:nvSpPr>
+          <p:cNvPr id="9" name="Rectangle 8"/>
+          <p:cNvSpPr/>
+          <p:nvPr/>
+        </p:nvSpPr>
+        <p:spPr>
+          <a:xfrm>
+            <a:off x="566928" y="6355080"/>
+            <a:ext cx="11018520" cy="9144"/>
+          </a:xfrm>
+          <a:prstGeom prst="rect">
+            <a:avLst/>
+          </a:prstGeom>
+          <a:solidFill>
+            <a:srgbClr val="E7E9EB"/>
+          </a:solidFill>
+          <a:ln>
+            <a:noFill/>
+          </a:ln>
+        </p:spPr>
+        <p:style>
+          <a:lnRef idx="1">
+            <a:schemeClr val="accent1"/>
+          </a:lnRef>
+          <a:fillRef idx="3">
+            <a:schemeClr val="accent1"/>
+          </a:fillRef>
+          <a:effectRef idx="2">
+            <a:schemeClr val="accent1"/>
+          </a:effectRef>
+          <a:fontRef idx="minor">
+            <a:schemeClr val="lt1"/>
+          </a:fontRef>
+        </p:style>
+        <p:txBody>
+          <a:bodyPr rtlCol="0" anchor="ctr"/>
+          <a:lstStyle/>
+          <a:p>
+            <a:pPr algn="ctr"/>
+          </a:p>
+        </p:txBody>
+      </p:sp>
+      <p:sp>
+        <p:nvSpPr>
+          <p:cNvPr id="10" name="TextBox 9"/>
+          <p:cNvSpPr txBox="1"/>
+          <p:nvPr/>
+        </p:nvSpPr>
+        <p:spPr>
+          <a:xfrm>
+            <a:off x="566928" y="6419088"/>
+            <a:ext cx="10469880" cy="274320"/>
+          </a:xfrm>
+          <a:prstGeom prst="rect">
+            <a:avLst/>
+          </a:prstGeom>
+          <a:noFill/>
+        </p:spPr>
+        <p:txBody>
+          <a:bodyPr wrap="square" anchor="t" lIns="0" rIns="0" tIns="0" bIns="0">
+            <a:spAutoFit/>
+          </a:bodyPr>
+          <a:lstStyle/>
+          <a:p>
+            <a:pPr algn="l">
+              <a:defRPr sz="800" b="0">
+                <a:solidFill>
+                  <a:srgbClr val="8D9399"/>
+                </a:solidFill>
+                <a:latin typeface="Arial"/>
+              </a:defRPr>
+            </a:pPr>
+            <a:r>
+              <a:t>Fonte: CVM, Oferta Pública de Distribuição (RCVM 160), cotas de FIDC, primária, status Oferta Encerrada · ANBIMA, Fundos 175 características público</a:t>
+            </a:r>
+          </a:p>
+        </p:txBody>
+      </p:sp>
+      <p:sp>
+        <p:nvSpPr>
+          <p:cNvPr id="11" name="TextBox 10"/>
+          <p:cNvSpPr txBox="1"/>
+          <p:nvPr/>
+        </p:nvSpPr>
+        <p:spPr>
+          <a:xfrm>
+            <a:off x="11201400" y="6409944"/>
+            <a:ext cx="384048" cy="201168"/>
+          </a:xfrm>
+          <a:prstGeom prst="rect">
+            <a:avLst/>
+          </a:prstGeom>
+          <a:noFill/>
+        </p:spPr>
+        <p:txBody>
+          <a:bodyPr wrap="square" anchor="t" lIns="0" rIns="0" tIns="0" bIns="0">
+            <a:spAutoFit/>
+          </a:bodyPr>
+          <a:lstStyle/>
+          <a:p>
+            <a:pPr algn="r">
+              <a:defRPr sz="800" b="0">
+                <a:solidFill>
+                  <a:srgbClr val="8D9399"/>
+                </a:solidFill>
+                <a:latin typeface="Arial"/>
+              </a:defRPr>
+            </a:pPr>
+            <a:r>
+              <a:t>9</a:t>
+            </a:r>
+          </a:p>
+        </p:txBody>
+      </p:sp>
+    </p:spTree>
+  </p:cSld>
+  <p:clrMapOvr>
+    <a:masterClrMapping/>
+  </p:clrMapOvr>
+</p:sld>
+</file>
+
+<file path=ppt/slides/slide11.xml><?xml version="1.0" encoding="utf-8"?>
+<p:sld xmlns:a="http://schemas.openxmlformats.org/drawingml/2006/main" xmlns:p="http://schemas.openxmlformats.org/presentationml/2006/main" xmlns:r="http://schemas.openxmlformats.org/officeDocument/2006/relationships">
+  <p:cSld>
+    <p:bg>
+      <p:bgPr>
+        <a:solidFill>
+          <a:srgbClr val="FFFFFF"/>
+        </a:solidFill>
+        <a:effectLst/>
+      </p:bgPr>
+    </p:bg>
+    <p:spTree>
+      <p:nvGrpSpPr>
+        <p:cNvPr id="1" name=""/>
+        <p:cNvGrpSpPr/>
+        <p:nvPr/>
+      </p:nvGrpSpPr>
+      <p:grpSpPr/>
+      <p:sp>
+        <p:nvSpPr>
+          <p:cNvPr id="2" name="TextBox 1"/>
+          <p:cNvSpPr txBox="1"/>
+          <p:nvPr/>
+        </p:nvSpPr>
+        <p:spPr>
+          <a:xfrm>
+            <a:off x="566928" y="256032"/>
+            <a:ext cx="7315200" cy="201168"/>
+          </a:xfrm>
+          <a:prstGeom prst="rect">
+            <a:avLst/>
+          </a:prstGeom>
+          <a:noFill/>
+        </p:spPr>
+        <p:txBody>
+          <a:bodyPr wrap="square" anchor="t" lIns="0" rIns="0" tIns="0" bIns="0">
+            <a:spAutoFit/>
+          </a:bodyPr>
+          <a:lstStyle/>
+          <a:p>
+            <a:pPr algn="l">
+              <a:defRPr sz="1000" b="1">
+                <a:solidFill>
+                  <a:srgbClr val="E36C0A"/>
+                </a:solidFill>
+                <a:latin typeface="Arial"/>
+              </a:defRPr>
+            </a:pPr>
+            <a:r>
+              <a:t>RANKING ANBIMA · JUNHO/2026</a:t>
+            </a:r>
+          </a:p>
+        </p:txBody>
+      </p:sp>
+      <p:sp>
+        <p:nvSpPr>
+          <p:cNvPr id="3" name="TextBox 2"/>
+          <p:cNvSpPr txBox="1"/>
+          <p:nvPr/>
+        </p:nvSpPr>
+        <p:spPr>
+          <a:xfrm>
+            <a:off x="566928" y="521207"/>
+            <a:ext cx="11064240" cy="438912"/>
+          </a:xfrm>
+          <a:prstGeom prst="rect">
+            <a:avLst/>
+          </a:prstGeom>
+          <a:noFill/>
+        </p:spPr>
+        <p:txBody>
+          <a:bodyPr wrap="square" anchor="t" lIns="0" rIns="0" tIns="0" bIns="0">
+            <a:spAutoFit/>
+          </a:bodyPr>
+          <a:lstStyle/>
+          <a:p>
+            <a:pPr algn="l">
+              <a:defRPr sz="2200" b="1">
+                <a:solidFill>
+                  <a:srgbClr val="151515"/>
+                </a:solidFill>
+                <a:latin typeface="Arial"/>
+              </a:defRPr>
+            </a:pPr>
+            <a:r>
+              <a:t>Top FIDCs Middle — nota técnica de fontes</a:t>
+            </a:r>
+          </a:p>
+        </p:txBody>
+      </p:sp>
+      <p:sp>
+        <p:nvSpPr>
+          <p:cNvPr id="4" name="Rectangle 3"/>
+          <p:cNvSpPr/>
+          <p:nvPr/>
+        </p:nvSpPr>
+        <p:spPr>
+          <a:xfrm>
+            <a:off x="566928" y="1051560"/>
+            <a:ext cx="11018520" cy="16459"/>
+          </a:xfrm>
+          <a:prstGeom prst="rect">
+            <a:avLst/>
+          </a:prstGeom>
+          <a:solidFill>
+            <a:srgbClr val="D7DADD"/>
+          </a:solidFill>
+          <a:ln>
+            <a:noFill/>
+          </a:ln>
+        </p:spPr>
+        <p:style>
+          <a:lnRef idx="1">
+            <a:schemeClr val="accent1"/>
+          </a:lnRef>
+          <a:fillRef idx="3">
+            <a:schemeClr val="accent1"/>
+          </a:fillRef>
+          <a:effectRef idx="2">
+            <a:schemeClr val="accent1"/>
+          </a:effectRef>
+          <a:fontRef idx="minor">
+            <a:schemeClr val="lt1"/>
+          </a:fontRef>
+        </p:style>
+        <p:txBody>
+          <a:bodyPr rtlCol="0" anchor="ctr"/>
+          <a:lstStyle/>
+          <a:p>
+            <a:pPr algn="ctr"/>
+          </a:p>
+        </p:txBody>
+      </p:sp>
+      <p:graphicFrame>
+        <p:nvGraphicFramePr>
+          <p:cNvPr id="5" name="Table 4"/>
+          <p:cNvGraphicFramePr>
+            <a:graphicFrameLocks noGrp="1"/>
+          </p:cNvGraphicFramePr>
+          <p:nvPr/>
+        </p:nvGraphicFramePr>
+        <p:xfrm>
+          <a:off x="566928" y="1298448"/>
+          <a:ext cx="11018520" cy="2340864"/>
+        </p:xfrm>
+        <a:graphic>
+          <a:graphicData uri="http://schemas.openxmlformats.org/drawingml/2006/table">
+            <a:tbl>
+              <a:tblPr firstRow="1">
+                <a:tableStyleId>{2D5ABB26-0587-4C30-8999-92F81FD0307C}</a:tableStyleId>
+              </a:tblPr>
+              <a:tblGrid>
+                <a:gridCol w="2194560"/>
+                <a:gridCol w="4206240"/>
+                <a:gridCol w="4617720"/>
+              </a:tblGrid>
+              <a:tr h="292608">
+                <a:tc>
+                  <a:txBody>
+                    <a:bodyPr/>
+                    <a:lstStyle/>
+                    <a:p>
+                      <a:pPr algn="l"/>
+                      <a:r>
+                        <a:rPr sz="900" b="1">
+                          <a:solidFill>
+                            <a:srgbClr val="8D9399"/>
+                          </a:solidFill>
+                          <a:latin typeface="Arial"/>
+                        </a:rPr>
+                        <a:t>Coluna</a:t>
+                      </a:r>
+                    </a:p>
+                  </a:txBody>
+                  <a:tcPr marL="54864" marR="54864" marT="18288" marB="18288" anchor="ctr">
+                    <a:solidFill>
+                      <a:srgbClr val="F5F6F7"/>
+                    </a:solidFill>
+                    <a:lnB w="6350" cap="flat">
+                      <a:solidFill>
+                        <a:srgbClr val="D7DADD"/>
+                      </a:solidFill>
+                    </a:lnB>
+                  </a:tcPr>
+                </a:tc>
+                <a:tc>
+                  <a:txBody>
+                    <a:bodyPr/>
+                    <a:lstStyle/>
+                    <a:p>
+                      <a:pPr algn="l"/>
+                      <a:r>
+                        <a:rPr sz="900" b="1">
+                          <a:solidFill>
+                            <a:srgbClr val="8D9399"/>
+                          </a:solidFill>
+                          <a:latin typeface="Arial"/>
+                        </a:rPr>
+                        <a:t>Fonte utilizada</a:t>
+                      </a:r>
+                    </a:p>
+                  </a:txBody>
+                  <a:tcPr marL="54864" marR="54864" marT="18288" marB="18288" anchor="ctr">
+                    <a:solidFill>
+                      <a:srgbClr val="F5F6F7"/>
+                    </a:solidFill>
+                    <a:lnB w="6350" cap="flat">
+                      <a:solidFill>
+                        <a:srgbClr val="D7DADD"/>
+                      </a:solidFill>
+                    </a:lnB>
+                  </a:tcPr>
+                </a:tc>
+                <a:tc>
+                  <a:txBody>
+                    <a:bodyPr/>
+                    <a:lstStyle/>
+                    <a:p>
+                      <a:pPr algn="l"/>
+                      <a:r>
+                        <a:rPr sz="900" b="1">
+                          <a:solidFill>
+                            <a:srgbClr val="8D9399"/>
+                          </a:solidFill>
+                          <a:latin typeface="Arial"/>
+                        </a:rPr>
+                        <a:t>Situação</a:t>
+                      </a:r>
+                    </a:p>
+                  </a:txBody>
+                  <a:tcPr marL="54864" marR="54864" marT="18288" marB="18288" anchor="ctr">
+                    <a:solidFill>
+                      <a:srgbClr val="F5F6F7"/>
+                    </a:solidFill>
+                    <a:lnB w="6350" cap="flat">
+                      <a:solidFill>
+                        <a:srgbClr val="D7DADD"/>
+                      </a:solidFill>
+                    </a:lnB>
+                  </a:tcPr>
+                </a:tc>
+              </a:tr>
+              <a:tr h="292608">
+                <a:tc>
+                  <a:txBody>
+                    <a:bodyPr/>
+                    <a:lstStyle/>
+                    <a:p>
+                      <a:pPr algn="l"/>
+                      <a:r>
+                        <a:rPr sz="1000" b="0">
+                          <a:solidFill>
+                            <a:srgbClr val="30353A"/>
+                          </a:solidFill>
+                          <a:latin typeface="Arial"/>
+                        </a:rPr>
+                        <a:t>FIDC / CNPJ</a:t>
+                      </a:r>
+                    </a:p>
+                  </a:txBody>
+                  <a:tcPr marL="54864" marR="54864" marT="18288" marB="18288" anchor="ctr">
+                    <a:solidFill>
+                      <a:srgbClr val="FFFFFF"/>
+                    </a:solidFill>
+                    <a:lnB w="6350" cap="flat">
+                      <a:solidFill>
+                        <a:srgbClr val="E7E9EB"/>
+                      </a:solidFill>
+                    </a:lnB>
+                  </a:tcPr>
+                </a:tc>
+                <a:tc>
+                  <a:txBody>
+                    <a:bodyPr/>
+                    <a:lstStyle/>
+                    <a:p>
+                      <a:pPr algn="l"/>
+                      <a:r>
+                        <a:rPr sz="1000" b="0">
+                          <a:solidFill>
+                            <a:srgbClr val="30353A"/>
+                          </a:solidFill>
+                          <a:latin typeface="Arial"/>
+                        </a:rPr>
+                        <a:t>Planilha de entrada curada</a:t>
+                      </a:r>
+                    </a:p>
+                  </a:txBody>
+                  <a:tcPr marL="54864" marR="54864" marT="18288" marB="18288" anchor="ctr">
+                    <a:solidFill>
+                      <a:srgbClr val="FFFFFF"/>
+                    </a:solidFill>
+                    <a:lnB w="6350" cap="flat">
+                      <a:solidFill>
+                        <a:srgbClr val="E7E9EB"/>
+                      </a:solidFill>
+                    </a:lnB>
+                  </a:tcPr>
+                </a:tc>
+                <a:tc>
+                  <a:txBody>
+                    <a:bodyPr/>
+                    <a:lstStyle/>
+                    <a:p>
+                      <a:pPr algn="l"/>
+                      <a:r>
+                        <a:rPr sz="1000" b="0">
+                          <a:solidFill>
+                            <a:srgbClr val="30353A"/>
+                          </a:solidFill>
+                          <a:latin typeface="Arial"/>
+                        </a:rPr>
+                        <a:t>16 de 16 conferidos contra o cadastro ANBIMA</a:t>
+                      </a:r>
+                    </a:p>
+                  </a:txBody>
+                  <a:tcPr marL="54864" marR="54864" marT="18288" marB="18288" anchor="ctr">
+                    <a:solidFill>
+                      <a:srgbClr val="FFFFFF"/>
+                    </a:solidFill>
+                    <a:lnB w="6350" cap="flat">
+                      <a:solidFill>
+                        <a:srgbClr val="E7E9EB"/>
+                      </a:solidFill>
+                    </a:lnB>
+                  </a:tcPr>
+                </a:tc>
+              </a:tr>
+              <a:tr h="292608">
+                <a:tc>
+                  <a:txBody>
+                    <a:bodyPr/>
+                    <a:lstStyle/>
+                    <a:p>
+                      <a:pPr algn="l"/>
+                      <a:r>
+                        <a:rPr sz="1000" b="0">
+                          <a:solidFill>
+                            <a:srgbClr val="30353A"/>
+                          </a:solidFill>
+                          <a:latin typeface="Arial"/>
+                        </a:rPr>
+                        <a:t>Originador</a:t>
+                      </a:r>
+                    </a:p>
+                  </a:txBody>
+                  <a:tcPr marL="54864" marR="54864" marT="18288" marB="18288" anchor="ctr">
+                    <a:solidFill>
+                      <a:srgbClr val="FFFFFF"/>
+                    </a:solidFill>
+                    <a:lnB w="6350" cap="flat">
+                      <a:solidFill>
+                        <a:srgbClr val="E7E9EB"/>
+                      </a:solidFill>
+                    </a:lnB>
+                  </a:tcPr>
+                </a:tc>
+                <a:tc>
+                  <a:txBody>
+                    <a:bodyPr/>
+                    <a:lstStyle/>
+                    <a:p>
+                      <a:pPr algn="l"/>
+                      <a:r>
+                        <a:rPr sz="1000" b="0">
+                          <a:solidFill>
+                            <a:srgbClr val="30353A"/>
+                          </a:solidFill>
+                          <a:latin typeface="Arial"/>
+                        </a:rPr>
+                        <a:t>—</a:t>
+                      </a:r>
+                    </a:p>
+                  </a:txBody>
+                  <a:tcPr marL="54864" marR="54864" marT="18288" marB="18288" anchor="ctr">
+                    <a:solidFill>
+                      <a:srgbClr val="FFFFFF"/>
+                    </a:solidFill>
+                    <a:lnB w="6350" cap="flat">
+                      <a:solidFill>
+                        <a:srgbClr val="E7E9EB"/>
+                      </a:solidFill>
+                    </a:lnB>
+                  </a:tcPr>
+                </a:tc>
+                <a:tc>
+                  <a:txBody>
+                    <a:bodyPr/>
+                    <a:lstStyle/>
+                    <a:p>
+                      <a:pPr algn="l"/>
+                      <a:r>
+                        <a:rPr sz="1000" b="0">
+                          <a:solidFill>
+                            <a:srgbClr val="30353A"/>
+                          </a:solidFill>
+                          <a:latin typeface="Arial"/>
+                        </a:rPr>
+                        <a:t>Não confirmado: exige regulamento e documentos da oferta</a:t>
+                      </a:r>
+                    </a:p>
+                  </a:txBody>
+                  <a:tcPr marL="54864" marR="54864" marT="18288" marB="18288" anchor="ctr">
+                    <a:solidFill>
+                      <a:srgbClr val="FFFFFF"/>
+                    </a:solidFill>
+                    <a:lnB w="6350" cap="flat">
+                      <a:solidFill>
+                        <a:srgbClr val="E7E9EB"/>
+                      </a:solidFill>
+                    </a:lnB>
+                  </a:tcPr>
+                </a:tc>
+              </a:tr>
+              <a:tr h="292608">
+                <a:tc>
+                  <a:txBody>
+                    <a:bodyPr/>
+                    <a:lstStyle/>
+                    <a:p>
+                      <a:pPr algn="l"/>
+                      <a:r>
+                        <a:rPr sz="1000" b="0">
+                          <a:solidFill>
+                            <a:srgbClr val="30353A"/>
+                          </a:solidFill>
+                          <a:latin typeface="Arial"/>
+                        </a:rPr>
+                        <a:t>Tipo e Recebível</a:t>
+                      </a:r>
+                    </a:p>
+                  </a:txBody>
+                  <a:tcPr marL="54864" marR="54864" marT="18288" marB="18288" anchor="ctr">
+                    <a:solidFill>
+                      <a:srgbClr val="FFFFFF"/>
+                    </a:solidFill>
+                    <a:lnB w="6350" cap="flat">
+                      <a:solidFill>
+                        <a:srgbClr val="E7E9EB"/>
+                      </a:solidFill>
+                    </a:lnB>
+                  </a:tcPr>
+                </a:tc>
+                <a:tc>
+                  <a:txBody>
+                    <a:bodyPr/>
+                    <a:lstStyle/>
+                    <a:p>
+                      <a:pPr algn="l"/>
+                      <a:r>
+                        <a:rPr sz="1000" b="0">
+                          <a:solidFill>
+                            <a:srgbClr val="30353A"/>
+                          </a:solidFill>
+                          <a:latin typeface="Arial"/>
+                        </a:rPr>
+                        <a:t>ANBIMA, Fundos 175 características público</a:t>
+                      </a:r>
+                    </a:p>
+                  </a:txBody>
+                  <a:tcPr marL="54864" marR="54864" marT="18288" marB="18288" anchor="ctr">
+                    <a:solidFill>
+                      <a:srgbClr val="FFFFFF"/>
+                    </a:solidFill>
+                    <a:lnB w="6350" cap="flat">
+                      <a:solidFill>
+                        <a:srgbClr val="E7E9EB"/>
+                      </a:solidFill>
+                    </a:lnB>
+                  </a:tcPr>
+                </a:tc>
+                <a:tc>
+                  <a:txBody>
+                    <a:bodyPr/>
+                    <a:lstStyle/>
+                    <a:p>
+                      <a:pPr algn="l"/>
+                      <a:r>
+                        <a:rPr sz="1000" b="0">
+                          <a:solidFill>
+                            <a:srgbClr val="30353A"/>
+                          </a:solidFill>
+                          <a:latin typeface="Arial"/>
+                        </a:rPr>
+                        <a:t>16 de 16 classificados</a:t>
+                      </a:r>
+                    </a:p>
+                  </a:txBody>
+                  <a:tcPr marL="54864" marR="54864" marT="18288" marB="18288" anchor="ctr">
+                    <a:solidFill>
+                      <a:srgbClr val="FFFFFF"/>
+                    </a:solidFill>
+                    <a:lnB w="6350" cap="flat">
+                      <a:solidFill>
+                        <a:srgbClr val="E7E9EB"/>
+                      </a:solidFill>
+                    </a:lnB>
+                  </a:tcPr>
+                </a:tc>
+              </a:tr>
+              <a:tr h="292608">
+                <a:tc>
+                  <a:txBody>
+                    <a:bodyPr/>
+                    <a:lstStyle/>
+                    <a:p>
+                      <a:pPr algn="l"/>
+                      <a:r>
+                        <a:rPr sz="1000" b="0">
+                          <a:solidFill>
+                            <a:srgbClr val="30353A"/>
+                          </a:solidFill>
+                          <a:latin typeface="Arial"/>
+                        </a:rPr>
+                        <a:t>R$ bi</a:t>
+                      </a:r>
+                    </a:p>
+                  </a:txBody>
+                  <a:tcPr marL="54864" marR="54864" marT="18288" marB="18288" anchor="ctr">
+                    <a:solidFill>
+                      <a:srgbClr val="FFFFFF"/>
+                    </a:solidFill>
+                    <a:lnB w="6350" cap="flat">
+                      <a:solidFill>
+                        <a:srgbClr val="E7E9EB"/>
+                      </a:solidFill>
+                    </a:lnB>
+                  </a:tcPr>
+                </a:tc>
+                <a:tc>
+                  <a:txBody>
+                    <a:bodyPr/>
+                    <a:lstStyle/>
+                    <a:p>
+                      <a:pPr algn="l"/>
+                      <a:r>
+                        <a:rPr sz="1000" b="0">
+                          <a:solidFill>
+                            <a:srgbClr val="30353A"/>
+                          </a:solidFill>
+                          <a:latin typeface="Arial"/>
+                        </a:rPr>
+                        <a:t>CVM, valor total registrado da oferta</a:t>
+                      </a:r>
+                    </a:p>
+                  </a:txBody>
+                  <a:tcPr marL="54864" marR="54864" marT="18288" marB="18288" anchor="ctr">
+                    <a:solidFill>
+                      <a:srgbClr val="FFFFFF"/>
+                    </a:solidFill>
+                    <a:lnB w="6350" cap="flat">
+                      <a:solidFill>
+                        <a:srgbClr val="E7E9EB"/>
+                      </a:solidFill>
+                    </a:lnB>
+                  </a:tcPr>
+                </a:tc>
+                <a:tc>
+                  <a:txBody>
+                    <a:bodyPr/>
+                    <a:lstStyle/>
+                    <a:p>
+                      <a:pPr algn="l"/>
+                      <a:r>
+                        <a:rPr sz="1000" b="0">
+                          <a:solidFill>
+                            <a:srgbClr val="30353A"/>
+                          </a:solidFill>
+                          <a:latin typeface="Arial"/>
+                        </a:rPr>
+                        <a:t>10 de 16 com oferta encerrada identificada</a:t>
+                      </a:r>
+                    </a:p>
+                  </a:txBody>
+                  <a:tcPr marL="54864" marR="54864" marT="18288" marB="18288" anchor="ctr">
+                    <a:solidFill>
+                      <a:srgbClr val="FFFFFF"/>
+                    </a:solidFill>
+                    <a:lnB w="6350" cap="flat">
+                      <a:solidFill>
+                        <a:srgbClr val="E7E9EB"/>
+                      </a:solidFill>
+                    </a:lnB>
+                  </a:tcPr>
+                </a:tc>
+              </a:tr>
+              <a:tr h="292608">
+                <a:tc>
+                  <a:txBody>
+                    <a:bodyPr/>
+                    <a:lstStyle/>
+                    <a:p>
+                      <a:pPr algn="l"/>
+                      <a:r>
+                        <a:rPr sz="1000" b="0">
+                          <a:solidFill>
+                            <a:srgbClr val="30353A"/>
+                          </a:solidFill>
+                          <a:latin typeface="Arial"/>
+                        </a:rPr>
+                        <a:t>IBBA Coord?</a:t>
+                      </a:r>
+                    </a:p>
+                  </a:txBody>
+                  <a:tcPr marL="54864" marR="54864" marT="18288" marB="18288" anchor="ctr">
+                    <a:solidFill>
+                      <a:srgbClr val="FFFFFF"/>
+                    </a:solidFill>
+                    <a:lnB w="6350" cap="flat">
+                      <a:solidFill>
+                        <a:srgbClr val="E7E9EB"/>
+                      </a:solidFill>
+                    </a:lnB>
+                  </a:tcPr>
+                </a:tc>
+                <a:tc>
+                  <a:txBody>
+                    <a:bodyPr/>
+                    <a:lstStyle/>
+                    <a:p>
+                      <a:pPr algn="l"/>
+                      <a:r>
+                        <a:rPr sz="1000" b="0">
+                          <a:solidFill>
+                            <a:srgbClr val="30353A"/>
+                          </a:solidFill>
+                          <a:latin typeface="Arial"/>
+                        </a:rPr>
+                        <a:t>CVM, campo Nome_Lider da oferta</a:t>
+                      </a:r>
+                    </a:p>
+                  </a:txBody>
+                  <a:tcPr marL="54864" marR="54864" marT="18288" marB="18288" anchor="ctr">
+                    <a:solidFill>
+                      <a:srgbClr val="FFFFFF"/>
+                    </a:solidFill>
+                    <a:lnB w="6350" cap="flat">
+                      <a:solidFill>
+                        <a:srgbClr val="E7E9EB"/>
+                      </a:solidFill>
+                    </a:lnB>
+                  </a:tcPr>
+                </a:tc>
+                <a:tc>
+                  <a:txBody>
+                    <a:bodyPr/>
+                    <a:lstStyle/>
+                    <a:p>
+                      <a:pPr algn="l"/>
+                      <a:r>
+                        <a:rPr sz="1000" b="0">
+                          <a:solidFill>
+                            <a:srgbClr val="30353A"/>
+                          </a:solidFill>
+                          <a:latin typeface="Arial"/>
+                        </a:rPr>
+                        <a:t>10 de 16; a CVM publica apenas o líder</a:t>
+                      </a:r>
+                    </a:p>
+                  </a:txBody>
+                  <a:tcPr marL="54864" marR="54864" marT="18288" marB="18288" anchor="ctr">
+                    <a:solidFill>
+                      <a:srgbClr val="FFFFFF"/>
+                    </a:solidFill>
+                    <a:lnB w="6350" cap="flat">
+                      <a:solidFill>
+                        <a:srgbClr val="E7E9EB"/>
+                      </a:solidFill>
+                    </a:lnB>
+                  </a:tcPr>
+                </a:tc>
+              </a:tr>
+              <a:tr h="292608">
+                <a:tc>
+                  <a:txBody>
+                    <a:bodyPr/>
+                    <a:lstStyle/>
+                    <a:p>
+                      <a:pPr algn="l"/>
+                      <a:r>
+                        <a:rPr sz="1000" b="0">
+                          <a:solidFill>
+                            <a:srgbClr val="30353A"/>
+                          </a:solidFill>
+                          <a:latin typeface="Arial"/>
+                        </a:rPr>
+                        <a:t>Garantia Firme</a:t>
+                      </a:r>
+                    </a:p>
+                  </a:txBody>
+                  <a:tcPr marL="54864" marR="54864" marT="18288" marB="18288" anchor="ctr">
+                    <a:solidFill>
+                      <a:srgbClr val="FFFFFF"/>
+                    </a:solidFill>
+                    <a:lnB w="6350" cap="flat">
+                      <a:solidFill>
+                        <a:srgbClr val="E7E9EB"/>
+                      </a:solidFill>
+                    </a:lnB>
+                  </a:tcPr>
+                </a:tc>
+                <a:tc>
+                  <a:txBody>
+                    <a:bodyPr/>
+                    <a:lstStyle/>
+                    <a:p>
+                      <a:pPr algn="l"/>
+                      <a:r>
+                        <a:rPr sz="1000" b="0">
+                          <a:solidFill>
+                            <a:srgbClr val="30353A"/>
+                          </a:solidFill>
+                          <a:latin typeface="Arial"/>
+                        </a:rPr>
+                        <a:t>CVM, campo Regime_distribuicao da oferta</a:t>
+                      </a:r>
+                    </a:p>
+                  </a:txBody>
+                  <a:tcPr marL="54864" marR="54864" marT="18288" marB="18288" anchor="ctr">
+                    <a:solidFill>
+                      <a:srgbClr val="FFFFFF"/>
+                    </a:solidFill>
+                    <a:lnB w="6350" cap="flat">
+                      <a:solidFill>
+                        <a:srgbClr val="E7E9EB"/>
+                      </a:solidFill>
+                    </a:lnB>
+                  </a:tcPr>
+                </a:tc>
+                <a:tc>
+                  <a:txBody>
+                    <a:bodyPr/>
+                    <a:lstStyle/>
+                    <a:p>
+                      <a:pPr algn="l"/>
+                      <a:r>
+                        <a:rPr sz="1000" b="0">
+                          <a:solidFill>
+                            <a:srgbClr val="30353A"/>
+                          </a:solidFill>
+                          <a:latin typeface="Arial"/>
+                        </a:rPr>
+                        <a:t>10 de 16; sem inferência</a:t>
+                      </a:r>
+                    </a:p>
+                  </a:txBody>
+                  <a:tcPr marL="54864" marR="54864" marT="18288" marB="18288" anchor="ctr">
+                    <a:solidFill>
+                      <a:srgbClr val="FFFFFF"/>
+                    </a:solidFill>
+                    <a:lnB w="6350" cap="flat">
+                      <a:solidFill>
+                        <a:srgbClr val="E7E9EB"/>
+                      </a:solidFill>
+                    </a:lnB>
+                  </a:tcPr>
+                </a:tc>
+              </a:tr>
+              <a:tr h="292608">
+                <a:tc>
+                  <a:txBody>
+                    <a:bodyPr/>
+                    <a:lstStyle/>
+                    <a:p>
+                      <a:pPr algn="l"/>
+                      <a:r>
+                        <a:rPr sz="1000" b="0">
+                          <a:solidFill>
+                            <a:srgbClr val="30353A"/>
+                          </a:solidFill>
+                          <a:latin typeface="Arial"/>
+                        </a:rPr>
+                        <a:t>Bookamos? / Risco IBBA</a:t>
+                      </a:r>
+                    </a:p>
+                  </a:txBody>
+                  <a:tcPr marL="54864" marR="54864" marT="18288" marB="18288" anchor="ctr">
+                    <a:solidFill>
+                      <a:srgbClr val="FFFFFF"/>
+                    </a:solidFill>
+                    <a:lnB w="6350" cap="flat">
+                      <a:solidFill>
+                        <a:srgbClr val="E7E9EB"/>
+                      </a:solidFill>
+                    </a:lnB>
+                  </a:tcPr>
+                </a:tc>
+                <a:tc>
+                  <a:txBody>
+                    <a:bodyPr/>
+                    <a:lstStyle/>
+                    <a:p>
+                      <a:pPr algn="l"/>
+                      <a:r>
+                        <a:rPr sz="1000" b="0">
+                          <a:solidFill>
+                            <a:srgbClr val="30353A"/>
+                          </a:solidFill>
+                          <a:latin typeface="Arial"/>
+                        </a:rPr>
+                        <a:t>—</a:t>
+                      </a:r>
+                    </a:p>
+                  </a:txBody>
+                  <a:tcPr marL="54864" marR="54864" marT="18288" marB="18288" anchor="ctr">
+                    <a:solidFill>
+                      <a:srgbClr val="FFFFFF"/>
+                    </a:solidFill>
+                    <a:lnB w="6350" cap="flat">
+                      <a:solidFill>
+                        <a:srgbClr val="E7E9EB"/>
+                      </a:solidFill>
+                    </a:lnB>
+                  </a:tcPr>
+                </a:tc>
+                <a:tc>
+                  <a:txBody>
+                    <a:bodyPr/>
+                    <a:lstStyle/>
+                    <a:p>
+                      <a:pPr algn="l"/>
+                      <a:r>
+                        <a:rPr sz="1000" b="0">
+                          <a:solidFill>
+                            <a:srgbClr val="30353A"/>
+                          </a:solidFill>
+                          <a:latin typeface="Arial"/>
+                        </a:rPr>
+                        <a:t>Em branco por instrução</a:t>
+                      </a:r>
+                    </a:p>
+                  </a:txBody>
+                  <a:tcPr marL="54864" marR="54864" marT="18288" marB="18288" anchor="ctr">
+                    <a:solidFill>
+                      <a:srgbClr val="FFFFFF"/>
+                    </a:solidFill>
+                    <a:lnB w="6350" cap="flat">
+                      <a:solidFill>
+                        <a:srgbClr val="E7E9EB"/>
+                      </a:solidFill>
+                    </a:lnB>
+                  </a:tcPr>
+                </a:tc>
+              </a:tr>
+            </a:tbl>
+          </a:graphicData>
+        </a:graphic>
+      </p:graphicFrame>
+      <p:sp>
+        <p:nvSpPr>
+          <p:cNvPr id="6" name="TextBox 5"/>
+          <p:cNvSpPr txBox="1"/>
+          <p:nvPr/>
+        </p:nvSpPr>
+        <p:spPr>
+          <a:xfrm>
+            <a:off x="566928" y="3840480"/>
+            <a:ext cx="2743200" cy="237744"/>
+          </a:xfrm>
+          <a:prstGeom prst="rect">
+            <a:avLst/>
+          </a:prstGeom>
+          <a:noFill/>
+        </p:spPr>
+        <p:txBody>
+          <a:bodyPr wrap="square" anchor="t" lIns="0" rIns="0" tIns="0" bIns="0">
+            <a:spAutoFit/>
+          </a:bodyPr>
+          <a:lstStyle/>
+          <a:p>
+            <a:pPr algn="l">
+              <a:defRPr sz="1000" b="1">
+                <a:solidFill>
+                  <a:srgbClr val="E36C0A"/>
+                </a:solidFill>
+                <a:latin typeface="Arial"/>
+              </a:defRPr>
+            </a:pPr>
+            <a:r>
+              <a:t>Oferta de referência</a:t>
+            </a:r>
+          </a:p>
+        </p:txBody>
+      </p:sp>
+      <p:sp>
+        <p:nvSpPr>
+          <p:cNvPr id="7" name="TextBox 6"/>
+          <p:cNvSpPr txBox="1"/>
+          <p:nvPr/>
+        </p:nvSpPr>
+        <p:spPr>
+          <a:xfrm>
+            <a:off x="3493008" y="3840480"/>
+            <a:ext cx="8092440" cy="530352"/>
+          </a:xfrm>
+          <a:prstGeom prst="rect">
+            <a:avLst/>
+          </a:prstGeom>
+          <a:noFill/>
+        </p:spPr>
+        <p:txBody>
+          <a:bodyPr wrap="square" anchor="t" lIns="0" rIns="0" tIns="0" bIns="0">
+            <a:spAutoFit/>
+          </a:bodyPr>
+          <a:lstStyle/>
+          <a:p>
+            <a:pPr algn="l">
+              <a:defRPr sz="950" b="0">
+                <a:solidFill>
+                  <a:srgbClr val="5D6369"/>
+                </a:solidFill>
+                <a:latin typeface="Arial"/>
+              </a:defRPr>
+            </a:pPr>
+            <a:r>
+              <a:t>Quando o fundo tem oferta encerrada no 1S26, ela é a referência (4 fundos). Sem oferta no semestre, usa-se a mais recente encerrada, e a data consta no CSV resolvido. As demais colunas vêm sempre da mesma oferta.</a:t>
+            </a:r>
+          </a:p>
+        </p:txBody>
+      </p:sp>
+      <p:sp>
+        <p:nvSpPr>
+          <p:cNvPr id="8" name="TextBox 7"/>
+          <p:cNvSpPr txBox="1"/>
+          <p:nvPr/>
+        </p:nvSpPr>
+        <p:spPr>
+          <a:xfrm>
+            <a:off x="566928" y="4425696"/>
+            <a:ext cx="2743200" cy="237744"/>
+          </a:xfrm>
+          <a:prstGeom prst="rect">
+            <a:avLst/>
+          </a:prstGeom>
+          <a:noFill/>
+        </p:spPr>
+        <p:txBody>
+          <a:bodyPr wrap="square" anchor="t" lIns="0" rIns="0" tIns="0" bIns="0">
+            <a:spAutoFit/>
+          </a:bodyPr>
+          <a:lstStyle/>
+          <a:p>
+            <a:pPr algn="l">
+              <a:defRPr sz="1000" b="1">
+                <a:solidFill>
+                  <a:srgbClr val="E36C0A"/>
+                </a:solidFill>
+                <a:latin typeface="Arial"/>
+              </a:defRPr>
+            </a:pPr>
+            <a:r>
+              <a:t>Por que o Originador ficou aberto</a:t>
+            </a:r>
+          </a:p>
+        </p:txBody>
+      </p:sp>
+      <p:sp>
+        <p:nvSpPr>
+          <p:cNvPr id="9" name="TextBox 8"/>
+          <p:cNvSpPr txBox="1"/>
+          <p:nvPr/>
+        </p:nvSpPr>
+        <p:spPr>
+          <a:xfrm>
+            <a:off x="3493008" y="4425696"/>
+            <a:ext cx="8092440" cy="530352"/>
+          </a:xfrm>
+          <a:prstGeom prst="rect">
+            <a:avLst/>
+          </a:prstGeom>
+          <a:noFill/>
+        </p:spPr>
+        <p:txBody>
+          <a:bodyPr wrap="square" anchor="t" lIns="0" rIns="0" tIns="0" bIns="0">
+            <a:spAutoFit/>
+          </a:bodyPr>
+          <a:lstStyle/>
+          <a:p>
+            <a:pPr algn="l">
+              <a:defRPr sz="950" b="0">
+                <a:solidFill>
+                  <a:srgbClr val="5D6369"/>
+                </a:solidFill>
+                <a:latin typeface="Arial"/>
+              </a:defRPr>
+            </a:pPr>
+            <a:r>
+              <a:t>Nem o arquivo de ofertas da CVM nem o cadastro ANBIMA declaram o originador dos direitos creditórios. Os campos Descricao_lastro e Identificacao_devedores_coobrigados estão vazios em todas as 54 ofertas destes fundos. Fechar a coluna exige o regulamento vigente e os documentos da oferta no FundosNet, fundo a fundo.</a:t>
+            </a:r>
+          </a:p>
+        </p:txBody>
+      </p:sp>
+      <p:sp>
+        <p:nvSpPr>
+          <p:cNvPr id="10" name="TextBox 9"/>
+          <p:cNvSpPr txBox="1"/>
+          <p:nvPr/>
+        </p:nvSpPr>
+        <p:spPr>
+          <a:xfrm>
+            <a:off x="566928" y="5010912"/>
+            <a:ext cx="2743200" cy="237744"/>
+          </a:xfrm>
+          <a:prstGeom prst="rect">
+            <a:avLst/>
+          </a:prstGeom>
+          <a:noFill/>
+        </p:spPr>
+        <p:txBody>
+          <a:bodyPr wrap="square" anchor="t" lIns="0" rIns="0" tIns="0" bIns="0">
+            <a:spAutoFit/>
+          </a:bodyPr>
+          <a:lstStyle/>
+          <a:p>
+            <a:pPr algn="l">
+              <a:defRPr sz="1000" b="1">
+                <a:solidFill>
+                  <a:srgbClr val="E36C0A"/>
+                </a:solidFill>
+                <a:latin typeface="Arial"/>
+              </a:defRPr>
+            </a:pPr>
+            <a:r>
+              <a:t>Fundos sem oferta registrada</a:t>
+            </a:r>
+          </a:p>
+        </p:txBody>
+      </p:sp>
+      <p:sp>
+        <p:nvSpPr>
+          <p:cNvPr id="11" name="TextBox 10"/>
+          <p:cNvSpPr txBox="1"/>
+          <p:nvPr/>
+        </p:nvSpPr>
+        <p:spPr>
+          <a:xfrm>
+            <a:off x="3493008" y="5010912"/>
+            <a:ext cx="8092440" cy="530352"/>
+          </a:xfrm>
+          <a:prstGeom prst="rect">
+            <a:avLst/>
+          </a:prstGeom>
+          <a:noFill/>
+        </p:spPr>
+        <p:txBody>
+          <a:bodyPr wrap="square" anchor="t" lIns="0" rIns="0" tIns="0" bIns="0">
+            <a:spAutoFit/>
+          </a:bodyPr>
+          <a:lstStyle/>
+          <a:p>
+            <a:pPr algn="l">
+              <a:defRPr sz="950" b="0">
+                <a:solidFill>
+                  <a:srgbClr val="5D6369"/>
+                </a:solidFill>
+                <a:latin typeface="Arial"/>
+              </a:defRPr>
+            </a:pPr>
+            <a:r>
+              <a:t>Ordens 4, 6, 7, 9, 10, 13 não têm oferta pública primária encerrada na base da CVM. O volume cedido informado na planilha de entrada não é tamanho de emissão e não foi usado nessa coluna.</a:t>
+            </a:r>
+          </a:p>
+        </p:txBody>
+      </p:sp>
+      <p:sp>
+        <p:nvSpPr>
+          <p:cNvPr id="12" name="TextBox 11"/>
+          <p:cNvSpPr txBox="1"/>
+          <p:nvPr/>
+        </p:nvSpPr>
+        <p:spPr>
+          <a:xfrm>
+            <a:off x="566928" y="5596127"/>
+            <a:ext cx="2743200" cy="237744"/>
+          </a:xfrm>
+          <a:prstGeom prst="rect">
+            <a:avLst/>
+          </a:prstGeom>
+          <a:noFill/>
+        </p:spPr>
+        <p:txBody>
+          <a:bodyPr wrap="square" anchor="t" lIns="0" rIns="0" tIns="0" bIns="0">
+            <a:spAutoFit/>
+          </a:bodyPr>
+          <a:lstStyle/>
+          <a:p>
+            <a:pPr algn="l">
+              <a:defRPr sz="1000" b="1">
+                <a:solidFill>
+                  <a:srgbClr val="E36C0A"/>
+                </a:solidFill>
+                <a:latin typeface="Arial"/>
+              </a:defRPr>
+            </a:pPr>
+            <a:r>
+              <a:t>Ranking ANBIMA</a:t>
+            </a:r>
+          </a:p>
+        </p:txBody>
+      </p:sp>
+      <p:sp>
+        <p:nvSpPr>
+          <p:cNvPr id="13" name="TextBox 12"/>
+          <p:cNvSpPr txBox="1"/>
+          <p:nvPr/>
+        </p:nvSpPr>
+        <p:spPr>
+          <a:xfrm>
+            <a:off x="3493008" y="5596127"/>
+            <a:ext cx="8092440" cy="530352"/>
+          </a:xfrm>
+          <a:prstGeom prst="rect">
+            <a:avLst/>
+          </a:prstGeom>
+          <a:noFill/>
+        </p:spPr>
+        <p:txBody>
+          <a:bodyPr wrap="square" anchor="t" lIns="0" rIns="0" tIns="0" bIns="0">
+            <a:spAutoFit/>
+          </a:bodyPr>
+          <a:lstStyle/>
+          <a:p>
+            <a:pPr algn="l">
+              <a:defRPr sz="950" b="0">
+                <a:solidFill>
+                  <a:srgbClr val="5D6369"/>
+                </a:solidFill>
+                <a:latin typeface="Arial"/>
+              </a:defRPr>
+            </a:pPr>
+            <a:r>
+              <a:t>Apenas o LF III aparece no anexo do ranking ANBIMA de junho/2026, coordenado pelo UBS BB. Os demais 15 não entram no ranking, que é declaratório.</a:t>
+            </a:r>
+          </a:p>
+        </p:txBody>
+      </p:sp>
+      <p:sp>
+        <p:nvSpPr>
+          <p:cNvPr id="14" name="Rectangle 13"/>
+          <p:cNvSpPr/>
+          <p:nvPr/>
+        </p:nvSpPr>
+        <p:spPr>
+          <a:xfrm>
+            <a:off x="566928" y="6355080"/>
+            <a:ext cx="11018520" cy="9144"/>
+          </a:xfrm>
+          <a:prstGeom prst="rect">
+            <a:avLst/>
+          </a:prstGeom>
+          <a:solidFill>
+            <a:srgbClr val="E7E9EB"/>
+          </a:solidFill>
+          <a:ln>
+            <a:noFill/>
+          </a:ln>
+        </p:spPr>
+        <p:style>
+          <a:lnRef idx="1">
+            <a:schemeClr val="accent1"/>
+          </a:lnRef>
+          <a:fillRef idx="3">
+            <a:schemeClr val="accent1"/>
+          </a:fillRef>
+          <a:effectRef idx="2">
+            <a:schemeClr val="accent1"/>
+          </a:effectRef>
+          <a:fontRef idx="minor">
+            <a:schemeClr val="lt1"/>
+          </a:fontRef>
+        </p:style>
+        <p:txBody>
+          <a:bodyPr rtlCol="0" anchor="ctr"/>
+          <a:lstStyle/>
+          <a:p>
+            <a:pPr algn="ctr"/>
+          </a:p>
+        </p:txBody>
+      </p:sp>
+      <p:sp>
+        <p:nvSpPr>
+          <p:cNvPr id="15" name="TextBox 14"/>
+          <p:cNvSpPr txBox="1"/>
+          <p:nvPr/>
+        </p:nvSpPr>
+        <p:spPr>
+          <a:xfrm>
+            <a:off x="566928" y="6419088"/>
+            <a:ext cx="10469880" cy="274320"/>
+          </a:xfrm>
+          <a:prstGeom prst="rect">
+            <a:avLst/>
+          </a:prstGeom>
+          <a:noFill/>
+        </p:spPr>
+        <p:txBody>
+          <a:bodyPr wrap="square" anchor="t" lIns="0" rIns="0" tIns="0" bIns="0">
+            <a:spAutoFit/>
+          </a:bodyPr>
+          <a:lstStyle/>
+          <a:p>
+            <a:pPr algn="l">
+              <a:defRPr sz="800" b="0">
+                <a:solidFill>
+                  <a:srgbClr val="8D9399"/>
+                </a:solidFill>
+                <a:latin typeface="Arial"/>
+              </a:defRPr>
+            </a:pPr>
+            <a:r>
+              <a:t>Fontes consultadas: CVM Ofertas Públicas de Distribuição · ANBIMA Fundos 175 características público · ANBIMA Anexo ao Ranking de Renda Fixa e Híbridos</a:t>
+            </a:r>
+          </a:p>
+        </p:txBody>
+      </p:sp>
+      <p:sp>
+        <p:nvSpPr>
+          <p:cNvPr id="16" name="TextBox 15"/>
+          <p:cNvSpPr txBox="1"/>
+          <p:nvPr/>
+        </p:nvSpPr>
+        <p:spPr>
+          <a:xfrm>
+            <a:off x="11201400" y="6409944"/>
+            <a:ext cx="384048" cy="201168"/>
+          </a:xfrm>
+          <a:prstGeom prst="rect">
+            <a:avLst/>
+          </a:prstGeom>
+          <a:noFill/>
+        </p:spPr>
+        <p:txBody>
+          <a:bodyPr wrap="square" anchor="t" lIns="0" rIns="0" tIns="0" bIns="0">
+            <a:spAutoFit/>
+          </a:bodyPr>
+          <a:lstStyle/>
+          <a:p>
+            <a:pPr algn="r">
+              <a:defRPr sz="800" b="0">
+                <a:solidFill>
+                  <a:srgbClr val="8D9399"/>
+                </a:solidFill>
+                <a:latin typeface="Arial"/>
+              </a:defRPr>
+            </a:pPr>
+            <a:r>
+              <a:t>10</a:t>
+            </a:r>
+          </a:p>
+        </p:txBody>
+      </p:sp>
+    </p:spTree>
+  </p:cSld>
+  <p:clrMapOvr>
+    <a:masterClrMapping/>
+  </p:clrMapOvr>
+</p:sld>
+</file>
+
+<file path=ppt/slides/slide12.xml><?xml version="1.0" encoding="utf-8"?>
+<p:sld xmlns:a="http://schemas.openxmlformats.org/drawingml/2006/main" xmlns:p="http://schemas.openxmlformats.org/presentationml/2006/main" xmlns:r="http://schemas.openxmlformats.org/officeDocument/2006/relationships">
+  <p:cSld>
+    <p:bg>
+      <p:bgPr>
+        <a:solidFill>
+          <a:srgbClr val="FFFFFF"/>
+        </a:solidFill>
+        <a:effectLst/>
+      </p:bgPr>
+    </p:bg>
+    <p:spTree>
+      <p:nvGrpSpPr>
+        <p:cNvPr id="1" name=""/>
+        <p:cNvGrpSpPr/>
+        <p:nvPr/>
+      </p:nvGrpSpPr>
+      <p:grpSpPr/>
+      <p:sp>
+        <p:nvSpPr>
+          <p:cNvPr id="2" name="TextBox 1"/>
+          <p:cNvSpPr txBox="1"/>
+          <p:nvPr/>
+        </p:nvSpPr>
+        <p:spPr>
+          <a:xfrm>
+            <a:off x="566928" y="256032"/>
+            <a:ext cx="7315200" cy="201168"/>
+          </a:xfrm>
+          <a:prstGeom prst="rect">
+            <a:avLst/>
+          </a:prstGeom>
+          <a:noFill/>
+        </p:spPr>
+        <p:txBody>
+          <a:bodyPr wrap="square" anchor="t" lIns="0" rIns="0" tIns="0" bIns="0">
+            <a:spAutoFit/>
+          </a:bodyPr>
+          <a:lstStyle/>
+          <a:p>
+            <a:pPr algn="l">
+              <a:defRPr sz="1000" b="1">
+                <a:solidFill>
+                  <a:srgbClr val="E36C0A"/>
+                </a:solidFill>
+                <a:latin typeface="Arial"/>
+              </a:defRPr>
+            </a:pPr>
+            <a:r>
+              <a:t>RANKING ANBIMA · JUNHO/2026</a:t>
+            </a:r>
+          </a:p>
+        </p:txBody>
+      </p:sp>
+      <p:sp>
+        <p:nvSpPr>
+          <p:cNvPr id="3" name="TextBox 2"/>
+          <p:cNvSpPr txBox="1"/>
+          <p:nvPr/>
+        </p:nvSpPr>
+        <p:spPr>
+          <a:xfrm>
+            <a:off x="566928" y="521207"/>
+            <a:ext cx="11064240" cy="438912"/>
+          </a:xfrm>
+          <a:prstGeom prst="rect">
+            <a:avLst/>
+          </a:prstGeom>
+          <a:noFill/>
+        </p:spPr>
+        <p:txBody>
+          <a:bodyPr wrap="square" anchor="t" lIns="0" rIns="0" tIns="0" bIns="0">
+            <a:spAutoFit/>
+          </a:bodyPr>
+          <a:lstStyle/>
+          <a:p>
+            <a:pPr algn="l">
+              <a:defRPr sz="2200" b="1">
+                <a:solidFill>
+                  <a:srgbClr val="151515"/>
+                </a:solidFill>
+                <a:latin typeface="Arial"/>
+              </a:defRPr>
+            </a:pPr>
+            <a:r>
               <a:t>Como interpretar o ranking ANBIMA</a:t>
             </a:r>
           </a:p>
@@ -5528,7 +12545,7 @@
               </a:defRPr>
             </a:pPr>
             <a:r>
-              <a:t>9</a:t>
+              <a:t>11</a:t>
             </a:r>
           </a:p>
         </p:txBody>
@@ -5541,7 +12558,7 @@
 </p:sld>
 </file>
 
-<file path=ppt/slides/slide11.xml><?xml version="1.0" encoding="utf-8"?>
+<file path=ppt/slides/slide13.xml><?xml version="1.0" encoding="utf-8"?>
 <p:sld xmlns:a="http://schemas.openxmlformats.org/drawingml/2006/main" xmlns:p="http://schemas.openxmlformats.org/presentationml/2006/main" xmlns:r="http://schemas.openxmlformats.org/officeDocument/2006/relationships">
   <p:cSld>
     <p:bg>
@@ -6252,7 +13269,7 @@
               </a:defRPr>
             </a:pPr>
             <a:r>
-              <a:t>10</a:t>
+              <a:t>12</a:t>
             </a:r>
           </a:p>
         </p:txBody>

--- a/outputs/anbima_executivo_1s26/ANBIMA_Itau_BBA_Renda_Fixa_1S26.pptx
+++ b/outputs/anbima_executivo_1s26/ANBIMA_Itau_BBA_Renda_Fixa_1S26.pptx
@@ -5840,7 +5840,7 @@
                           </a:solidFill>
                           <a:latin typeface="Arial"/>
                         </a:rPr>
-                        <a:t>n/d</a:t>
+                        <a:t>0,10</a:t>
                       </a:r>
                     </a:p>
                   </a:txBody>
@@ -6404,7 +6404,7 @@
                           </a:solidFill>
                           <a:latin typeface="Arial"/>
                         </a:rPr>
-                        <a:t>n/d</a:t>
+                        <a:t>0,05</a:t>
                       </a:r>
                     </a:p>
                   </a:txBody>
@@ -6432,7 +6432,7 @@
                           </a:solidFill>
                           <a:latin typeface="Arial"/>
                         </a:rPr>
-                        <a:t>Não identificado</a:t>
+                        <a:t>Não – Finaxis</a:t>
                       </a:r>
                     </a:p>
                   </a:txBody>
@@ -9506,7 +9506,7 @@
                           </a:solidFill>
                           <a:latin typeface="Arial"/>
                         </a:rPr>
-                        <a:t>2,87</a:t>
+                        <a:t>3,01</a:t>
                       </a:r>
                     </a:p>
                   </a:txBody>
@@ -9987,7 +9987,7 @@
               </a:defRPr>
             </a:pPr>
             <a:r>
-              <a:t>Subtotal em R$ bi soma as ofertas de referência mostradas; o percentual usa apenas as encerradas no 1S26, sobre o universo CVM de cotas de FIDC do semestre (R$ 65,5 bi). Bookamos? e Risco IBBA em branco por instrução. 6 fundos não têm oferta pública encerrada registrada na CVM e aparecem como n/d em R$ bi e “Não identificado” nas colunas dependentes da oferta.</a:t>
+              <a:t>Subtotal em R$ bi soma as ofertas de referência mostradas; o percentual usa apenas as encerradas no 1S26, sobre o universo CVM de cotas de FIDC do semestre (R$ 65,5 bi). Bookamos? e Risco IBBA em branco por instrução. 4 fundos não têm oferta pública encerrada registrada na CVM e aparecem como n/d em R$ bi e “Não identificado” nas colunas dependentes da oferta.</a:t>
             </a:r>
           </a:p>
         </p:txBody>
@@ -10066,7 +10066,7 @@
               </a:defRPr>
             </a:pPr>
             <a:r>
-              <a:t>Fonte: CVM, Oferta Pública de Distribuição (RCVM 160), cotas de FIDC, primária, status Oferta Encerrada · ANBIMA, Fundos 175 características público</a:t>
+              <a:t>Fonte: CVM, Oferta Pública de Distribuição — RCVM 160 e legado ICVM 400/476, primária, encerrada · ANBIMA, Fundos 175 características público</a:t>
             </a:r>
           </a:p>
         </p:txBody>
@@ -10258,7 +10258,7 @@
         </p:nvGraphicFramePr>
         <p:xfrm>
           <a:off x="566928" y="1298448"/>
-          <a:ext cx="11018520" cy="2340864"/>
+          <a:ext cx="11018520" cy="2212848"/>
         </p:xfrm>
         <a:graphic>
           <a:graphicData uri="http://schemas.openxmlformats.org/drawingml/2006/table">
@@ -10357,7 +10357,7 @@
                   </a:tcPr>
                 </a:tc>
               </a:tr>
-              <a:tr h="292608">
+              <a:tr h="274320">
                 <a:tc>
                   <a:txBody>
                     <a:bodyPr/>
@@ -10443,7 +10443,7 @@
                   </a:tcPr>
                 </a:tc>
               </a:tr>
-              <a:tr h="292608">
+              <a:tr h="274320">
                 <a:tc>
                   <a:txBody>
                     <a:bodyPr/>
@@ -10529,7 +10529,7 @@
                   </a:tcPr>
                 </a:tc>
               </a:tr>
-              <a:tr h="292608">
+              <a:tr h="274320">
                 <a:tc>
                   <a:txBody>
                     <a:bodyPr/>
@@ -10615,7 +10615,7 @@
                   </a:tcPr>
                 </a:tc>
               </a:tr>
-              <a:tr h="292608">
+              <a:tr h="274320">
                 <a:tc>
                   <a:txBody>
                     <a:bodyPr/>
@@ -10657,35 +10657,35 @@
                           </a:solidFill>
                           <a:latin typeface="Arial"/>
                         </a:rPr>
-                        <a:t>CVM, valor total registrado da oferta</a:t>
-                      </a:r>
-                    </a:p>
-                  </a:txBody>
-                  <a:tcPr marL="54864" marR="54864" marT="18288" marB="18288" anchor="ctr">
-                    <a:solidFill>
-                      <a:srgbClr val="FFFFFF"/>
-                    </a:solidFill>
-                    <a:lnB w="6350" cap="flat">
-                      <a:solidFill>
-                        <a:srgbClr val="E7E9EB"/>
-                      </a:solidFill>
-                    </a:lnB>
-                  </a:tcPr>
-                </a:tc>
-                <a:tc>
-                  <a:txBody>
-                    <a:bodyPr/>
-                    <a:lstStyle/>
-                    <a:p>
-                      <a:pPr algn="l"/>
-                      <a:r>
-                        <a:rPr sz="1000" b="0">
-                          <a:solidFill>
-                            <a:srgbClr val="30353A"/>
-                          </a:solidFill>
-                          <a:latin typeface="Arial"/>
-                        </a:rPr>
-                        <a:t>10 de 16 com oferta encerrada identificada</a:t>
+                        <a:t>CVM, ofertas RCVM 160 e legado ICVM 400/476</a:t>
+                      </a:r>
+                    </a:p>
+                  </a:txBody>
+                  <a:tcPr marL="54864" marR="54864" marT="18288" marB="18288" anchor="ctr">
+                    <a:solidFill>
+                      <a:srgbClr val="FFFFFF"/>
+                    </a:solidFill>
+                    <a:lnB w="6350" cap="flat">
+                      <a:solidFill>
+                        <a:srgbClr val="E7E9EB"/>
+                      </a:solidFill>
+                    </a:lnB>
+                  </a:tcPr>
+                </a:tc>
+                <a:tc>
+                  <a:txBody>
+                    <a:bodyPr/>
+                    <a:lstStyle/>
+                    <a:p>
+                      <a:pPr algn="l"/>
+                      <a:r>
+                        <a:rPr sz="1000" b="0">
+                          <a:solidFill>
+                            <a:srgbClr val="30353A"/>
+                          </a:solidFill>
+                          <a:latin typeface="Arial"/>
+                        </a:rPr>
+                        <a:t>12 de 16 com oferta encerrada identificada</a:t>
                       </a:r>
                     </a:p>
                   </a:txBody>
@@ -10701,7 +10701,7 @@
                   </a:tcPr>
                 </a:tc>
               </a:tr>
-              <a:tr h="292608">
+              <a:tr h="274320">
                 <a:tc>
                   <a:txBody>
                     <a:bodyPr/>
@@ -10771,7 +10771,7 @@
                           </a:solidFill>
                           <a:latin typeface="Arial"/>
                         </a:rPr>
-                        <a:t>10 de 16; a CVM publica apenas o líder</a:t>
+                        <a:t>12 de 16; a CVM publica apenas o líder</a:t>
                       </a:r>
                     </a:p>
                   </a:txBody>
@@ -10787,7 +10787,7 @@
                   </a:tcPr>
                 </a:tc>
               </a:tr>
-              <a:tr h="292608">
+              <a:tr h="274320">
                 <a:tc>
                   <a:txBody>
                     <a:bodyPr/>
@@ -10829,35 +10829,35 @@
                           </a:solidFill>
                           <a:latin typeface="Arial"/>
                         </a:rPr>
-                        <a:t>CVM, campo Regime_distribuicao da oferta</a:t>
-                      </a:r>
-                    </a:p>
-                  </a:txBody>
-                  <a:tcPr marL="54864" marR="54864" marT="18288" marB="18288" anchor="ctr">
-                    <a:solidFill>
-                      <a:srgbClr val="FFFFFF"/>
-                    </a:solidFill>
-                    <a:lnB w="6350" cap="flat">
-                      <a:solidFill>
-                        <a:srgbClr val="E7E9EB"/>
-                      </a:solidFill>
-                    </a:lnB>
-                  </a:tcPr>
-                </a:tc>
-                <a:tc>
-                  <a:txBody>
-                    <a:bodyPr/>
-                    <a:lstStyle/>
-                    <a:p>
-                      <a:pPr algn="l"/>
-                      <a:r>
-                        <a:rPr sz="1000" b="0">
-                          <a:solidFill>
-                            <a:srgbClr val="30353A"/>
-                          </a:solidFill>
-                          <a:latin typeface="Arial"/>
-                        </a:rPr>
-                        <a:t>10 de 16; sem inferência</a:t>
+                        <a:t>CVM, campo Regime_distribuicao (só RCVM 160)</a:t>
+                      </a:r>
+                    </a:p>
+                  </a:txBody>
+                  <a:tcPr marL="54864" marR="54864" marT="18288" marB="18288" anchor="ctr">
+                    <a:solidFill>
+                      <a:srgbClr val="FFFFFF"/>
+                    </a:solidFill>
+                    <a:lnB w="6350" cap="flat">
+                      <a:solidFill>
+                        <a:srgbClr val="E7E9EB"/>
+                      </a:solidFill>
+                    </a:lnB>
+                  </a:tcPr>
+                </a:tc>
+                <a:tc>
+                  <a:txBody>
+                    <a:bodyPr/>
+                    <a:lstStyle/>
+                    <a:p>
+                      <a:pPr algn="l"/>
+                      <a:r>
+                        <a:rPr sz="1000" b="0">
+                          <a:solidFill>
+                            <a:srgbClr val="30353A"/>
+                          </a:solidFill>
+                          <a:latin typeface="Arial"/>
+                        </a:rPr>
+                        <a:t>10 de 16; o legado não traz o campo</a:t>
                       </a:r>
                     </a:p>
                   </a:txBody>
@@ -10873,7 +10873,7 @@
                   </a:tcPr>
                 </a:tc>
               </a:tr>
-              <a:tr h="292608">
+              <a:tr h="274320">
                 <a:tc>
                   <a:txBody>
                     <a:bodyPr/>
@@ -10971,8 +10971,8 @@
         </p:nvSpPr>
         <p:spPr>
           <a:xfrm>
-            <a:off x="566928" y="3840480"/>
-            <a:ext cx="2743200" cy="237744"/>
+            <a:off x="566928" y="3675887"/>
+            <a:ext cx="2743200" cy="219456"/>
           </a:xfrm>
           <a:prstGeom prst="rect">
             <a:avLst/>
@@ -10986,7 +10986,7 @@
           <a:lstStyle/>
           <a:p>
             <a:pPr algn="l">
-              <a:defRPr sz="1000" b="1">
+              <a:defRPr sz="950" b="1">
                 <a:solidFill>
                   <a:srgbClr val="E36C0A"/>
                 </a:solidFill>
@@ -11007,8 +11007,8 @@
         </p:nvSpPr>
         <p:spPr>
           <a:xfrm>
-            <a:off x="3493008" y="3840480"/>
-            <a:ext cx="8092440" cy="530352"/>
+            <a:off x="3493008" y="3675887"/>
+            <a:ext cx="8092440" cy="475488"/>
           </a:xfrm>
           <a:prstGeom prst="rect">
             <a:avLst/>
@@ -11022,7 +11022,7 @@
           <a:lstStyle/>
           <a:p>
             <a:pPr algn="l">
-              <a:defRPr sz="950" b="0">
+              <a:defRPr sz="900" b="0">
                 <a:solidFill>
                   <a:srgbClr val="5D6369"/>
                 </a:solidFill>
@@ -11043,8 +11043,8 @@
         </p:nvSpPr>
         <p:spPr>
           <a:xfrm>
-            <a:off x="566928" y="4425696"/>
-            <a:ext cx="2743200" cy="237744"/>
+            <a:off x="566928" y="4187952"/>
+            <a:ext cx="2743200" cy="219456"/>
           </a:xfrm>
           <a:prstGeom prst="rect">
             <a:avLst/>
@@ -11058,7 +11058,7 @@
           <a:lstStyle/>
           <a:p>
             <a:pPr algn="l">
-              <a:defRPr sz="1000" b="1">
+              <a:defRPr sz="950" b="1">
                 <a:solidFill>
                   <a:srgbClr val="E36C0A"/>
                 </a:solidFill>
@@ -11079,8 +11079,8 @@
         </p:nvSpPr>
         <p:spPr>
           <a:xfrm>
-            <a:off x="3493008" y="4425696"/>
-            <a:ext cx="8092440" cy="530352"/>
+            <a:off x="3493008" y="4187952"/>
+            <a:ext cx="8092440" cy="475488"/>
           </a:xfrm>
           <a:prstGeom prst="rect">
             <a:avLst/>
@@ -11094,7 +11094,7 @@
           <a:lstStyle/>
           <a:p>
             <a:pPr algn="l">
-              <a:defRPr sz="950" b="0">
+              <a:defRPr sz="900" b="0">
                 <a:solidFill>
                   <a:srgbClr val="5D6369"/>
                 </a:solidFill>
@@ -11102,7 +11102,7 @@
               </a:defRPr>
             </a:pPr>
             <a:r>
-              <a:t>Nem o arquivo de ofertas da CVM nem o cadastro ANBIMA declaram o originador dos direitos creditórios. Os campos Descricao_lastro e Identificacao_devedores_coobrigados estão vazios em todas as 54 ofertas destes fundos. Fechar a coluna exige o regulamento vigente e os documentos da oferta no FundosNet, fundo a fundo.</a:t>
+              <a:t>Nem o arquivo de ofertas da CVM nem o cadastro ANBIMA declaram o originador dos direitos creditórios. Os campos Descricao_lastro e Identificacao_devedores_coobrigados estão vazios nas 64 ofertas encerradas destes fundos. Fechar a coluna exige o regulamento vigente e os documentos da oferta no FundosNet, fundo a fundo.</a:t>
             </a:r>
           </a:p>
         </p:txBody>
@@ -11115,8 +11115,8 @@
         </p:nvSpPr>
         <p:spPr>
           <a:xfrm>
-            <a:off x="566928" y="5010912"/>
-            <a:ext cx="2743200" cy="237744"/>
+            <a:off x="566928" y="4700016"/>
+            <a:ext cx="2743200" cy="219456"/>
           </a:xfrm>
           <a:prstGeom prst="rect">
             <a:avLst/>
@@ -11130,7 +11130,7 @@
           <a:lstStyle/>
           <a:p>
             <a:pPr algn="l">
-              <a:defRPr sz="1000" b="1">
+              <a:defRPr sz="950" b="1">
                 <a:solidFill>
                   <a:srgbClr val="E36C0A"/>
                 </a:solidFill>
@@ -11138,7 +11138,7 @@
               </a:defRPr>
             </a:pPr>
             <a:r>
-              <a:t>Fundos sem oferta registrada</a:t>
+              <a:t>Ritos consultados</a:t>
             </a:r>
           </a:p>
         </p:txBody>
@@ -11151,8 +11151,8 @@
         </p:nvSpPr>
         <p:spPr>
           <a:xfrm>
-            <a:off x="3493008" y="5010912"/>
-            <a:ext cx="8092440" cy="530352"/>
+            <a:off x="3493008" y="4700016"/>
+            <a:ext cx="8092440" cy="475488"/>
           </a:xfrm>
           <a:prstGeom prst="rect">
             <a:avLst/>
@@ -11166,7 +11166,7 @@
           <a:lstStyle/>
           <a:p>
             <a:pPr algn="l">
-              <a:defRPr sz="950" b="0">
+              <a:defRPr sz="900" b="0">
                 <a:solidFill>
                   <a:srgbClr val="5D6369"/>
                 </a:solidFill>
@@ -11174,7 +11174,7 @@
               </a:defRPr>
             </a:pPr>
             <a:r>
-              <a:t>Ordens 4, 6, 7, 9, 10, 13 não têm oferta pública primária encerrada na base da CVM. O volume cedido informado na planilha de entrada não é tamanho de emissão e não foi usado nessa coluna.</a:t>
+              <a:t>Foram lidos os dois arquivos da CVM: o de ofertas automáticas RCVM 160 e o legado, com ICVM 400 e ICVM 476. As ICVM 476 são ofertas com esforços restritos e chegam rotuladas como “Cotas de fundos de investimento fechados”, sem indicar o tipo do fundo; entram aqui porque o CNPJ emissor já é um FIDC conhecido. Ordens 7, 9, 10, 13 seguem sem oferta encerrada em qualquer rito.</a:t>
             </a:r>
           </a:p>
         </p:txBody>
@@ -11187,8 +11187,8 @@
         </p:nvSpPr>
         <p:spPr>
           <a:xfrm>
-            <a:off x="566928" y="5596127"/>
-            <a:ext cx="2743200" cy="237744"/>
+            <a:off x="566928" y="5212080"/>
+            <a:ext cx="2743200" cy="219456"/>
           </a:xfrm>
           <a:prstGeom prst="rect">
             <a:avLst/>
@@ -11202,7 +11202,79 @@
           <a:lstStyle/>
           <a:p>
             <a:pPr algn="l">
-              <a:defRPr sz="1000" b="1">
+              <a:defRPr sz="950" b="1">
+                <a:solidFill>
+                  <a:srgbClr val="E36C0A"/>
+                </a:solidFill>
+                <a:latin typeface="Arial"/>
+              </a:defRPr>
+            </a:pPr>
+            <a:r>
+              <a:t>Itaú BBA em ofertas anteriores</a:t>
+            </a:r>
+          </a:p>
+        </p:txBody>
+      </p:sp>
+      <p:sp>
+        <p:nvSpPr>
+          <p:cNvPr id="13" name="TextBox 12"/>
+          <p:cNvSpPr txBox="1"/>
+          <p:nvPr/>
+        </p:nvSpPr>
+        <p:spPr>
+          <a:xfrm>
+            <a:off x="3493008" y="5212080"/>
+            <a:ext cx="8092440" cy="475488"/>
+          </a:xfrm>
+          <a:prstGeom prst="rect">
+            <a:avLst/>
+          </a:prstGeom>
+          <a:noFill/>
+        </p:spPr>
+        <p:txBody>
+          <a:bodyPr wrap="square" anchor="t" lIns="0" rIns="0" tIns="0" bIns="0">
+            <a:spAutoFit/>
+          </a:bodyPr>
+          <a:lstStyle/>
+          <a:p>
+            <a:pPr algn="l">
+              <a:defRPr sz="900" b="0">
+                <a:solidFill>
+                  <a:srgbClr val="5D6369"/>
+                </a:solidFill>
+                <a:latin typeface="Arial"/>
+              </a:defRPr>
+            </a:pPr>
+            <a:r>
+              <a:t>O banco liderou ofertas passadas de Cobuccio, LF III, Residence Club. No LF III liderou três emissões entre 2023 e 2024, e a oferta de referência de 2026 saiu com o UBS BB — histórico que a coluna IBBA Coord?, restrita à oferta de referência, não mostra. O CSV resolvido traz as datas.</a:t>
+            </a:r>
+          </a:p>
+        </p:txBody>
+      </p:sp>
+      <p:sp>
+        <p:nvSpPr>
+          <p:cNvPr id="14" name="TextBox 13"/>
+          <p:cNvSpPr txBox="1"/>
+          <p:nvPr/>
+        </p:nvSpPr>
+        <p:spPr>
+          <a:xfrm>
+            <a:off x="566928" y="5724144"/>
+            <a:ext cx="2743200" cy="219456"/>
+          </a:xfrm>
+          <a:prstGeom prst="rect">
+            <a:avLst/>
+          </a:prstGeom>
+          <a:noFill/>
+        </p:spPr>
+        <p:txBody>
+          <a:bodyPr wrap="square" anchor="t" lIns="0" rIns="0" tIns="0" bIns="0">
+            <a:spAutoFit/>
+          </a:bodyPr>
+          <a:lstStyle/>
+          <a:p>
+            <a:pPr algn="l">
+              <a:defRPr sz="950" b="1">
                 <a:solidFill>
                   <a:srgbClr val="E36C0A"/>
                 </a:solidFill>
@@ -11217,14 +11289,14 @@
       </p:sp>
       <p:sp>
         <p:nvSpPr>
-          <p:cNvPr id="13" name="TextBox 12"/>
+          <p:cNvPr id="15" name="TextBox 14"/>
           <p:cNvSpPr txBox="1"/>
           <p:nvPr/>
         </p:nvSpPr>
         <p:spPr>
           <a:xfrm>
-            <a:off x="3493008" y="5596127"/>
-            <a:ext cx="8092440" cy="530352"/>
+            <a:off x="3493008" y="5724144"/>
+            <a:ext cx="8092440" cy="475488"/>
           </a:xfrm>
           <a:prstGeom prst="rect">
             <a:avLst/>
@@ -11238,7 +11310,7 @@
           <a:lstStyle/>
           <a:p>
             <a:pPr algn="l">
-              <a:defRPr sz="950" b="0">
+              <a:defRPr sz="900" b="0">
                 <a:solidFill>
                   <a:srgbClr val="5D6369"/>
                 </a:solidFill>
@@ -11253,7 +11325,7 @@
       </p:sp>
       <p:sp>
         <p:nvSpPr>
-          <p:cNvPr id="14" name="Rectangle 13"/>
+          <p:cNvPr id="16" name="Rectangle 15"/>
           <p:cNvSpPr/>
           <p:nvPr/>
         </p:nvSpPr>
@@ -11296,7 +11368,7 @@
       </p:sp>
       <p:sp>
         <p:nvSpPr>
-          <p:cNvPr id="15" name="TextBox 14"/>
+          <p:cNvPr id="17" name="TextBox 16"/>
           <p:cNvSpPr txBox="1"/>
           <p:nvPr/>
         </p:nvSpPr>
@@ -11332,7 +11404,7 @@
       </p:sp>
       <p:sp>
         <p:nvSpPr>
-          <p:cNvPr id="16" name="TextBox 15"/>
+          <p:cNvPr id="18" name="TextBox 17"/>
           <p:cNvSpPr txBox="1"/>
           <p:nvPr/>
         </p:nvSpPr>
